--- a/content/05-teaching-resources/slides/cyber-security/10-mitigation-backups-and-compliance.pptx
+++ b/content/05-teaching-resources/slides/cyber-security/10-mitigation-backups-and-compliance.pptx
@@ -10,12 +10,18 @@
     <p:sldId id="258" r:id="rId9"/>
     <p:sldId id="259" r:id="rId10"/>
     <p:sldId id="260" r:id="rId11"/>
-    <p:sldId id="261" r:id="rId12"/>
-    <p:sldId id="262" r:id="rId13"/>
-    <p:sldId id="263" r:id="rId14"/>
+    <p:sldId id="261" r:id="rId13"/>
+    <p:sldId id="262" r:id="rId14"/>
+    <p:sldId id="263" r:id="rId15"/>
     <p:sldId id="264" r:id="rId16"/>
     <p:sldId id="265" r:id="rId17"/>
     <p:sldId id="266" r:id="rId18"/>
+    <p:sldId id="267" r:id="rId19"/>
+    <p:sldId id="268" r:id="rId20"/>
+    <p:sldId id="269" r:id="rId21"/>
+    <p:sldId id="270" r:id="rId22"/>
+    <p:sldId id="271" r:id="rId23"/>
+    <p:sldId id="272" r:id="rId24"/>
   </p:sldIdLst>
   <p:sldSz cx="12191695" cy="6858000" type="screen4x3"/>
   <p:notesSz cx="6858000" cy="9144000"/>
@@ -512,7 +518,22 @@
           <a:lstStyle/>
           <a:p>
             <a:r>
-              <a:t>Give students a few minutes to answer on mini whiteboards or paper, then reveal the answers on the next slide.</a:t>
+              <a:t>Answers:</a:t>
+            </a:r>
+          </a:p>
+          <a:p>
+            <a:r>
+              <a:t>1. Access controls, monitoring and separation of duties.</a:t>
+            </a:r>
+          </a:p>
+          <a:p>
+            <a:r>
+              <a:t>2. Checking its security before trusting it with data.</a:t>
+            </a:r>
+          </a:p>
+          <a:p>
+            <a:r>
+              <a:t>3. Securely wiped and disposed of in line with the law.</a:t>
             </a:r>
           </a:p>
         </p:txBody>
@@ -582,7 +603,22 @@
           <a:lstStyle/>
           <a:p>
             <a:r>
-              <a:t>Talk through any answers the class found difficult.</a:t>
+              <a:t>Answers:</a:t>
+            </a:r>
+          </a:p>
+          <a:p>
+            <a:r>
+              <a:t>1. One that can't be changed, overwritten or deleted.</a:t>
+            </a:r>
+          </a:p>
+          <a:p>
+            <a:r>
+              <a:t>2. So victims can't recover without paying.</a:t>
+            </a:r>
+          </a:p>
+          <a:p>
+            <a:r>
+              <a:t>3. To prove the backups actually work.</a:t>
             </a:r>
           </a:p>
         </p:txBody>
@@ -608,6 +644,231 @@
 </file>
 
 <file path=ppt/notesSlides/notesSlide3.xml><?xml version="1.0" encoding="utf-8"?>
+<p:notes xmlns:a="http://schemas.openxmlformats.org/drawingml/2006/main" xmlns:p="http://schemas.openxmlformats.org/presentationml/2006/main" xmlns:r="http://schemas.openxmlformats.org/officeDocument/2006/relationships">
+  <p:cSld>
+    <p:spTree>
+      <p:nvGrpSpPr>
+        <p:cNvPr id="1" name=""/>
+        <p:cNvGrpSpPr/>
+        <p:nvPr/>
+      </p:nvGrpSpPr>
+      <p:grpSpPr>
+        <a:xfrm>
+          <a:off x="0" y="0"/>
+          <a:ext cx="0" cy="0"/>
+          <a:chOff x="0" y="0"/>
+          <a:chExt cx="0" cy="0"/>
+        </a:xfrm>
+      </p:grpSpPr>
+      <p:sp>
+        <p:nvSpPr>
+          <p:cNvPr id="2" name="Slide Image Placeholder 1"/>
+          <p:cNvSpPr>
+            <a:spLocks noGrp="1"/>
+          </p:cNvSpPr>
+          <p:nvPr>
+            <p:ph type="sldImg" idx="2"/>
+          </p:nvPr>
+        </p:nvSpPr>
+        <p:spPr/>
+      </p:sp>
+      <p:sp>
+        <p:nvSpPr>
+          <p:cNvPr id="3" name="Notes Placeholder 2"/>
+          <p:cNvSpPr>
+            <a:spLocks noGrp="1"/>
+          </p:cNvSpPr>
+          <p:nvPr>
+            <p:ph type="body" idx="3" sz="quarter"/>
+          </p:nvPr>
+        </p:nvSpPr>
+        <p:spPr/>
+        <p:txBody>
+          <a:bodyPr/>
+          <a:lstStyle/>
+          <a:p>
+            <a:r>
+              <a:t>Answers:</a:t>
+            </a:r>
+          </a:p>
+          <a:p>
+            <a:r>
+              <a:t>1. To keep them current and check they're followed.</a:t>
+            </a:r>
+          </a:p>
+          <a:p>
+            <a:r>
+              <a:t>2. Whether what actually happens matches what should happen.</a:t>
+            </a:r>
+          </a:p>
+          <a:p>
+            <a:r>
+              <a:t>3. ISO 27001.</a:t>
+            </a:r>
+          </a:p>
+        </p:txBody>
+      </p:sp>
+      <p:sp>
+        <p:nvSpPr>
+          <p:cNvPr id="4" name="Slide Number Placeholder 3"/>
+          <p:cNvSpPr>
+            <a:spLocks noGrp="1"/>
+          </p:cNvSpPr>
+          <p:nvPr>
+            <p:ph type="sldNum" idx="5" sz="quarter"/>
+          </p:nvPr>
+        </p:nvSpPr>
+        <p:spPr/>
+      </p:sp>
+    </p:spTree>
+  </p:cSld>
+  <p:clrMapOvr>
+    <a:masterClrMapping/>
+  </p:clrMapOvr>
+</p:notes>
+</file>
+
+<file path=ppt/notesSlides/notesSlide4.xml><?xml version="1.0" encoding="utf-8"?>
+<p:notes xmlns:a="http://schemas.openxmlformats.org/drawingml/2006/main" xmlns:p="http://schemas.openxmlformats.org/presentationml/2006/main" xmlns:r="http://schemas.openxmlformats.org/officeDocument/2006/relationships">
+  <p:cSld>
+    <p:spTree>
+      <p:nvGrpSpPr>
+        <p:cNvPr id="1" name=""/>
+        <p:cNvGrpSpPr/>
+        <p:nvPr/>
+      </p:nvGrpSpPr>
+      <p:grpSpPr>
+        <a:xfrm>
+          <a:off x="0" y="0"/>
+          <a:ext cx="0" cy="0"/>
+          <a:chOff x="0" y="0"/>
+          <a:chExt cx="0" cy="0"/>
+        </a:xfrm>
+      </p:grpSpPr>
+      <p:sp>
+        <p:nvSpPr>
+          <p:cNvPr id="2" name="Slide Image Placeholder 1"/>
+          <p:cNvSpPr>
+            <a:spLocks noGrp="1"/>
+          </p:cNvSpPr>
+          <p:nvPr>
+            <p:ph type="sldImg" idx="2"/>
+          </p:nvPr>
+        </p:nvSpPr>
+        <p:spPr/>
+      </p:sp>
+      <p:sp>
+        <p:nvSpPr>
+          <p:cNvPr id="3" name="Notes Placeholder 2"/>
+          <p:cNvSpPr>
+            <a:spLocks noGrp="1"/>
+          </p:cNvSpPr>
+          <p:nvPr>
+            <p:ph type="body" idx="3" sz="quarter"/>
+          </p:nvPr>
+        </p:nvSpPr>
+        <p:spPr/>
+        <p:txBody>
+          <a:bodyPr/>
+          <a:lstStyle/>
+          <a:p>
+            <a:r>
+              <a:t>Give students a few minutes to answer on mini whiteboards or paper, then reveal the answers on the next slide.</a:t>
+            </a:r>
+          </a:p>
+        </p:txBody>
+      </p:sp>
+      <p:sp>
+        <p:nvSpPr>
+          <p:cNvPr id="4" name="Slide Number Placeholder 3"/>
+          <p:cNvSpPr>
+            <a:spLocks noGrp="1"/>
+          </p:cNvSpPr>
+          <p:nvPr>
+            <p:ph type="sldNum" idx="5" sz="quarter"/>
+          </p:nvPr>
+        </p:nvSpPr>
+        <p:spPr/>
+      </p:sp>
+    </p:spTree>
+  </p:cSld>
+  <p:clrMapOvr>
+    <a:masterClrMapping/>
+  </p:clrMapOvr>
+</p:notes>
+</file>
+
+<file path=ppt/notesSlides/notesSlide5.xml><?xml version="1.0" encoding="utf-8"?>
+<p:notes xmlns:a="http://schemas.openxmlformats.org/drawingml/2006/main" xmlns:p="http://schemas.openxmlformats.org/presentationml/2006/main" xmlns:r="http://schemas.openxmlformats.org/officeDocument/2006/relationships">
+  <p:cSld>
+    <p:spTree>
+      <p:nvGrpSpPr>
+        <p:cNvPr id="1" name=""/>
+        <p:cNvGrpSpPr/>
+        <p:nvPr/>
+      </p:nvGrpSpPr>
+      <p:grpSpPr>
+        <a:xfrm>
+          <a:off x="0" y="0"/>
+          <a:ext cx="0" cy="0"/>
+          <a:chOff x="0" y="0"/>
+          <a:chExt cx="0" cy="0"/>
+        </a:xfrm>
+      </p:grpSpPr>
+      <p:sp>
+        <p:nvSpPr>
+          <p:cNvPr id="2" name="Slide Image Placeholder 1"/>
+          <p:cNvSpPr>
+            <a:spLocks noGrp="1"/>
+          </p:cNvSpPr>
+          <p:nvPr>
+            <p:ph type="sldImg" idx="2"/>
+          </p:nvPr>
+        </p:nvSpPr>
+        <p:spPr/>
+      </p:sp>
+      <p:sp>
+        <p:nvSpPr>
+          <p:cNvPr id="3" name="Notes Placeholder 2"/>
+          <p:cNvSpPr>
+            <a:spLocks noGrp="1"/>
+          </p:cNvSpPr>
+          <p:nvPr>
+            <p:ph type="body" idx="3" sz="quarter"/>
+          </p:nvPr>
+        </p:nvSpPr>
+        <p:spPr/>
+        <p:txBody>
+          <a:bodyPr/>
+          <a:lstStyle/>
+          <a:p>
+            <a:r>
+              <a:t>Talk through any answers the class found difficult.</a:t>
+            </a:r>
+          </a:p>
+        </p:txBody>
+      </p:sp>
+      <p:sp>
+        <p:nvSpPr>
+          <p:cNvPr id="4" name="Slide Number Placeholder 3"/>
+          <p:cNvSpPr>
+            <a:spLocks noGrp="1"/>
+          </p:cNvSpPr>
+          <p:nvPr>
+            <p:ph type="sldNum" idx="5" sz="quarter"/>
+          </p:nvPr>
+        </p:nvSpPr>
+        <p:spPr/>
+      </p:sp>
+    </p:spTree>
+  </p:cSld>
+  <p:clrMapOvr>
+    <a:masterClrMapping/>
+  </p:clrMapOvr>
+</p:notes>
+</file>
+
+<file path=ppt/notesSlides/notesSlide6.xml><?xml version="1.0" encoding="utf-8"?>
 <p:notes xmlns:a="http://schemas.openxmlformats.org/drawingml/2006/main" xmlns:p="http://schemas.openxmlformats.org/presentationml/2006/main" xmlns:r="http://schemas.openxmlformats.org/officeDocument/2006/relationships">
   <p:cSld>
     <p:spTree>
@@ -4056,7 +4317,7 @@
                 </a:solidFill>
                 <a:latin typeface="Cambria"/>
               </a:rPr>
-              <a:t>Activity: Ransomware-proof the backups</a:t>
+              <a:t>Policies that support risk mitigation</a:t>
             </a:r>
           </a:p>
         </p:txBody>
@@ -4123,6 +4384,3332 @@
                 <a:latin typeface="Calibri"/>
               </a:rPr>
               <a:t>10</a:t>
+            </a:r>
+          </a:p>
+        </p:txBody>
+      </p:sp>
+      <p:sp>
+        <p:nvSpPr>
+          <p:cNvPr id="6" name="Rounded Rectangle 5"/>
+          <p:cNvSpPr/>
+          <p:nvPr/>
+        </p:nvSpPr>
+        <p:spPr>
+          <a:xfrm>
+            <a:off x="548640" y="1600200"/>
+            <a:ext cx="5410047" cy="2148840"/>
+          </a:xfrm>
+          <a:prstGeom prst="roundRect">
+            <a:avLst>
+              <a:gd name="adj" fmla="val 6000"/>
+            </a:avLst>
+          </a:prstGeom>
+          <a:solidFill>
+            <a:srgbClr val="EAF3FF"/>
+          </a:solidFill>
+          <a:ln>
+            <a:noFill/>
+          </a:ln>
+          <a:effectLst/>
+        </p:spPr>
+        <p:style>
+          <a:lnRef idx="1">
+            <a:schemeClr val="accent1"/>
+          </a:lnRef>
+          <a:fillRef idx="3">
+            <a:schemeClr val="accent1"/>
+          </a:fillRef>
+          <a:effectRef idx="2">
+            <a:schemeClr val="accent1"/>
+          </a:effectRef>
+          <a:fontRef idx="minor">
+            <a:schemeClr val="lt1"/>
+          </a:fontRef>
+        </p:style>
+        <p:txBody>
+          <a:bodyPr rtlCol="0" anchor="ctr"/>
+          <a:lstStyle/>
+          <a:p/>
+        </p:txBody>
+      </p:sp>
+      <p:sp>
+        <p:nvSpPr>
+          <p:cNvPr id="7" name="Oval 6"/>
+          <p:cNvSpPr/>
+          <p:nvPr/>
+        </p:nvSpPr>
+        <p:spPr>
+          <a:xfrm>
+            <a:off x="777240" y="1828800"/>
+            <a:ext cx="457200" cy="457200"/>
+          </a:xfrm>
+          <a:prstGeom prst="ellipse">
+            <a:avLst/>
+          </a:prstGeom>
+          <a:solidFill>
+            <a:srgbClr val="E0463A"/>
+          </a:solidFill>
+          <a:ln>
+            <a:noFill/>
+          </a:ln>
+          <a:effectLst/>
+        </p:spPr>
+        <p:style>
+          <a:lnRef idx="1">
+            <a:schemeClr val="accent1"/>
+          </a:lnRef>
+          <a:fillRef idx="3">
+            <a:schemeClr val="accent1"/>
+          </a:fillRef>
+          <a:effectRef idx="2">
+            <a:schemeClr val="accent1"/>
+          </a:effectRef>
+          <a:fontRef idx="minor">
+            <a:schemeClr val="lt1"/>
+          </a:fontRef>
+        </p:style>
+        <p:txBody>
+          <a:bodyPr rtlCol="0" anchor="ctr" lIns="0" rIns="0" tIns="0" bIns="0"/>
+          <a:lstStyle/>
+          <a:p>
+            <a:pPr algn="ctr"/>
+            <a:r>
+              <a:rPr sz="1500" b="1">
+                <a:solidFill>
+                  <a:srgbClr val="FFFFFF"/>
+                </a:solidFill>
+                <a:latin typeface="Calibri"/>
+              </a:rPr>
+              <a:t>1</a:t>
+            </a:r>
+          </a:p>
+        </p:txBody>
+      </p:sp>
+      <p:sp>
+        <p:nvSpPr>
+          <p:cNvPr id="8" name="TextBox 7"/>
+          <p:cNvSpPr txBox="1"/>
+          <p:nvPr/>
+        </p:nvSpPr>
+        <p:spPr>
+          <a:xfrm>
+            <a:off x="1371600" y="1801368"/>
+            <a:ext cx="4404207" cy="512064"/>
+          </a:xfrm>
+          <a:prstGeom prst="rect">
+            <a:avLst/>
+          </a:prstGeom>
+          <a:noFill/>
+        </p:spPr>
+        <p:txBody>
+          <a:bodyPr wrap="square" anchor="ctr" lIns="0" rIns="0" tIns="0" bIns="0"/>
+          <a:lstStyle/>
+          <a:p>
+            <a:pPr algn="l"/>
+            <a:r>
+              <a:rPr sz="1900" b="1" i="0">
+                <a:solidFill>
+                  <a:srgbClr val="03306E"/>
+                </a:solidFill>
+                <a:latin typeface="Calibri"/>
+              </a:rPr>
+              <a:t>Data</a:t>
+            </a:r>
+          </a:p>
+        </p:txBody>
+      </p:sp>
+      <p:sp>
+        <p:nvSpPr>
+          <p:cNvPr id="9" name="TextBox 8"/>
+          <p:cNvSpPr txBox="1"/>
+          <p:nvPr/>
+        </p:nvSpPr>
+        <p:spPr>
+          <a:xfrm>
+            <a:off x="777240" y="2468880"/>
+            <a:ext cx="4952847" cy="1143000"/>
+          </a:xfrm>
+          <a:prstGeom prst="rect">
+            <a:avLst/>
+          </a:prstGeom>
+          <a:noFill/>
+        </p:spPr>
+        <p:txBody>
+          <a:bodyPr wrap="square" anchor="t" lIns="0" rIns="0" tIns="0" bIns="0"/>
+          <a:lstStyle/>
+          <a:p>
+            <a:pPr algn="l"/>
+            <a:r>
+              <a:rPr sz="2000" b="0" i="0">
+                <a:solidFill>
+                  <a:srgbClr val="202122"/>
+                </a:solidFill>
+                <a:latin typeface="Calibri"/>
+              </a:rPr>
+              <a:t>Data protection, data retention, asset classification.</a:t>
+            </a:r>
+          </a:p>
+        </p:txBody>
+      </p:sp>
+      <p:sp>
+        <p:nvSpPr>
+          <p:cNvPr id="10" name="Rounded Rectangle 9"/>
+          <p:cNvSpPr/>
+          <p:nvPr/>
+        </p:nvSpPr>
+        <p:spPr>
+          <a:xfrm>
+            <a:off x="6233007" y="1600200"/>
+            <a:ext cx="5410047" cy="2148840"/>
+          </a:xfrm>
+          <a:prstGeom prst="roundRect">
+            <a:avLst>
+              <a:gd name="adj" fmla="val 6000"/>
+            </a:avLst>
+          </a:prstGeom>
+          <a:solidFill>
+            <a:srgbClr val="EAF3FF"/>
+          </a:solidFill>
+          <a:ln>
+            <a:noFill/>
+          </a:ln>
+          <a:effectLst/>
+        </p:spPr>
+        <p:style>
+          <a:lnRef idx="1">
+            <a:schemeClr val="accent1"/>
+          </a:lnRef>
+          <a:fillRef idx="3">
+            <a:schemeClr val="accent1"/>
+          </a:fillRef>
+          <a:effectRef idx="2">
+            <a:schemeClr val="accent1"/>
+          </a:effectRef>
+          <a:fontRef idx="minor">
+            <a:schemeClr val="lt1"/>
+          </a:fontRef>
+        </p:style>
+        <p:txBody>
+          <a:bodyPr rtlCol="0" anchor="ctr"/>
+          <a:lstStyle/>
+          <a:p/>
+        </p:txBody>
+      </p:sp>
+      <p:sp>
+        <p:nvSpPr>
+          <p:cNvPr id="11" name="Oval 10"/>
+          <p:cNvSpPr/>
+          <p:nvPr/>
+        </p:nvSpPr>
+        <p:spPr>
+          <a:xfrm>
+            <a:off x="6461607" y="1828800"/>
+            <a:ext cx="457200" cy="457200"/>
+          </a:xfrm>
+          <a:prstGeom prst="ellipse">
+            <a:avLst/>
+          </a:prstGeom>
+          <a:solidFill>
+            <a:srgbClr val="E0463A"/>
+          </a:solidFill>
+          <a:ln>
+            <a:noFill/>
+          </a:ln>
+          <a:effectLst/>
+        </p:spPr>
+        <p:style>
+          <a:lnRef idx="1">
+            <a:schemeClr val="accent1"/>
+          </a:lnRef>
+          <a:fillRef idx="3">
+            <a:schemeClr val="accent1"/>
+          </a:fillRef>
+          <a:effectRef idx="2">
+            <a:schemeClr val="accent1"/>
+          </a:effectRef>
+          <a:fontRef idx="minor">
+            <a:schemeClr val="lt1"/>
+          </a:fontRef>
+        </p:style>
+        <p:txBody>
+          <a:bodyPr rtlCol="0" anchor="ctr" lIns="0" rIns="0" tIns="0" bIns="0"/>
+          <a:lstStyle/>
+          <a:p>
+            <a:pPr algn="ctr"/>
+            <a:r>
+              <a:rPr sz="1500" b="1">
+                <a:solidFill>
+                  <a:srgbClr val="FFFFFF"/>
+                </a:solidFill>
+                <a:latin typeface="Calibri"/>
+              </a:rPr>
+              <a:t>2</a:t>
+            </a:r>
+          </a:p>
+        </p:txBody>
+      </p:sp>
+      <p:sp>
+        <p:nvSpPr>
+          <p:cNvPr id="12" name="TextBox 11"/>
+          <p:cNvSpPr txBox="1"/>
+          <p:nvPr/>
+        </p:nvSpPr>
+        <p:spPr>
+          <a:xfrm>
+            <a:off x="7055967" y="1801368"/>
+            <a:ext cx="4404207" cy="512064"/>
+          </a:xfrm>
+          <a:prstGeom prst="rect">
+            <a:avLst/>
+          </a:prstGeom>
+          <a:noFill/>
+        </p:spPr>
+        <p:txBody>
+          <a:bodyPr wrap="square" anchor="ctr" lIns="0" rIns="0" tIns="0" bIns="0"/>
+          <a:lstStyle/>
+          <a:p>
+            <a:pPr algn="l"/>
+            <a:r>
+              <a:rPr sz="1900" b="1" i="0">
+                <a:solidFill>
+                  <a:srgbClr val="03306E"/>
+                </a:solidFill>
+                <a:latin typeface="Calibri"/>
+              </a:rPr>
+              <a:t>Access</a:t>
+            </a:r>
+          </a:p>
+        </p:txBody>
+      </p:sp>
+      <p:sp>
+        <p:nvSpPr>
+          <p:cNvPr id="13" name="TextBox 12"/>
+          <p:cNvSpPr txBox="1"/>
+          <p:nvPr/>
+        </p:nvSpPr>
+        <p:spPr>
+          <a:xfrm>
+            <a:off x="6461607" y="2468880"/>
+            <a:ext cx="4952847" cy="1143000"/>
+          </a:xfrm>
+          <a:prstGeom prst="rect">
+            <a:avLst/>
+          </a:prstGeom>
+          <a:noFill/>
+        </p:spPr>
+        <p:txBody>
+          <a:bodyPr wrap="square" anchor="t" lIns="0" rIns="0" tIns="0" bIns="0"/>
+          <a:lstStyle/>
+          <a:p>
+            <a:pPr algn="l"/>
+            <a:r>
+              <a:rPr sz="2000" b="0" i="0">
+                <a:solidFill>
+                  <a:srgbClr val="202122"/>
+                </a:solidFill>
+                <a:latin typeface="Calibri"/>
+              </a:rPr>
+              <a:t>Access control, password, acceptable use.</a:t>
+            </a:r>
+          </a:p>
+        </p:txBody>
+      </p:sp>
+      <p:sp>
+        <p:nvSpPr>
+          <p:cNvPr id="14" name="Rounded Rectangle 13"/>
+          <p:cNvSpPr/>
+          <p:nvPr/>
+        </p:nvSpPr>
+        <p:spPr>
+          <a:xfrm>
+            <a:off x="548640" y="4023360"/>
+            <a:ext cx="5410047" cy="2148840"/>
+          </a:xfrm>
+          <a:prstGeom prst="roundRect">
+            <a:avLst>
+              <a:gd name="adj" fmla="val 6000"/>
+            </a:avLst>
+          </a:prstGeom>
+          <a:solidFill>
+            <a:srgbClr val="EAF3FF"/>
+          </a:solidFill>
+          <a:ln>
+            <a:noFill/>
+          </a:ln>
+          <a:effectLst/>
+        </p:spPr>
+        <p:style>
+          <a:lnRef idx="1">
+            <a:schemeClr val="accent1"/>
+          </a:lnRef>
+          <a:fillRef idx="3">
+            <a:schemeClr val="accent1"/>
+          </a:fillRef>
+          <a:effectRef idx="2">
+            <a:schemeClr val="accent1"/>
+          </a:effectRef>
+          <a:fontRef idx="minor">
+            <a:schemeClr val="lt1"/>
+          </a:fontRef>
+        </p:style>
+        <p:txBody>
+          <a:bodyPr rtlCol="0" anchor="ctr"/>
+          <a:lstStyle/>
+          <a:p/>
+        </p:txBody>
+      </p:sp>
+      <p:sp>
+        <p:nvSpPr>
+          <p:cNvPr id="15" name="Oval 14"/>
+          <p:cNvSpPr/>
+          <p:nvPr/>
+        </p:nvSpPr>
+        <p:spPr>
+          <a:xfrm>
+            <a:off x="777240" y="4251960"/>
+            <a:ext cx="457200" cy="457200"/>
+          </a:xfrm>
+          <a:prstGeom prst="ellipse">
+            <a:avLst/>
+          </a:prstGeom>
+          <a:solidFill>
+            <a:srgbClr val="E0463A"/>
+          </a:solidFill>
+          <a:ln>
+            <a:noFill/>
+          </a:ln>
+          <a:effectLst/>
+        </p:spPr>
+        <p:style>
+          <a:lnRef idx="1">
+            <a:schemeClr val="accent1"/>
+          </a:lnRef>
+          <a:fillRef idx="3">
+            <a:schemeClr val="accent1"/>
+          </a:fillRef>
+          <a:effectRef idx="2">
+            <a:schemeClr val="accent1"/>
+          </a:effectRef>
+          <a:fontRef idx="minor">
+            <a:schemeClr val="lt1"/>
+          </a:fontRef>
+        </p:style>
+        <p:txBody>
+          <a:bodyPr rtlCol="0" anchor="ctr" lIns="0" rIns="0" tIns="0" bIns="0"/>
+          <a:lstStyle/>
+          <a:p>
+            <a:pPr algn="ctr"/>
+            <a:r>
+              <a:rPr sz="1500" b="1">
+                <a:solidFill>
+                  <a:srgbClr val="FFFFFF"/>
+                </a:solidFill>
+                <a:latin typeface="Calibri"/>
+              </a:rPr>
+              <a:t>3</a:t>
+            </a:r>
+          </a:p>
+        </p:txBody>
+      </p:sp>
+      <p:sp>
+        <p:nvSpPr>
+          <p:cNvPr id="16" name="TextBox 15"/>
+          <p:cNvSpPr txBox="1"/>
+          <p:nvPr/>
+        </p:nvSpPr>
+        <p:spPr>
+          <a:xfrm>
+            <a:off x="1371600" y="4224528"/>
+            <a:ext cx="4404207" cy="512064"/>
+          </a:xfrm>
+          <a:prstGeom prst="rect">
+            <a:avLst/>
+          </a:prstGeom>
+          <a:noFill/>
+        </p:spPr>
+        <p:txBody>
+          <a:bodyPr wrap="square" anchor="ctr" lIns="0" rIns="0" tIns="0" bIns="0"/>
+          <a:lstStyle/>
+          <a:p>
+            <a:pPr algn="l"/>
+            <a:r>
+              <a:rPr sz="1900" b="1" i="0">
+                <a:solidFill>
+                  <a:srgbClr val="03306E"/>
+                </a:solidFill>
+                <a:latin typeface="Calibri"/>
+              </a:rPr>
+              <a:t>Devices</a:t>
+            </a:r>
+          </a:p>
+        </p:txBody>
+      </p:sp>
+      <p:sp>
+        <p:nvSpPr>
+          <p:cNvPr id="17" name="TextBox 16"/>
+          <p:cNvSpPr txBox="1"/>
+          <p:nvPr/>
+        </p:nvSpPr>
+        <p:spPr>
+          <a:xfrm>
+            <a:off x="777240" y="4892040"/>
+            <a:ext cx="4952847" cy="1143000"/>
+          </a:xfrm>
+          <a:prstGeom prst="rect">
+            <a:avLst/>
+          </a:prstGeom>
+          <a:noFill/>
+        </p:spPr>
+        <p:txBody>
+          <a:bodyPr wrap="square" anchor="t" lIns="0" rIns="0" tIns="0" bIns="0"/>
+          <a:lstStyle/>
+          <a:p>
+            <a:pPr algn="l"/>
+            <a:r>
+              <a:rPr sz="2000" b="0" i="0">
+                <a:solidFill>
+                  <a:srgbClr val="202122"/>
+                </a:solidFill>
+                <a:latin typeface="Calibri"/>
+              </a:rPr>
+              <a:t>Mobile device, BYOD, asset disposal.</a:t>
+            </a:r>
+          </a:p>
+        </p:txBody>
+      </p:sp>
+      <p:sp>
+        <p:nvSpPr>
+          <p:cNvPr id="18" name="Rounded Rectangle 17"/>
+          <p:cNvSpPr/>
+          <p:nvPr/>
+        </p:nvSpPr>
+        <p:spPr>
+          <a:xfrm>
+            <a:off x="6233007" y="4023360"/>
+            <a:ext cx="5410047" cy="2148840"/>
+          </a:xfrm>
+          <a:prstGeom prst="roundRect">
+            <a:avLst>
+              <a:gd name="adj" fmla="val 6000"/>
+            </a:avLst>
+          </a:prstGeom>
+          <a:solidFill>
+            <a:srgbClr val="EAF3FF"/>
+          </a:solidFill>
+          <a:ln>
+            <a:noFill/>
+          </a:ln>
+          <a:effectLst/>
+        </p:spPr>
+        <p:style>
+          <a:lnRef idx="1">
+            <a:schemeClr val="accent1"/>
+          </a:lnRef>
+          <a:fillRef idx="3">
+            <a:schemeClr val="accent1"/>
+          </a:fillRef>
+          <a:effectRef idx="2">
+            <a:schemeClr val="accent1"/>
+          </a:effectRef>
+          <a:fontRef idx="minor">
+            <a:schemeClr val="lt1"/>
+          </a:fontRef>
+        </p:style>
+        <p:txBody>
+          <a:bodyPr rtlCol="0" anchor="ctr"/>
+          <a:lstStyle/>
+          <a:p/>
+        </p:txBody>
+      </p:sp>
+      <p:sp>
+        <p:nvSpPr>
+          <p:cNvPr id="19" name="Oval 18"/>
+          <p:cNvSpPr/>
+          <p:nvPr/>
+        </p:nvSpPr>
+        <p:spPr>
+          <a:xfrm>
+            <a:off x="6461607" y="4251960"/>
+            <a:ext cx="457200" cy="457200"/>
+          </a:xfrm>
+          <a:prstGeom prst="ellipse">
+            <a:avLst/>
+          </a:prstGeom>
+          <a:solidFill>
+            <a:srgbClr val="E0463A"/>
+          </a:solidFill>
+          <a:ln>
+            <a:noFill/>
+          </a:ln>
+          <a:effectLst/>
+        </p:spPr>
+        <p:style>
+          <a:lnRef idx="1">
+            <a:schemeClr val="accent1"/>
+          </a:lnRef>
+          <a:fillRef idx="3">
+            <a:schemeClr val="accent1"/>
+          </a:fillRef>
+          <a:effectRef idx="2">
+            <a:schemeClr val="accent1"/>
+          </a:effectRef>
+          <a:fontRef idx="minor">
+            <a:schemeClr val="lt1"/>
+          </a:fontRef>
+        </p:style>
+        <p:txBody>
+          <a:bodyPr rtlCol="0" anchor="ctr" lIns="0" rIns="0" tIns="0" bIns="0"/>
+          <a:lstStyle/>
+          <a:p>
+            <a:pPr algn="ctr"/>
+            <a:r>
+              <a:rPr sz="1500" b="1">
+                <a:solidFill>
+                  <a:srgbClr val="FFFFFF"/>
+                </a:solidFill>
+                <a:latin typeface="Calibri"/>
+              </a:rPr>
+              <a:t>4</a:t>
+            </a:r>
+          </a:p>
+        </p:txBody>
+      </p:sp>
+      <p:sp>
+        <p:nvSpPr>
+          <p:cNvPr id="20" name="TextBox 19"/>
+          <p:cNvSpPr txBox="1"/>
+          <p:nvPr/>
+        </p:nvSpPr>
+        <p:spPr>
+          <a:xfrm>
+            <a:off x="7055967" y="4224528"/>
+            <a:ext cx="4404207" cy="512064"/>
+          </a:xfrm>
+          <a:prstGeom prst="rect">
+            <a:avLst/>
+          </a:prstGeom>
+          <a:noFill/>
+        </p:spPr>
+        <p:txBody>
+          <a:bodyPr wrap="square" anchor="ctr" lIns="0" rIns="0" tIns="0" bIns="0"/>
+          <a:lstStyle/>
+          <a:p>
+            <a:pPr algn="l"/>
+            <a:r>
+              <a:rPr sz="1900" b="1" i="0">
+                <a:solidFill>
+                  <a:srgbClr val="03306E"/>
+                </a:solidFill>
+                <a:latin typeface="Calibri"/>
+              </a:rPr>
+              <a:t>Resilience</a:t>
+            </a:r>
+          </a:p>
+        </p:txBody>
+      </p:sp>
+      <p:sp>
+        <p:nvSpPr>
+          <p:cNvPr id="21" name="TextBox 20"/>
+          <p:cNvSpPr txBox="1"/>
+          <p:nvPr/>
+        </p:nvSpPr>
+        <p:spPr>
+          <a:xfrm>
+            <a:off x="6461607" y="4892040"/>
+            <a:ext cx="4952847" cy="1143000"/>
+          </a:xfrm>
+          <a:prstGeom prst="rect">
+            <a:avLst/>
+          </a:prstGeom>
+          <a:noFill/>
+        </p:spPr>
+        <p:txBody>
+          <a:bodyPr wrap="square" anchor="t" lIns="0" rIns="0" tIns="0" bIns="0"/>
+          <a:lstStyle/>
+          <a:p>
+            <a:pPr algn="l"/>
+            <a:r>
+              <a:rPr sz="2000" b="0" i="0">
+                <a:solidFill>
+                  <a:srgbClr val="202122"/>
+                </a:solidFill>
+                <a:latin typeface="Calibri"/>
+              </a:rPr>
+              <a:t>Backup policy, incident response procedure, information security policy.</a:t>
+            </a:r>
+          </a:p>
+        </p:txBody>
+      </p:sp>
+    </p:spTree>
+  </p:cSld>
+  <p:clrMapOvr>
+    <a:masterClrMapping/>
+  </p:clrMapOvr>
+</p:sld>
+</file>
+
+<file path=ppt/slides/slide11.xml><?xml version="1.0" encoding="utf-8"?>
+<p:sld xmlns:a="http://schemas.openxmlformats.org/drawingml/2006/main" xmlns:p="http://schemas.openxmlformats.org/presentationml/2006/main" xmlns:r="http://schemas.openxmlformats.org/officeDocument/2006/relationships">
+  <p:cSld>
+    <p:bg>
+      <p:bgPr>
+        <a:solidFill>
+          <a:srgbClr val="FFFFFF"/>
+        </a:solidFill>
+        <a:effectLst/>
+      </p:bgPr>
+    </p:bg>
+    <p:spTree>
+      <p:nvGrpSpPr>
+        <p:cNvPr id="1" name=""/>
+        <p:cNvGrpSpPr/>
+        <p:nvPr/>
+      </p:nvGrpSpPr>
+      <p:grpSpPr/>
+      <p:sp>
+        <p:nvSpPr>
+          <p:cNvPr id="2" name="TextBox 1"/>
+          <p:cNvSpPr txBox="1"/>
+          <p:nvPr/>
+        </p:nvSpPr>
+        <p:spPr>
+          <a:xfrm>
+            <a:off x="548640" y="320040"/>
+            <a:ext cx="11094415" cy="274320"/>
+          </a:xfrm>
+          <a:prstGeom prst="rect">
+            <a:avLst/>
+          </a:prstGeom>
+          <a:noFill/>
+        </p:spPr>
+        <p:txBody>
+          <a:bodyPr wrap="square" anchor="t" lIns="0" rIns="0" tIns="0" bIns="0"/>
+          <a:lstStyle/>
+          <a:p>
+            <a:pPr algn="l"/>
+            <a:r>
+              <a:rPr sz="1100" b="1" i="0">
+                <a:solidFill>
+                  <a:srgbClr val="54595D"/>
+                </a:solidFill>
+                <a:latin typeface="Calibri"/>
+              </a:rPr>
+              <a:t>CYBER SECURITY  ·  Cyber Security Content Area 2</a:t>
+            </a:r>
+          </a:p>
+        </p:txBody>
+      </p:sp>
+      <p:sp>
+        <p:nvSpPr>
+          <p:cNvPr id="3" name="TextBox 2"/>
+          <p:cNvSpPr txBox="1"/>
+          <p:nvPr/>
+        </p:nvSpPr>
+        <p:spPr>
+          <a:xfrm>
+            <a:off x="548640" y="566928"/>
+            <a:ext cx="11094415" cy="822960"/>
+          </a:xfrm>
+          <a:prstGeom prst="rect">
+            <a:avLst/>
+          </a:prstGeom>
+          <a:noFill/>
+        </p:spPr>
+        <p:txBody>
+          <a:bodyPr wrap="square" anchor="ctr" lIns="0" rIns="0" tIns="0" bIns="0"/>
+          <a:lstStyle/>
+          <a:p>
+            <a:pPr algn="l"/>
+            <a:r>
+              <a:rPr sz="3200" b="1" i="0">
+                <a:solidFill>
+                  <a:srgbClr val="03306E"/>
+                </a:solidFill>
+                <a:latin typeface="Cambria"/>
+              </a:rPr>
+              <a:t>Monitoring compliance</a:t>
+            </a:r>
+          </a:p>
+        </p:txBody>
+      </p:sp>
+      <p:sp>
+        <p:nvSpPr>
+          <p:cNvPr id="4" name="TextBox 3"/>
+          <p:cNvSpPr txBox="1"/>
+          <p:nvPr/>
+        </p:nvSpPr>
+        <p:spPr>
+          <a:xfrm>
+            <a:off x="548640" y="6446520"/>
+            <a:ext cx="8229600" cy="274320"/>
+          </a:xfrm>
+          <a:prstGeom prst="rect">
+            <a:avLst/>
+          </a:prstGeom>
+          <a:noFill/>
+        </p:spPr>
+        <p:txBody>
+          <a:bodyPr wrap="square" anchor="t" lIns="0" rIns="0" tIns="0" bIns="0"/>
+          <a:lstStyle/>
+          <a:p>
+            <a:pPr algn="l"/>
+            <a:r>
+              <a:rPr sz="1000" b="0" i="0">
+                <a:solidFill>
+                  <a:srgbClr val="54595D"/>
+                </a:solidFill>
+                <a:latin typeface="Calibri"/>
+              </a:rPr>
+              <a:t>Digital Support and Security T Level  ·  Mitigation, Backups, Policies and Compliance</a:t>
+            </a:r>
+          </a:p>
+        </p:txBody>
+      </p:sp>
+      <p:sp>
+        <p:nvSpPr>
+          <p:cNvPr id="5" name="TextBox 4"/>
+          <p:cNvSpPr txBox="1"/>
+          <p:nvPr/>
+        </p:nvSpPr>
+        <p:spPr>
+          <a:xfrm>
+            <a:off x="10728655" y="6446520"/>
+            <a:ext cx="914400" cy="274320"/>
+          </a:xfrm>
+          <a:prstGeom prst="rect">
+            <a:avLst/>
+          </a:prstGeom>
+          <a:noFill/>
+        </p:spPr>
+        <p:txBody>
+          <a:bodyPr wrap="square" anchor="t" lIns="0" rIns="0" tIns="0" bIns="0"/>
+          <a:lstStyle/>
+          <a:p>
+            <a:pPr algn="r"/>
+            <a:r>
+              <a:rPr sz="1000" b="0" i="0">
+                <a:solidFill>
+                  <a:srgbClr val="54595D"/>
+                </a:solidFill>
+                <a:latin typeface="Calibri"/>
+              </a:rPr>
+              <a:t>11</a:t>
+            </a:r>
+          </a:p>
+        </p:txBody>
+      </p:sp>
+      <p:sp>
+        <p:nvSpPr>
+          <p:cNvPr id="6" name="TextBox 5"/>
+          <p:cNvSpPr txBox="1"/>
+          <p:nvPr/>
+        </p:nvSpPr>
+        <p:spPr>
+          <a:xfrm>
+            <a:off x="548640" y="1554480"/>
+            <a:ext cx="6720840" cy="4617720"/>
+          </a:xfrm>
+          <a:prstGeom prst="rect">
+            <a:avLst/>
+          </a:prstGeom>
+          <a:noFill/>
+        </p:spPr>
+        <p:txBody>
+          <a:bodyPr wrap="square" lIns="0" rIns="0" tIns="0" bIns="0">
+            <a:spAutoFit/>
+          </a:bodyPr>
+          <a:lstStyle/>
+          <a:p>
+            <a:pPr>
+              <a:spcAft>
+                <a:spcPts val="1320"/>
+              </a:spcAft>
+            </a:pPr>
+            <a:r>
+              <a:rPr sz="2200" b="0">
+                <a:solidFill>
+                  <a:srgbClr val="202122"/>
+                </a:solidFill>
+                <a:latin typeface="Calibri"/>
+              </a:rPr>
+              <a:t>Policies only protect an organisation if people follow them and they stay up to date.</a:t>
+            </a:r>
+          </a:p>
+          <a:p>
+            <a:pPr>
+              <a:spcAft>
+                <a:spcPts val="1320"/>
+              </a:spcAft>
+            </a:pPr>
+            <a:r>
+              <a:rPr sz="2200" b="0">
+                <a:solidFill>
+                  <a:srgbClr val="202122"/>
+                </a:solidFill>
+                <a:latin typeface="Calibri"/>
+              </a:rPr>
+              <a:t>Compliance monitoring audits processes and policies, such as reviewing the information security policy each year, and improves them where needed.</a:t>
+            </a:r>
+          </a:p>
+          <a:p>
+            <a:pPr>
+              <a:spcAft>
+                <a:spcPts val="1320"/>
+              </a:spcAft>
+            </a:pPr>
+            <a:r>
+              <a:rPr sz="2200" b="0">
+                <a:solidFill>
+                  <a:srgbClr val="202122"/>
+                </a:solidFill>
+                <a:latin typeface="Calibri"/>
+              </a:rPr>
+              <a:t>It compares and checks the accuracy of processes, logs and incident reports: do the logs show what the procedures say should happen?</a:t>
+            </a:r>
+          </a:p>
+          <a:p>
+            <a:pPr>
+              <a:spcAft>
+                <a:spcPts val="1320"/>
+              </a:spcAft>
+            </a:pPr>
+            <a:r>
+              <a:rPr sz="2200" b="0">
+                <a:solidFill>
+                  <a:srgbClr val="202122"/>
+                </a:solidFill>
+                <a:latin typeface="Calibri"/>
+              </a:rPr>
+              <a:t>It also checks the organisation meets the ISO standards it claims, such as ISO 27001.</a:t>
+            </a:r>
+          </a:p>
+        </p:txBody>
+      </p:sp>
+      <p:sp>
+        <p:nvSpPr>
+          <p:cNvPr id="7" name="Rounded Rectangle 6"/>
+          <p:cNvSpPr/>
+          <p:nvPr/>
+        </p:nvSpPr>
+        <p:spPr>
+          <a:xfrm>
+            <a:off x="7772400" y="1554480"/>
+            <a:ext cx="3867912" cy="4526280"/>
+          </a:xfrm>
+          <a:prstGeom prst="roundRect">
+            <a:avLst>
+              <a:gd name="adj" fmla="val 8000"/>
+            </a:avLst>
+          </a:prstGeom>
+          <a:solidFill>
+            <a:srgbClr val="03306E"/>
+          </a:solidFill>
+          <a:ln>
+            <a:noFill/>
+          </a:ln>
+          <a:effectLst/>
+        </p:spPr>
+        <p:style>
+          <a:lnRef idx="1">
+            <a:schemeClr val="accent1"/>
+          </a:lnRef>
+          <a:fillRef idx="3">
+            <a:schemeClr val="accent1"/>
+          </a:fillRef>
+          <a:effectRef idx="2">
+            <a:schemeClr val="accent1"/>
+          </a:effectRef>
+          <a:fontRef idx="minor">
+            <a:schemeClr val="lt1"/>
+          </a:fontRef>
+        </p:style>
+        <p:txBody>
+          <a:bodyPr rtlCol="0" anchor="ctr"/>
+          <a:lstStyle/>
+          <a:p/>
+        </p:txBody>
+      </p:sp>
+      <p:sp>
+        <p:nvSpPr>
+          <p:cNvPr id="8" name="Oval 7"/>
+          <p:cNvSpPr/>
+          <p:nvPr/>
+        </p:nvSpPr>
+        <p:spPr>
+          <a:xfrm>
+            <a:off x="8046720" y="1828800"/>
+            <a:ext cx="548640" cy="548640"/>
+          </a:xfrm>
+          <a:prstGeom prst="ellipse">
+            <a:avLst/>
+          </a:prstGeom>
+          <a:solidFill>
+            <a:srgbClr val="E0463A"/>
+          </a:solidFill>
+          <a:ln>
+            <a:noFill/>
+          </a:ln>
+          <a:effectLst/>
+        </p:spPr>
+        <p:style>
+          <a:lnRef idx="1">
+            <a:schemeClr val="accent1"/>
+          </a:lnRef>
+          <a:fillRef idx="3">
+            <a:schemeClr val="accent1"/>
+          </a:fillRef>
+          <a:effectRef idx="2">
+            <a:schemeClr val="accent1"/>
+          </a:effectRef>
+          <a:fontRef idx="minor">
+            <a:schemeClr val="lt1"/>
+          </a:fontRef>
+        </p:style>
+        <p:txBody>
+          <a:bodyPr rtlCol="0" anchor="ctr" lIns="0" rIns="0" tIns="0" bIns="0"/>
+          <a:lstStyle/>
+          <a:p>
+            <a:pPr algn="ctr"/>
+            <a:r>
+              <a:rPr sz="1300" b="1">
+                <a:solidFill>
+                  <a:srgbClr val="FFFFFF"/>
+                </a:solidFill>
+                <a:latin typeface="Calibri"/>
+              </a:rPr>
+              <a:t>e.g.</a:t>
+            </a:r>
+          </a:p>
+        </p:txBody>
+      </p:sp>
+      <p:sp>
+        <p:nvSpPr>
+          <p:cNvPr id="9" name="TextBox 8"/>
+          <p:cNvSpPr txBox="1"/>
+          <p:nvPr/>
+        </p:nvSpPr>
+        <p:spPr>
+          <a:xfrm>
+            <a:off x="8046720" y="2560320"/>
+            <a:ext cx="3291840" cy="365760"/>
+          </a:xfrm>
+          <a:prstGeom prst="rect">
+            <a:avLst/>
+          </a:prstGeom>
+          <a:noFill/>
+        </p:spPr>
+        <p:txBody>
+          <a:bodyPr wrap="square" anchor="t" lIns="0" rIns="0" tIns="0" bIns="0"/>
+          <a:lstStyle/>
+          <a:p>
+            <a:pPr algn="l"/>
+            <a:r>
+              <a:rPr sz="1300" b="1" i="0">
+                <a:solidFill>
+                  <a:srgbClr val="A9C8F0"/>
+                </a:solidFill>
+                <a:latin typeface="Calibri"/>
+              </a:rPr>
+              <a:t>EXAMPLE</a:t>
+            </a:r>
+          </a:p>
+        </p:txBody>
+      </p:sp>
+      <p:sp>
+        <p:nvSpPr>
+          <p:cNvPr id="10" name="TextBox 9"/>
+          <p:cNvSpPr txBox="1"/>
+          <p:nvPr/>
+        </p:nvSpPr>
+        <p:spPr>
+          <a:xfrm>
+            <a:off x="8046720" y="2971800"/>
+            <a:ext cx="3291840" cy="2971800"/>
+          </a:xfrm>
+          <a:prstGeom prst="rect">
+            <a:avLst/>
+          </a:prstGeom>
+          <a:noFill/>
+        </p:spPr>
+        <p:txBody>
+          <a:bodyPr wrap="square" anchor="t" lIns="0" rIns="0" tIns="0" bIns="0"/>
+          <a:lstStyle/>
+          <a:p>
+            <a:pPr algn="l"/>
+            <a:r>
+              <a:rPr sz="1900" b="0" i="0">
+                <a:solidFill>
+                  <a:srgbClr val="FFFFFF"/>
+                </a:solidFill>
+                <a:latin typeface="Cambria"/>
+              </a:rPr>
+              <a:t>An audit finds the policy says leavers' accounts are disabled within 24 hours, but logs show some took three weeks. The process is fixed and rechecked next quarter.</a:t>
+            </a:r>
+          </a:p>
+        </p:txBody>
+      </p:sp>
+    </p:spTree>
+  </p:cSld>
+  <p:clrMapOvr>
+    <a:masterClrMapping/>
+  </p:clrMapOvr>
+</p:sld>
+</file>
+
+<file path=ppt/slides/slide12.xml><?xml version="1.0" encoding="utf-8"?>
+<p:sld xmlns:a="http://schemas.openxmlformats.org/drawingml/2006/main" xmlns:p="http://schemas.openxmlformats.org/presentationml/2006/main" xmlns:r="http://schemas.openxmlformats.org/officeDocument/2006/relationships">
+  <p:cSld>
+    <p:bg>
+      <p:bgPr>
+        <a:solidFill>
+          <a:srgbClr val="FFFFFF"/>
+        </a:solidFill>
+        <a:effectLst/>
+      </p:bgPr>
+    </p:bg>
+    <p:spTree>
+      <p:nvGrpSpPr>
+        <p:cNvPr id="1" name=""/>
+        <p:cNvGrpSpPr/>
+        <p:nvPr/>
+      </p:nvGrpSpPr>
+      <p:grpSpPr/>
+      <p:sp>
+        <p:nvSpPr>
+          <p:cNvPr id="2" name="TextBox 1"/>
+          <p:cNvSpPr txBox="1"/>
+          <p:nvPr/>
+        </p:nvSpPr>
+        <p:spPr>
+          <a:xfrm>
+            <a:off x="548640" y="320040"/>
+            <a:ext cx="11094415" cy="274320"/>
+          </a:xfrm>
+          <a:prstGeom prst="rect">
+            <a:avLst/>
+          </a:prstGeom>
+          <a:noFill/>
+        </p:spPr>
+        <p:txBody>
+          <a:bodyPr wrap="square" anchor="t" lIns="0" rIns="0" tIns="0" bIns="0"/>
+          <a:lstStyle/>
+          <a:p>
+            <a:pPr algn="l"/>
+            <a:r>
+              <a:rPr sz="1100" b="1" i="0">
+                <a:solidFill>
+                  <a:srgbClr val="54595D"/>
+                </a:solidFill>
+                <a:latin typeface="Calibri"/>
+              </a:rPr>
+              <a:t>CYBER SECURITY  ·  Cyber Security Content Area 2</a:t>
+            </a:r>
+          </a:p>
+        </p:txBody>
+      </p:sp>
+      <p:sp>
+        <p:nvSpPr>
+          <p:cNvPr id="3" name="TextBox 2"/>
+          <p:cNvSpPr txBox="1"/>
+          <p:nvPr/>
+        </p:nvSpPr>
+        <p:spPr>
+          <a:xfrm>
+            <a:off x="548640" y="566928"/>
+            <a:ext cx="11094415" cy="822960"/>
+          </a:xfrm>
+          <a:prstGeom prst="rect">
+            <a:avLst/>
+          </a:prstGeom>
+          <a:noFill/>
+        </p:spPr>
+        <p:txBody>
+          <a:bodyPr wrap="square" anchor="ctr" lIns="0" rIns="0" tIns="0" bIns="0"/>
+          <a:lstStyle/>
+          <a:p>
+            <a:pPr algn="l"/>
+            <a:r>
+              <a:rPr sz="3200" b="1" i="0">
+                <a:solidFill>
+                  <a:srgbClr val="03306E"/>
+                </a:solidFill>
+                <a:latin typeface="Cambria"/>
+              </a:rPr>
+              <a:t>Monitoring compliance</a:t>
+            </a:r>
+          </a:p>
+        </p:txBody>
+      </p:sp>
+      <p:sp>
+        <p:nvSpPr>
+          <p:cNvPr id="4" name="TextBox 3"/>
+          <p:cNvSpPr txBox="1"/>
+          <p:nvPr/>
+        </p:nvSpPr>
+        <p:spPr>
+          <a:xfrm>
+            <a:off x="548640" y="6446520"/>
+            <a:ext cx="8229600" cy="274320"/>
+          </a:xfrm>
+          <a:prstGeom prst="rect">
+            <a:avLst/>
+          </a:prstGeom>
+          <a:noFill/>
+        </p:spPr>
+        <p:txBody>
+          <a:bodyPr wrap="square" anchor="t" lIns="0" rIns="0" tIns="0" bIns="0"/>
+          <a:lstStyle/>
+          <a:p>
+            <a:pPr algn="l"/>
+            <a:r>
+              <a:rPr sz="1000" b="0" i="0">
+                <a:solidFill>
+                  <a:srgbClr val="54595D"/>
+                </a:solidFill>
+                <a:latin typeface="Calibri"/>
+              </a:rPr>
+              <a:t>Digital Support and Security T Level  ·  Mitigation, Backups, Policies and Compliance</a:t>
+            </a:r>
+          </a:p>
+        </p:txBody>
+      </p:sp>
+      <p:sp>
+        <p:nvSpPr>
+          <p:cNvPr id="5" name="TextBox 4"/>
+          <p:cNvSpPr txBox="1"/>
+          <p:nvPr/>
+        </p:nvSpPr>
+        <p:spPr>
+          <a:xfrm>
+            <a:off x="10728655" y="6446520"/>
+            <a:ext cx="914400" cy="274320"/>
+          </a:xfrm>
+          <a:prstGeom prst="rect">
+            <a:avLst/>
+          </a:prstGeom>
+          <a:noFill/>
+        </p:spPr>
+        <p:txBody>
+          <a:bodyPr wrap="square" anchor="t" lIns="0" rIns="0" tIns="0" bIns="0"/>
+          <a:lstStyle/>
+          <a:p>
+            <a:pPr algn="r"/>
+            <a:r>
+              <a:rPr sz="1000" b="0" i="0">
+                <a:solidFill>
+                  <a:srgbClr val="54595D"/>
+                </a:solidFill>
+                <a:latin typeface="Calibri"/>
+              </a:rPr>
+              <a:t>12</a:t>
+            </a:r>
+          </a:p>
+        </p:txBody>
+      </p:sp>
+      <p:sp>
+        <p:nvSpPr>
+          <p:cNvPr id="6" name="TextBox 5"/>
+          <p:cNvSpPr txBox="1"/>
+          <p:nvPr/>
+        </p:nvSpPr>
+        <p:spPr>
+          <a:xfrm>
+            <a:off x="548640" y="1600200"/>
+            <a:ext cx="6675120" cy="4572000"/>
+          </a:xfrm>
+          <a:prstGeom prst="rect">
+            <a:avLst/>
+          </a:prstGeom>
+          <a:noFill/>
+        </p:spPr>
+        <p:txBody>
+          <a:bodyPr wrap="square" lIns="0" rIns="0" tIns="0" bIns="0">
+            <a:spAutoFit/>
+          </a:bodyPr>
+          <a:lstStyle/>
+          <a:p>
+            <a:pPr marL="274320" indent="-274320">
+              <a:spcAft>
+                <a:spcPts val="1080"/>
+              </a:spcAft>
+              <a:buClr>
+                <a:srgbClr val="0645AD"/>
+              </a:buClr>
+              <a:buFont typeface="Arial"/>
+              <a:buChar char="•"/>
+            </a:pPr>
+            <a:r>
+              <a:rPr sz="2400" b="0">
+                <a:solidFill>
+                  <a:srgbClr val="202122"/>
+                </a:solidFill>
+                <a:latin typeface="Calibri"/>
+              </a:rPr>
+              <a:t>Audit processes and policies to check they are current, e.g. review the information security policy.</a:t>
+            </a:r>
+          </a:p>
+          <a:p>
+            <a:pPr marL="274320" indent="-274320">
+              <a:spcAft>
+                <a:spcPts val="1080"/>
+              </a:spcAft>
+              <a:buClr>
+                <a:srgbClr val="0645AD"/>
+              </a:buClr>
+              <a:buFont typeface="Arial"/>
+              <a:buChar char="•"/>
+            </a:pPr>
+            <a:r>
+              <a:rPr sz="2400" b="0">
+                <a:solidFill>
+                  <a:srgbClr val="202122"/>
+                </a:solidFill>
+                <a:latin typeface="Calibri"/>
+              </a:rPr>
+              <a:t>Improve them where needed.</a:t>
+            </a:r>
+          </a:p>
+          <a:p>
+            <a:pPr marL="274320" indent="-274320">
+              <a:spcAft>
+                <a:spcPts val="1080"/>
+              </a:spcAft>
+              <a:buClr>
+                <a:srgbClr val="0645AD"/>
+              </a:buClr>
+              <a:buFont typeface="Arial"/>
+              <a:buChar char="•"/>
+            </a:pPr>
+            <a:r>
+              <a:rPr sz="2400" b="0">
+                <a:solidFill>
+                  <a:srgbClr val="202122"/>
+                </a:solidFill>
+                <a:latin typeface="Calibri"/>
+              </a:rPr>
+              <a:t>Compare and check the accuracy of processes, logs and incident reports.</a:t>
+            </a:r>
+          </a:p>
+          <a:p>
+            <a:pPr marL="274320" indent="-274320">
+              <a:spcAft>
+                <a:spcPts val="1080"/>
+              </a:spcAft>
+              <a:buClr>
+                <a:srgbClr val="0645AD"/>
+              </a:buClr>
+              <a:buFont typeface="Arial"/>
+              <a:buChar char="•"/>
+            </a:pPr>
+            <a:r>
+              <a:rPr sz="2400" b="0">
+                <a:solidFill>
+                  <a:srgbClr val="202122"/>
+                </a:solidFill>
+                <a:latin typeface="Calibri"/>
+              </a:rPr>
+              <a:t>Comply with relevant ISO standards.</a:t>
+            </a:r>
+          </a:p>
+        </p:txBody>
+      </p:sp>
+      <p:sp>
+        <p:nvSpPr>
+          <p:cNvPr id="7" name="Rounded Rectangle 6"/>
+          <p:cNvSpPr/>
+          <p:nvPr/>
+        </p:nvSpPr>
+        <p:spPr>
+          <a:xfrm>
+            <a:off x="7772400" y="1600200"/>
+            <a:ext cx="3867912" cy="4434840"/>
+          </a:xfrm>
+          <a:prstGeom prst="roundRect">
+            <a:avLst>
+              <a:gd name="adj" fmla="val 8000"/>
+            </a:avLst>
+          </a:prstGeom>
+          <a:solidFill>
+            <a:srgbClr val="03306E"/>
+          </a:solidFill>
+          <a:ln>
+            <a:noFill/>
+          </a:ln>
+          <a:effectLst/>
+        </p:spPr>
+        <p:style>
+          <a:lnRef idx="1">
+            <a:schemeClr val="accent1"/>
+          </a:lnRef>
+          <a:fillRef idx="3">
+            <a:schemeClr val="accent1"/>
+          </a:fillRef>
+          <a:effectRef idx="2">
+            <a:schemeClr val="accent1"/>
+          </a:effectRef>
+          <a:fontRef idx="minor">
+            <a:schemeClr val="lt1"/>
+          </a:fontRef>
+        </p:style>
+        <p:txBody>
+          <a:bodyPr rtlCol="0" anchor="ctr"/>
+          <a:lstStyle/>
+          <a:p/>
+        </p:txBody>
+      </p:sp>
+      <p:sp>
+        <p:nvSpPr>
+          <p:cNvPr id="8" name="Oval 7"/>
+          <p:cNvSpPr/>
+          <p:nvPr/>
+        </p:nvSpPr>
+        <p:spPr>
+          <a:xfrm>
+            <a:off x="8046720" y="1874519"/>
+            <a:ext cx="548640" cy="548640"/>
+          </a:xfrm>
+          <a:prstGeom prst="ellipse">
+            <a:avLst/>
+          </a:prstGeom>
+          <a:solidFill>
+            <a:srgbClr val="E0463A"/>
+          </a:solidFill>
+          <a:ln>
+            <a:noFill/>
+          </a:ln>
+          <a:effectLst/>
+        </p:spPr>
+        <p:style>
+          <a:lnRef idx="1">
+            <a:schemeClr val="accent1"/>
+          </a:lnRef>
+          <a:fillRef idx="3">
+            <a:schemeClr val="accent1"/>
+          </a:fillRef>
+          <a:effectRef idx="2">
+            <a:schemeClr val="accent1"/>
+          </a:effectRef>
+          <a:fontRef idx="minor">
+            <a:schemeClr val="lt1"/>
+          </a:fontRef>
+        </p:style>
+        <p:txBody>
+          <a:bodyPr rtlCol="0" anchor="ctr" lIns="0" rIns="0" tIns="0" bIns="0"/>
+          <a:lstStyle/>
+          <a:p>
+            <a:pPr algn="ctr"/>
+            <a:r>
+              <a:rPr sz="2000" b="1">
+                <a:solidFill>
+                  <a:srgbClr val="FFFFFF"/>
+                </a:solidFill>
+                <a:latin typeface="Calibri"/>
+              </a:rPr>
+              <a:t>!</a:t>
+            </a:r>
+          </a:p>
+        </p:txBody>
+      </p:sp>
+      <p:sp>
+        <p:nvSpPr>
+          <p:cNvPr id="9" name="TextBox 8"/>
+          <p:cNvSpPr txBox="1"/>
+          <p:nvPr/>
+        </p:nvSpPr>
+        <p:spPr>
+          <a:xfrm>
+            <a:off x="8046720" y="2606040"/>
+            <a:ext cx="3291840" cy="365760"/>
+          </a:xfrm>
+          <a:prstGeom prst="rect">
+            <a:avLst/>
+          </a:prstGeom>
+          <a:noFill/>
+        </p:spPr>
+        <p:txBody>
+          <a:bodyPr wrap="square" anchor="t" lIns="0" rIns="0" tIns="0" bIns="0"/>
+          <a:lstStyle/>
+          <a:p>
+            <a:pPr algn="l"/>
+            <a:r>
+              <a:rPr sz="1300" b="1" i="0">
+                <a:solidFill>
+                  <a:srgbClr val="A9C8F0"/>
+                </a:solidFill>
+                <a:latin typeface="Calibri"/>
+              </a:rPr>
+              <a:t>KEY IDEA</a:t>
+            </a:r>
+          </a:p>
+        </p:txBody>
+      </p:sp>
+      <p:sp>
+        <p:nvSpPr>
+          <p:cNvPr id="10" name="TextBox 9"/>
+          <p:cNvSpPr txBox="1"/>
+          <p:nvPr/>
+        </p:nvSpPr>
+        <p:spPr>
+          <a:xfrm>
+            <a:off x="8046720" y="3017520"/>
+            <a:ext cx="3291840" cy="2926080"/>
+          </a:xfrm>
+          <a:prstGeom prst="rect">
+            <a:avLst/>
+          </a:prstGeom>
+          <a:noFill/>
+        </p:spPr>
+        <p:txBody>
+          <a:bodyPr wrap="square" anchor="t" lIns="0" rIns="0" tIns="0" bIns="0"/>
+          <a:lstStyle/>
+          <a:p>
+            <a:pPr algn="l"/>
+            <a:r>
+              <a:rPr sz="2200" b="0" i="0">
+                <a:solidFill>
+                  <a:srgbClr val="FFFFFF"/>
+                </a:solidFill>
+                <a:latin typeface="Cambria"/>
+              </a:rPr>
+              <a:t>A policy nobody checks is a wish, not a control.</a:t>
+            </a:r>
+          </a:p>
+        </p:txBody>
+      </p:sp>
+    </p:spTree>
+  </p:cSld>
+  <p:clrMapOvr>
+    <a:masterClrMapping/>
+  </p:clrMapOvr>
+</p:sld>
+</file>
+
+<file path=ppt/slides/slide13.xml><?xml version="1.0" encoding="utf-8"?>
+<p:sld xmlns:a="http://schemas.openxmlformats.org/drawingml/2006/main" xmlns:p="http://schemas.openxmlformats.org/presentationml/2006/main" xmlns:r="http://schemas.openxmlformats.org/officeDocument/2006/relationships">
+  <p:cSld>
+    <p:bg>
+      <p:bgPr>
+        <a:solidFill>
+          <a:srgbClr val="FFFFFF"/>
+        </a:solidFill>
+        <a:effectLst/>
+      </p:bgPr>
+    </p:bg>
+    <p:spTree>
+      <p:nvGrpSpPr>
+        <p:cNvPr id="1" name=""/>
+        <p:cNvGrpSpPr/>
+        <p:nvPr/>
+      </p:nvGrpSpPr>
+      <p:grpSpPr/>
+      <p:sp>
+        <p:nvSpPr>
+          <p:cNvPr id="2" name="TextBox 1"/>
+          <p:cNvSpPr txBox="1"/>
+          <p:nvPr/>
+        </p:nvSpPr>
+        <p:spPr>
+          <a:xfrm>
+            <a:off x="548640" y="320040"/>
+            <a:ext cx="11094415" cy="274320"/>
+          </a:xfrm>
+          <a:prstGeom prst="rect">
+            <a:avLst/>
+          </a:prstGeom>
+          <a:noFill/>
+        </p:spPr>
+        <p:txBody>
+          <a:bodyPr wrap="square" anchor="t" lIns="0" rIns="0" tIns="0" bIns="0"/>
+          <a:lstStyle/>
+          <a:p>
+            <a:pPr algn="l"/>
+            <a:r>
+              <a:rPr sz="1100" b="1" i="0">
+                <a:solidFill>
+                  <a:srgbClr val="54595D"/>
+                </a:solidFill>
+                <a:latin typeface="Calibri"/>
+              </a:rPr>
+              <a:t>CYBER SECURITY  ·  Cyber Security Content Area 2</a:t>
+            </a:r>
+          </a:p>
+        </p:txBody>
+      </p:sp>
+      <p:sp>
+        <p:nvSpPr>
+          <p:cNvPr id="3" name="TextBox 2"/>
+          <p:cNvSpPr txBox="1"/>
+          <p:nvPr/>
+        </p:nvSpPr>
+        <p:spPr>
+          <a:xfrm>
+            <a:off x="548640" y="566928"/>
+            <a:ext cx="11094415" cy="822960"/>
+          </a:xfrm>
+          <a:prstGeom prst="rect">
+            <a:avLst/>
+          </a:prstGeom>
+          <a:noFill/>
+        </p:spPr>
+        <p:txBody>
+          <a:bodyPr wrap="square" anchor="ctr" lIns="0" rIns="0" tIns="0" bIns="0"/>
+          <a:lstStyle/>
+          <a:p>
+            <a:pPr algn="l"/>
+            <a:r>
+              <a:rPr sz="3200" b="1" i="0">
+                <a:solidFill>
+                  <a:srgbClr val="03306E"/>
+                </a:solidFill>
+                <a:latin typeface="Cambria"/>
+              </a:rPr>
+              <a:t>Quick check: Monitoring compliance</a:t>
+            </a:r>
+          </a:p>
+        </p:txBody>
+      </p:sp>
+      <p:sp>
+        <p:nvSpPr>
+          <p:cNvPr id="4" name="TextBox 3"/>
+          <p:cNvSpPr txBox="1"/>
+          <p:nvPr/>
+        </p:nvSpPr>
+        <p:spPr>
+          <a:xfrm>
+            <a:off x="548640" y="6446520"/>
+            <a:ext cx="8229600" cy="274320"/>
+          </a:xfrm>
+          <a:prstGeom prst="rect">
+            <a:avLst/>
+          </a:prstGeom>
+          <a:noFill/>
+        </p:spPr>
+        <p:txBody>
+          <a:bodyPr wrap="square" anchor="t" lIns="0" rIns="0" tIns="0" bIns="0"/>
+          <a:lstStyle/>
+          <a:p>
+            <a:pPr algn="l"/>
+            <a:r>
+              <a:rPr sz="1000" b="0" i="0">
+                <a:solidFill>
+                  <a:srgbClr val="54595D"/>
+                </a:solidFill>
+                <a:latin typeface="Calibri"/>
+              </a:rPr>
+              <a:t>Digital Support and Security T Level  ·  Mitigation, Backups, Policies and Compliance</a:t>
+            </a:r>
+          </a:p>
+        </p:txBody>
+      </p:sp>
+      <p:sp>
+        <p:nvSpPr>
+          <p:cNvPr id="5" name="TextBox 4"/>
+          <p:cNvSpPr txBox="1"/>
+          <p:nvPr/>
+        </p:nvSpPr>
+        <p:spPr>
+          <a:xfrm>
+            <a:off x="10728655" y="6446520"/>
+            <a:ext cx="914400" cy="274320"/>
+          </a:xfrm>
+          <a:prstGeom prst="rect">
+            <a:avLst/>
+          </a:prstGeom>
+          <a:noFill/>
+        </p:spPr>
+        <p:txBody>
+          <a:bodyPr wrap="square" anchor="t" lIns="0" rIns="0" tIns="0" bIns="0"/>
+          <a:lstStyle/>
+          <a:p>
+            <a:pPr algn="r"/>
+            <a:r>
+              <a:rPr sz="1000" b="0" i="0">
+                <a:solidFill>
+                  <a:srgbClr val="54595D"/>
+                </a:solidFill>
+                <a:latin typeface="Calibri"/>
+              </a:rPr>
+              <a:t>13</a:t>
+            </a:r>
+          </a:p>
+        </p:txBody>
+      </p:sp>
+      <p:sp>
+        <p:nvSpPr>
+          <p:cNvPr id="6" name="Oval 5"/>
+          <p:cNvSpPr/>
+          <p:nvPr/>
+        </p:nvSpPr>
+        <p:spPr>
+          <a:xfrm>
+            <a:off x="548640" y="1691640"/>
+            <a:ext cx="502920" cy="502920"/>
+          </a:xfrm>
+          <a:prstGeom prst="ellipse">
+            <a:avLst/>
+          </a:prstGeom>
+          <a:solidFill>
+            <a:srgbClr val="E0463A"/>
+          </a:solidFill>
+          <a:ln>
+            <a:noFill/>
+          </a:ln>
+          <a:effectLst/>
+        </p:spPr>
+        <p:style>
+          <a:lnRef idx="1">
+            <a:schemeClr val="accent1"/>
+          </a:lnRef>
+          <a:fillRef idx="3">
+            <a:schemeClr val="accent1"/>
+          </a:fillRef>
+          <a:effectRef idx="2">
+            <a:schemeClr val="accent1"/>
+          </a:effectRef>
+          <a:fontRef idx="minor">
+            <a:schemeClr val="lt1"/>
+          </a:fontRef>
+        </p:style>
+        <p:txBody>
+          <a:bodyPr rtlCol="0" anchor="ctr" lIns="0" rIns="0" tIns="0" bIns="0"/>
+          <a:lstStyle/>
+          <a:p>
+            <a:pPr algn="ctr"/>
+            <a:r>
+              <a:rPr sz="1600" b="1">
+                <a:solidFill>
+                  <a:srgbClr val="FFFFFF"/>
+                </a:solidFill>
+                <a:latin typeface="Calibri"/>
+              </a:rPr>
+              <a:t>1</a:t>
+            </a:r>
+          </a:p>
+        </p:txBody>
+      </p:sp>
+      <p:sp>
+        <p:nvSpPr>
+          <p:cNvPr id="7" name="TextBox 6"/>
+          <p:cNvSpPr txBox="1"/>
+          <p:nvPr/>
+        </p:nvSpPr>
+        <p:spPr>
+          <a:xfrm>
+            <a:off x="1371600" y="1645920"/>
+            <a:ext cx="10271455" cy="1188720"/>
+          </a:xfrm>
+          <a:prstGeom prst="rect">
+            <a:avLst/>
+          </a:prstGeom>
+          <a:noFill/>
+        </p:spPr>
+        <p:txBody>
+          <a:bodyPr wrap="square" anchor="t" lIns="0" rIns="0" tIns="0" bIns="0"/>
+          <a:lstStyle/>
+          <a:p>
+            <a:pPr algn="l"/>
+            <a:r>
+              <a:rPr sz="2400" b="0" i="0">
+                <a:solidFill>
+                  <a:srgbClr val="202122"/>
+                </a:solidFill>
+                <a:latin typeface="Calibri"/>
+              </a:rPr>
+              <a:t>Why audit policies regularly?</a:t>
+            </a:r>
+          </a:p>
+        </p:txBody>
+      </p:sp>
+      <p:sp>
+        <p:nvSpPr>
+          <p:cNvPr id="8" name="Oval 7"/>
+          <p:cNvSpPr/>
+          <p:nvPr/>
+        </p:nvSpPr>
+        <p:spPr>
+          <a:xfrm>
+            <a:off x="548640" y="3108960"/>
+            <a:ext cx="502920" cy="502920"/>
+          </a:xfrm>
+          <a:prstGeom prst="ellipse">
+            <a:avLst/>
+          </a:prstGeom>
+          <a:solidFill>
+            <a:srgbClr val="E0463A"/>
+          </a:solidFill>
+          <a:ln>
+            <a:noFill/>
+          </a:ln>
+          <a:effectLst/>
+        </p:spPr>
+        <p:style>
+          <a:lnRef idx="1">
+            <a:schemeClr val="accent1"/>
+          </a:lnRef>
+          <a:fillRef idx="3">
+            <a:schemeClr val="accent1"/>
+          </a:fillRef>
+          <a:effectRef idx="2">
+            <a:schemeClr val="accent1"/>
+          </a:effectRef>
+          <a:fontRef idx="minor">
+            <a:schemeClr val="lt1"/>
+          </a:fontRef>
+        </p:style>
+        <p:txBody>
+          <a:bodyPr rtlCol="0" anchor="ctr" lIns="0" rIns="0" tIns="0" bIns="0"/>
+          <a:lstStyle/>
+          <a:p>
+            <a:pPr algn="ctr"/>
+            <a:r>
+              <a:rPr sz="1600" b="1">
+                <a:solidFill>
+                  <a:srgbClr val="FFFFFF"/>
+                </a:solidFill>
+                <a:latin typeface="Calibri"/>
+              </a:rPr>
+              <a:t>2</a:t>
+            </a:r>
+          </a:p>
+        </p:txBody>
+      </p:sp>
+      <p:sp>
+        <p:nvSpPr>
+          <p:cNvPr id="9" name="TextBox 8"/>
+          <p:cNvSpPr txBox="1"/>
+          <p:nvPr/>
+        </p:nvSpPr>
+        <p:spPr>
+          <a:xfrm>
+            <a:off x="1371600" y="3063240"/>
+            <a:ext cx="10271455" cy="1188720"/>
+          </a:xfrm>
+          <a:prstGeom prst="rect">
+            <a:avLst/>
+          </a:prstGeom>
+          <a:noFill/>
+        </p:spPr>
+        <p:txBody>
+          <a:bodyPr wrap="square" anchor="t" lIns="0" rIns="0" tIns="0" bIns="0"/>
+          <a:lstStyle/>
+          <a:p>
+            <a:pPr algn="l"/>
+            <a:r>
+              <a:rPr sz="2400" b="0" i="0">
+                <a:solidFill>
+                  <a:srgbClr val="202122"/>
+                </a:solidFill>
+                <a:latin typeface="Calibri"/>
+              </a:rPr>
+              <a:t>What does comparing logs with procedures show?</a:t>
+            </a:r>
+          </a:p>
+        </p:txBody>
+      </p:sp>
+      <p:sp>
+        <p:nvSpPr>
+          <p:cNvPr id="10" name="Oval 9"/>
+          <p:cNvSpPr/>
+          <p:nvPr/>
+        </p:nvSpPr>
+        <p:spPr>
+          <a:xfrm>
+            <a:off x="548640" y="4526280"/>
+            <a:ext cx="502920" cy="502920"/>
+          </a:xfrm>
+          <a:prstGeom prst="ellipse">
+            <a:avLst/>
+          </a:prstGeom>
+          <a:solidFill>
+            <a:srgbClr val="E0463A"/>
+          </a:solidFill>
+          <a:ln>
+            <a:noFill/>
+          </a:ln>
+          <a:effectLst/>
+        </p:spPr>
+        <p:style>
+          <a:lnRef idx="1">
+            <a:schemeClr val="accent1"/>
+          </a:lnRef>
+          <a:fillRef idx="3">
+            <a:schemeClr val="accent1"/>
+          </a:fillRef>
+          <a:effectRef idx="2">
+            <a:schemeClr val="accent1"/>
+          </a:effectRef>
+          <a:fontRef idx="minor">
+            <a:schemeClr val="lt1"/>
+          </a:fontRef>
+        </p:style>
+        <p:txBody>
+          <a:bodyPr rtlCol="0" anchor="ctr" lIns="0" rIns="0" tIns="0" bIns="0"/>
+          <a:lstStyle/>
+          <a:p>
+            <a:pPr algn="ctr"/>
+            <a:r>
+              <a:rPr sz="1600" b="1">
+                <a:solidFill>
+                  <a:srgbClr val="FFFFFF"/>
+                </a:solidFill>
+                <a:latin typeface="Calibri"/>
+              </a:rPr>
+              <a:t>3</a:t>
+            </a:r>
+          </a:p>
+        </p:txBody>
+      </p:sp>
+      <p:sp>
+        <p:nvSpPr>
+          <p:cNvPr id="11" name="TextBox 10"/>
+          <p:cNvSpPr txBox="1"/>
+          <p:nvPr/>
+        </p:nvSpPr>
+        <p:spPr>
+          <a:xfrm>
+            <a:off x="1371600" y="4480560"/>
+            <a:ext cx="10271455" cy="1188720"/>
+          </a:xfrm>
+          <a:prstGeom prst="rect">
+            <a:avLst/>
+          </a:prstGeom>
+          <a:noFill/>
+        </p:spPr>
+        <p:txBody>
+          <a:bodyPr wrap="square" anchor="t" lIns="0" rIns="0" tIns="0" bIns="0"/>
+          <a:lstStyle/>
+          <a:p>
+            <a:pPr algn="l"/>
+            <a:r>
+              <a:rPr sz="2400" b="0" i="0">
+                <a:solidFill>
+                  <a:srgbClr val="202122"/>
+                </a:solidFill>
+                <a:latin typeface="Calibri"/>
+              </a:rPr>
+              <a:t>Name an ISO standard compliance might check.</a:t>
+            </a:r>
+          </a:p>
+        </p:txBody>
+      </p:sp>
+      <p:sp>
+        <p:nvSpPr>
+          <p:cNvPr id="12" name="TextBox 11"/>
+          <p:cNvSpPr txBox="1"/>
+          <p:nvPr/>
+        </p:nvSpPr>
+        <p:spPr>
+          <a:xfrm>
+            <a:off x="548640" y="5852160"/>
+            <a:ext cx="11094415" cy="365760"/>
+          </a:xfrm>
+          <a:prstGeom prst="rect">
+            <a:avLst/>
+          </a:prstGeom>
+          <a:noFill/>
+        </p:spPr>
+        <p:txBody>
+          <a:bodyPr wrap="square" anchor="t" lIns="0" rIns="0" tIns="0" bIns="0"/>
+          <a:lstStyle/>
+          <a:p>
+            <a:pPr algn="l"/>
+            <a:r>
+              <a:rPr sz="1300" b="0" i="1">
+                <a:solidFill>
+                  <a:srgbClr val="54595D"/>
+                </a:solidFill>
+                <a:latin typeface="Calibri"/>
+              </a:rPr>
+              <a:t>Answer on mini whiteboards or in your book. Answers are in the speaker notes.</a:t>
+            </a:r>
+          </a:p>
+        </p:txBody>
+      </p:sp>
+    </p:spTree>
+  </p:cSld>
+  <p:clrMapOvr>
+    <a:masterClrMapping/>
+  </p:clrMapOvr>
+</p:sld>
+</file>
+
+<file path=ppt/slides/slide14.xml><?xml version="1.0" encoding="utf-8"?>
+<p:sld xmlns:a="http://schemas.openxmlformats.org/drawingml/2006/main" xmlns:p="http://schemas.openxmlformats.org/presentationml/2006/main" xmlns:r="http://schemas.openxmlformats.org/officeDocument/2006/relationships">
+  <p:cSld>
+    <p:bg>
+      <p:bgPr>
+        <a:solidFill>
+          <a:srgbClr val="FFFFFF"/>
+        </a:solidFill>
+        <a:effectLst/>
+      </p:bgPr>
+    </p:bg>
+    <p:spTree>
+      <p:nvGrpSpPr>
+        <p:cNvPr id="1" name=""/>
+        <p:cNvGrpSpPr/>
+        <p:nvPr/>
+      </p:nvGrpSpPr>
+      <p:grpSpPr/>
+      <p:sp>
+        <p:nvSpPr>
+          <p:cNvPr id="2" name="TextBox 1"/>
+          <p:cNvSpPr txBox="1"/>
+          <p:nvPr/>
+        </p:nvSpPr>
+        <p:spPr>
+          <a:xfrm>
+            <a:off x="548640" y="320040"/>
+            <a:ext cx="11094415" cy="274320"/>
+          </a:xfrm>
+          <a:prstGeom prst="rect">
+            <a:avLst/>
+          </a:prstGeom>
+          <a:noFill/>
+        </p:spPr>
+        <p:txBody>
+          <a:bodyPr wrap="square" anchor="t" lIns="0" rIns="0" tIns="0" bIns="0"/>
+          <a:lstStyle/>
+          <a:p>
+            <a:pPr algn="l"/>
+            <a:r>
+              <a:rPr sz="1100" b="1" i="0">
+                <a:solidFill>
+                  <a:srgbClr val="54595D"/>
+                </a:solidFill>
+                <a:latin typeface="Calibri"/>
+              </a:rPr>
+              <a:t>CYBER SECURITY  ·  Cyber Security Content Area 2</a:t>
+            </a:r>
+          </a:p>
+        </p:txBody>
+      </p:sp>
+      <p:sp>
+        <p:nvSpPr>
+          <p:cNvPr id="3" name="TextBox 2"/>
+          <p:cNvSpPr txBox="1"/>
+          <p:nvPr/>
+        </p:nvSpPr>
+        <p:spPr>
+          <a:xfrm>
+            <a:off x="548640" y="566928"/>
+            <a:ext cx="11094415" cy="822960"/>
+          </a:xfrm>
+          <a:prstGeom prst="rect">
+            <a:avLst/>
+          </a:prstGeom>
+          <a:noFill/>
+        </p:spPr>
+        <p:txBody>
+          <a:bodyPr wrap="square" anchor="ctr" lIns="0" rIns="0" tIns="0" bIns="0"/>
+          <a:lstStyle/>
+          <a:p>
+            <a:pPr algn="l"/>
+            <a:r>
+              <a:rPr sz="3200" b="1" i="0">
+                <a:solidFill>
+                  <a:srgbClr val="03306E"/>
+                </a:solidFill>
+                <a:latin typeface="Cambria"/>
+              </a:rPr>
+              <a:t>Check your understanding</a:t>
+            </a:r>
+          </a:p>
+        </p:txBody>
+      </p:sp>
+      <p:sp>
+        <p:nvSpPr>
+          <p:cNvPr id="4" name="TextBox 3"/>
+          <p:cNvSpPr txBox="1"/>
+          <p:nvPr/>
+        </p:nvSpPr>
+        <p:spPr>
+          <a:xfrm>
+            <a:off x="548640" y="6446520"/>
+            <a:ext cx="8229600" cy="274320"/>
+          </a:xfrm>
+          <a:prstGeom prst="rect">
+            <a:avLst/>
+          </a:prstGeom>
+          <a:noFill/>
+        </p:spPr>
+        <p:txBody>
+          <a:bodyPr wrap="square" anchor="t" lIns="0" rIns="0" tIns="0" bIns="0"/>
+          <a:lstStyle/>
+          <a:p>
+            <a:pPr algn="l"/>
+            <a:r>
+              <a:rPr sz="1000" b="0" i="0">
+                <a:solidFill>
+                  <a:srgbClr val="54595D"/>
+                </a:solidFill>
+                <a:latin typeface="Calibri"/>
+              </a:rPr>
+              <a:t>Digital Support and Security T Level  ·  Mitigation, Backups, Policies and Compliance</a:t>
+            </a:r>
+          </a:p>
+        </p:txBody>
+      </p:sp>
+      <p:sp>
+        <p:nvSpPr>
+          <p:cNvPr id="5" name="TextBox 4"/>
+          <p:cNvSpPr txBox="1"/>
+          <p:nvPr/>
+        </p:nvSpPr>
+        <p:spPr>
+          <a:xfrm>
+            <a:off x="10728655" y="6446520"/>
+            <a:ext cx="914400" cy="274320"/>
+          </a:xfrm>
+          <a:prstGeom prst="rect">
+            <a:avLst/>
+          </a:prstGeom>
+          <a:noFill/>
+        </p:spPr>
+        <p:txBody>
+          <a:bodyPr wrap="square" anchor="t" lIns="0" rIns="0" tIns="0" bIns="0"/>
+          <a:lstStyle/>
+          <a:p>
+            <a:pPr algn="r"/>
+            <a:r>
+              <a:rPr sz="1000" b="0" i="0">
+                <a:solidFill>
+                  <a:srgbClr val="54595D"/>
+                </a:solidFill>
+                <a:latin typeface="Calibri"/>
+              </a:rPr>
+              <a:t>14</a:t>
+            </a:r>
+          </a:p>
+        </p:txBody>
+      </p:sp>
+      <p:sp>
+        <p:nvSpPr>
+          <p:cNvPr id="6" name="Oval 5"/>
+          <p:cNvSpPr/>
+          <p:nvPr/>
+        </p:nvSpPr>
+        <p:spPr>
+          <a:xfrm>
+            <a:off x="548640" y="1618488"/>
+            <a:ext cx="411480" cy="411480"/>
+          </a:xfrm>
+          <a:prstGeom prst="ellipse">
+            <a:avLst/>
+          </a:prstGeom>
+          <a:solidFill>
+            <a:srgbClr val="E0463A"/>
+          </a:solidFill>
+          <a:ln>
+            <a:noFill/>
+          </a:ln>
+          <a:effectLst/>
+        </p:spPr>
+        <p:style>
+          <a:lnRef idx="1">
+            <a:schemeClr val="accent1"/>
+          </a:lnRef>
+          <a:fillRef idx="3">
+            <a:schemeClr val="accent1"/>
+          </a:fillRef>
+          <a:effectRef idx="2">
+            <a:schemeClr val="accent1"/>
+          </a:effectRef>
+          <a:fontRef idx="minor">
+            <a:schemeClr val="lt1"/>
+          </a:fontRef>
+        </p:style>
+        <p:txBody>
+          <a:bodyPr rtlCol="0" anchor="ctr" lIns="0" rIns="0" tIns="0" bIns="0"/>
+          <a:lstStyle/>
+          <a:p>
+            <a:pPr algn="ctr"/>
+            <a:r>
+              <a:rPr sz="1400" b="1">
+                <a:solidFill>
+                  <a:srgbClr val="FFFFFF"/>
+                </a:solidFill>
+                <a:latin typeface="Calibri"/>
+              </a:rPr>
+              <a:t>1</a:t>
+            </a:r>
+          </a:p>
+        </p:txBody>
+      </p:sp>
+      <p:sp>
+        <p:nvSpPr>
+          <p:cNvPr id="7" name="TextBox 6"/>
+          <p:cNvSpPr txBox="1"/>
+          <p:nvPr/>
+        </p:nvSpPr>
+        <p:spPr>
+          <a:xfrm>
+            <a:off x="1234440" y="1600200"/>
+            <a:ext cx="10408615" cy="791870"/>
+          </a:xfrm>
+          <a:prstGeom prst="rect">
+            <a:avLst/>
+          </a:prstGeom>
+          <a:noFill/>
+        </p:spPr>
+        <p:txBody>
+          <a:bodyPr wrap="square" anchor="t" lIns="0" rIns="0" tIns="0" bIns="0"/>
+          <a:lstStyle/>
+          <a:p>
+            <a:pPr algn="l"/>
+            <a:r>
+              <a:rPr sz="2200" b="0" i="0">
+                <a:solidFill>
+                  <a:srgbClr val="202122"/>
+                </a:solidFill>
+                <a:latin typeface="Calibri"/>
+              </a:rPr>
+              <a:t>What makes a backup immutable?</a:t>
+            </a:r>
+          </a:p>
+        </p:txBody>
+      </p:sp>
+      <p:sp>
+        <p:nvSpPr>
+          <p:cNvPr id="8" name="Oval 7"/>
+          <p:cNvSpPr/>
+          <p:nvPr/>
+        </p:nvSpPr>
+        <p:spPr>
+          <a:xfrm>
+            <a:off x="548640" y="2574950"/>
+            <a:ext cx="411480" cy="411480"/>
+          </a:xfrm>
+          <a:prstGeom prst="ellipse">
+            <a:avLst/>
+          </a:prstGeom>
+          <a:solidFill>
+            <a:srgbClr val="E0463A"/>
+          </a:solidFill>
+          <a:ln>
+            <a:noFill/>
+          </a:ln>
+          <a:effectLst/>
+        </p:spPr>
+        <p:style>
+          <a:lnRef idx="1">
+            <a:schemeClr val="accent1"/>
+          </a:lnRef>
+          <a:fillRef idx="3">
+            <a:schemeClr val="accent1"/>
+          </a:fillRef>
+          <a:effectRef idx="2">
+            <a:schemeClr val="accent1"/>
+          </a:effectRef>
+          <a:fontRef idx="minor">
+            <a:schemeClr val="lt1"/>
+          </a:fontRef>
+        </p:style>
+        <p:txBody>
+          <a:bodyPr rtlCol="0" anchor="ctr" lIns="0" rIns="0" tIns="0" bIns="0"/>
+          <a:lstStyle/>
+          <a:p>
+            <a:pPr algn="ctr"/>
+            <a:r>
+              <a:rPr sz="1400" b="1">
+                <a:solidFill>
+                  <a:srgbClr val="FFFFFF"/>
+                </a:solidFill>
+                <a:latin typeface="Calibri"/>
+              </a:rPr>
+              <a:t>2</a:t>
+            </a:r>
+          </a:p>
+        </p:txBody>
+      </p:sp>
+      <p:sp>
+        <p:nvSpPr>
+          <p:cNvPr id="9" name="TextBox 8"/>
+          <p:cNvSpPr txBox="1"/>
+          <p:nvPr/>
+        </p:nvSpPr>
+        <p:spPr>
+          <a:xfrm>
+            <a:off x="1234440" y="2556662"/>
+            <a:ext cx="10408615" cy="791870"/>
+          </a:xfrm>
+          <a:prstGeom prst="rect">
+            <a:avLst/>
+          </a:prstGeom>
+          <a:noFill/>
+        </p:spPr>
+        <p:txBody>
+          <a:bodyPr wrap="square" anchor="t" lIns="0" rIns="0" tIns="0" bIns="0"/>
+          <a:lstStyle/>
+          <a:p>
+            <a:pPr algn="l"/>
+            <a:r>
+              <a:rPr sz="2200" b="0" i="0">
+                <a:solidFill>
+                  <a:srgbClr val="202122"/>
+                </a:solidFill>
+                <a:latin typeface="Calibri"/>
+              </a:rPr>
+              <a:t>What is PAM used for?</a:t>
+            </a:r>
+          </a:p>
+        </p:txBody>
+      </p:sp>
+      <p:sp>
+        <p:nvSpPr>
+          <p:cNvPr id="10" name="Oval 9"/>
+          <p:cNvSpPr/>
+          <p:nvPr/>
+        </p:nvSpPr>
+        <p:spPr>
+          <a:xfrm>
+            <a:off x="548640" y="3531412"/>
+            <a:ext cx="411480" cy="411480"/>
+          </a:xfrm>
+          <a:prstGeom prst="ellipse">
+            <a:avLst/>
+          </a:prstGeom>
+          <a:solidFill>
+            <a:srgbClr val="E0463A"/>
+          </a:solidFill>
+          <a:ln>
+            <a:noFill/>
+          </a:ln>
+          <a:effectLst/>
+        </p:spPr>
+        <p:style>
+          <a:lnRef idx="1">
+            <a:schemeClr val="accent1"/>
+          </a:lnRef>
+          <a:fillRef idx="3">
+            <a:schemeClr val="accent1"/>
+          </a:fillRef>
+          <a:effectRef idx="2">
+            <a:schemeClr val="accent1"/>
+          </a:effectRef>
+          <a:fontRef idx="minor">
+            <a:schemeClr val="lt1"/>
+          </a:fontRef>
+        </p:style>
+        <p:txBody>
+          <a:bodyPr rtlCol="0" anchor="ctr" lIns="0" rIns="0" tIns="0" bIns="0"/>
+          <a:lstStyle/>
+          <a:p>
+            <a:pPr algn="ctr"/>
+            <a:r>
+              <a:rPr sz="1400" b="1">
+                <a:solidFill>
+                  <a:srgbClr val="FFFFFF"/>
+                </a:solidFill>
+                <a:latin typeface="Calibri"/>
+              </a:rPr>
+              <a:t>3</a:t>
+            </a:r>
+          </a:p>
+        </p:txBody>
+      </p:sp>
+      <p:sp>
+        <p:nvSpPr>
+          <p:cNvPr id="11" name="TextBox 10"/>
+          <p:cNvSpPr txBox="1"/>
+          <p:nvPr/>
+        </p:nvSpPr>
+        <p:spPr>
+          <a:xfrm>
+            <a:off x="1234440" y="3513124"/>
+            <a:ext cx="10408615" cy="791870"/>
+          </a:xfrm>
+          <a:prstGeom prst="rect">
+            <a:avLst/>
+          </a:prstGeom>
+          <a:noFill/>
+        </p:spPr>
+        <p:txBody>
+          <a:bodyPr wrap="square" anchor="t" lIns="0" rIns="0" tIns="0" bIns="0"/>
+          <a:lstStyle/>
+          <a:p>
+            <a:pPr algn="l"/>
+            <a:r>
+              <a:rPr sz="2200" b="0" i="0">
+                <a:solidFill>
+                  <a:srgbClr val="202122"/>
+                </a:solidFill>
+                <a:latin typeface="Calibri"/>
+              </a:rPr>
+              <a:t>Give a mitigation for insider threats.</a:t>
+            </a:r>
+          </a:p>
+        </p:txBody>
+      </p:sp>
+      <p:sp>
+        <p:nvSpPr>
+          <p:cNvPr id="12" name="Oval 11"/>
+          <p:cNvSpPr/>
+          <p:nvPr/>
+        </p:nvSpPr>
+        <p:spPr>
+          <a:xfrm>
+            <a:off x="548640" y="4487875"/>
+            <a:ext cx="411480" cy="411480"/>
+          </a:xfrm>
+          <a:prstGeom prst="ellipse">
+            <a:avLst/>
+          </a:prstGeom>
+          <a:solidFill>
+            <a:srgbClr val="E0463A"/>
+          </a:solidFill>
+          <a:ln>
+            <a:noFill/>
+          </a:ln>
+          <a:effectLst/>
+        </p:spPr>
+        <p:style>
+          <a:lnRef idx="1">
+            <a:schemeClr val="accent1"/>
+          </a:lnRef>
+          <a:fillRef idx="3">
+            <a:schemeClr val="accent1"/>
+          </a:fillRef>
+          <a:effectRef idx="2">
+            <a:schemeClr val="accent1"/>
+          </a:effectRef>
+          <a:fontRef idx="minor">
+            <a:schemeClr val="lt1"/>
+          </a:fontRef>
+        </p:style>
+        <p:txBody>
+          <a:bodyPr rtlCol="0" anchor="ctr" lIns="0" rIns="0" tIns="0" bIns="0"/>
+          <a:lstStyle/>
+          <a:p>
+            <a:pPr algn="ctr"/>
+            <a:r>
+              <a:rPr sz="1400" b="1">
+                <a:solidFill>
+                  <a:srgbClr val="FFFFFF"/>
+                </a:solidFill>
+                <a:latin typeface="Calibri"/>
+              </a:rPr>
+              <a:t>4</a:t>
+            </a:r>
+          </a:p>
+        </p:txBody>
+      </p:sp>
+      <p:sp>
+        <p:nvSpPr>
+          <p:cNvPr id="13" name="TextBox 12"/>
+          <p:cNvSpPr txBox="1"/>
+          <p:nvPr/>
+        </p:nvSpPr>
+        <p:spPr>
+          <a:xfrm>
+            <a:off x="1234440" y="4469587"/>
+            <a:ext cx="10408615" cy="791870"/>
+          </a:xfrm>
+          <a:prstGeom prst="rect">
+            <a:avLst/>
+          </a:prstGeom>
+          <a:noFill/>
+        </p:spPr>
+        <p:txBody>
+          <a:bodyPr wrap="square" anchor="t" lIns="0" rIns="0" tIns="0" bIns="0"/>
+          <a:lstStyle/>
+          <a:p>
+            <a:pPr algn="l"/>
+            <a:r>
+              <a:rPr sz="2200" b="0" i="0">
+                <a:solidFill>
+                  <a:srgbClr val="202122"/>
+                </a:solidFill>
+                <a:latin typeface="Calibri"/>
+              </a:rPr>
+              <a:t>Name four organisational policies.</a:t>
+            </a:r>
+          </a:p>
+        </p:txBody>
+      </p:sp>
+      <p:sp>
+        <p:nvSpPr>
+          <p:cNvPr id="14" name="Oval 13"/>
+          <p:cNvSpPr/>
+          <p:nvPr/>
+        </p:nvSpPr>
+        <p:spPr>
+          <a:xfrm>
+            <a:off x="548640" y="5444337"/>
+            <a:ext cx="411480" cy="411480"/>
+          </a:xfrm>
+          <a:prstGeom prst="ellipse">
+            <a:avLst/>
+          </a:prstGeom>
+          <a:solidFill>
+            <a:srgbClr val="E0463A"/>
+          </a:solidFill>
+          <a:ln>
+            <a:noFill/>
+          </a:ln>
+          <a:effectLst/>
+        </p:spPr>
+        <p:style>
+          <a:lnRef idx="1">
+            <a:schemeClr val="accent1"/>
+          </a:lnRef>
+          <a:fillRef idx="3">
+            <a:schemeClr val="accent1"/>
+          </a:fillRef>
+          <a:effectRef idx="2">
+            <a:schemeClr val="accent1"/>
+          </a:effectRef>
+          <a:fontRef idx="minor">
+            <a:schemeClr val="lt1"/>
+          </a:fontRef>
+        </p:style>
+        <p:txBody>
+          <a:bodyPr rtlCol="0" anchor="ctr" lIns="0" rIns="0" tIns="0" bIns="0"/>
+          <a:lstStyle/>
+          <a:p>
+            <a:pPr algn="ctr"/>
+            <a:r>
+              <a:rPr sz="1400" b="1">
+                <a:solidFill>
+                  <a:srgbClr val="FFFFFF"/>
+                </a:solidFill>
+                <a:latin typeface="Calibri"/>
+              </a:rPr>
+              <a:t>5</a:t>
+            </a:r>
+          </a:p>
+        </p:txBody>
+      </p:sp>
+      <p:sp>
+        <p:nvSpPr>
+          <p:cNvPr id="15" name="TextBox 14"/>
+          <p:cNvSpPr txBox="1"/>
+          <p:nvPr/>
+        </p:nvSpPr>
+        <p:spPr>
+          <a:xfrm>
+            <a:off x="1234440" y="5426049"/>
+            <a:ext cx="10408615" cy="791870"/>
+          </a:xfrm>
+          <a:prstGeom prst="rect">
+            <a:avLst/>
+          </a:prstGeom>
+          <a:noFill/>
+        </p:spPr>
+        <p:txBody>
+          <a:bodyPr wrap="square" anchor="t" lIns="0" rIns="0" tIns="0" bIns="0"/>
+          <a:lstStyle/>
+          <a:p>
+            <a:pPr algn="l"/>
+            <a:r>
+              <a:rPr sz="2200" b="0" i="0">
+                <a:solidFill>
+                  <a:srgbClr val="202122"/>
+                </a:solidFill>
+                <a:latin typeface="Calibri"/>
+              </a:rPr>
+              <a:t>Why test restoring backups?</a:t>
+            </a:r>
+          </a:p>
+        </p:txBody>
+      </p:sp>
+    </p:spTree>
+  </p:cSld>
+  <p:clrMapOvr>
+    <a:masterClrMapping/>
+  </p:clrMapOvr>
+</p:sld>
+</file>
+
+<file path=ppt/slides/slide15.xml><?xml version="1.0" encoding="utf-8"?>
+<p:sld xmlns:a="http://schemas.openxmlformats.org/drawingml/2006/main" xmlns:p="http://schemas.openxmlformats.org/presentationml/2006/main" xmlns:r="http://schemas.openxmlformats.org/officeDocument/2006/relationships">
+  <p:cSld>
+    <p:bg>
+      <p:bgPr>
+        <a:solidFill>
+          <a:srgbClr val="FFFFFF"/>
+        </a:solidFill>
+        <a:effectLst/>
+      </p:bgPr>
+    </p:bg>
+    <p:spTree>
+      <p:nvGrpSpPr>
+        <p:cNvPr id="1" name=""/>
+        <p:cNvGrpSpPr/>
+        <p:nvPr/>
+      </p:nvGrpSpPr>
+      <p:grpSpPr/>
+      <p:sp>
+        <p:nvSpPr>
+          <p:cNvPr id="2" name="TextBox 1"/>
+          <p:cNvSpPr txBox="1"/>
+          <p:nvPr/>
+        </p:nvSpPr>
+        <p:spPr>
+          <a:xfrm>
+            <a:off x="548640" y="320040"/>
+            <a:ext cx="11094415" cy="274320"/>
+          </a:xfrm>
+          <a:prstGeom prst="rect">
+            <a:avLst/>
+          </a:prstGeom>
+          <a:noFill/>
+        </p:spPr>
+        <p:txBody>
+          <a:bodyPr wrap="square" anchor="t" lIns="0" rIns="0" tIns="0" bIns="0"/>
+          <a:lstStyle/>
+          <a:p>
+            <a:pPr algn="l"/>
+            <a:r>
+              <a:rPr sz="1100" b="1" i="0">
+                <a:solidFill>
+                  <a:srgbClr val="54595D"/>
+                </a:solidFill>
+                <a:latin typeface="Calibri"/>
+              </a:rPr>
+              <a:t>CYBER SECURITY  ·  Cyber Security Content Area 2</a:t>
+            </a:r>
+          </a:p>
+        </p:txBody>
+      </p:sp>
+      <p:sp>
+        <p:nvSpPr>
+          <p:cNvPr id="3" name="TextBox 2"/>
+          <p:cNvSpPr txBox="1"/>
+          <p:nvPr/>
+        </p:nvSpPr>
+        <p:spPr>
+          <a:xfrm>
+            <a:off x="548640" y="566928"/>
+            <a:ext cx="11094415" cy="822960"/>
+          </a:xfrm>
+          <a:prstGeom prst="rect">
+            <a:avLst/>
+          </a:prstGeom>
+          <a:noFill/>
+        </p:spPr>
+        <p:txBody>
+          <a:bodyPr wrap="square" anchor="ctr" lIns="0" rIns="0" tIns="0" bIns="0"/>
+          <a:lstStyle/>
+          <a:p>
+            <a:pPr algn="l"/>
+            <a:r>
+              <a:rPr sz="3200" b="1" i="0">
+                <a:solidFill>
+                  <a:srgbClr val="03306E"/>
+                </a:solidFill>
+                <a:latin typeface="Cambria"/>
+              </a:rPr>
+              <a:t>Answers</a:t>
+            </a:r>
+          </a:p>
+        </p:txBody>
+      </p:sp>
+      <p:sp>
+        <p:nvSpPr>
+          <p:cNvPr id="4" name="TextBox 3"/>
+          <p:cNvSpPr txBox="1"/>
+          <p:nvPr/>
+        </p:nvSpPr>
+        <p:spPr>
+          <a:xfrm>
+            <a:off x="548640" y="6446520"/>
+            <a:ext cx="8229600" cy="274320"/>
+          </a:xfrm>
+          <a:prstGeom prst="rect">
+            <a:avLst/>
+          </a:prstGeom>
+          <a:noFill/>
+        </p:spPr>
+        <p:txBody>
+          <a:bodyPr wrap="square" anchor="t" lIns="0" rIns="0" tIns="0" bIns="0"/>
+          <a:lstStyle/>
+          <a:p>
+            <a:pPr algn="l"/>
+            <a:r>
+              <a:rPr sz="1000" b="0" i="0">
+                <a:solidFill>
+                  <a:srgbClr val="54595D"/>
+                </a:solidFill>
+                <a:latin typeface="Calibri"/>
+              </a:rPr>
+              <a:t>Digital Support and Security T Level  ·  Mitigation, Backups, Policies and Compliance</a:t>
+            </a:r>
+          </a:p>
+        </p:txBody>
+      </p:sp>
+      <p:sp>
+        <p:nvSpPr>
+          <p:cNvPr id="5" name="TextBox 4"/>
+          <p:cNvSpPr txBox="1"/>
+          <p:nvPr/>
+        </p:nvSpPr>
+        <p:spPr>
+          <a:xfrm>
+            <a:off x="10728655" y="6446520"/>
+            <a:ext cx="914400" cy="274320"/>
+          </a:xfrm>
+          <a:prstGeom prst="rect">
+            <a:avLst/>
+          </a:prstGeom>
+          <a:noFill/>
+        </p:spPr>
+        <p:txBody>
+          <a:bodyPr wrap="square" anchor="t" lIns="0" rIns="0" tIns="0" bIns="0"/>
+          <a:lstStyle/>
+          <a:p>
+            <a:pPr algn="r"/>
+            <a:r>
+              <a:rPr sz="1000" b="0" i="0">
+                <a:solidFill>
+                  <a:srgbClr val="54595D"/>
+                </a:solidFill>
+                <a:latin typeface="Calibri"/>
+              </a:rPr>
+              <a:t>15</a:t>
+            </a:r>
+          </a:p>
+        </p:txBody>
+      </p:sp>
+      <p:sp>
+        <p:nvSpPr>
+          <p:cNvPr id="6" name="Oval 5"/>
+          <p:cNvSpPr/>
+          <p:nvPr/>
+        </p:nvSpPr>
+        <p:spPr>
+          <a:xfrm>
+            <a:off x="548640" y="1618488"/>
+            <a:ext cx="411480" cy="411480"/>
+          </a:xfrm>
+          <a:prstGeom prst="ellipse">
+            <a:avLst/>
+          </a:prstGeom>
+          <a:solidFill>
+            <a:srgbClr val="E0463A"/>
+          </a:solidFill>
+          <a:ln>
+            <a:noFill/>
+          </a:ln>
+          <a:effectLst/>
+        </p:spPr>
+        <p:style>
+          <a:lnRef idx="1">
+            <a:schemeClr val="accent1"/>
+          </a:lnRef>
+          <a:fillRef idx="3">
+            <a:schemeClr val="accent1"/>
+          </a:fillRef>
+          <a:effectRef idx="2">
+            <a:schemeClr val="accent1"/>
+          </a:effectRef>
+          <a:fontRef idx="minor">
+            <a:schemeClr val="lt1"/>
+          </a:fontRef>
+        </p:style>
+        <p:txBody>
+          <a:bodyPr rtlCol="0" anchor="ctr" lIns="0" rIns="0" tIns="0" bIns="0"/>
+          <a:lstStyle/>
+          <a:p>
+            <a:pPr algn="ctr"/>
+            <a:r>
+              <a:rPr sz="1400" b="1">
+                <a:solidFill>
+                  <a:srgbClr val="FFFFFF"/>
+                </a:solidFill>
+                <a:latin typeface="Calibri"/>
+              </a:rPr>
+              <a:t>1</a:t>
+            </a:r>
+          </a:p>
+        </p:txBody>
+      </p:sp>
+      <p:sp>
+        <p:nvSpPr>
+          <p:cNvPr id="7" name="TextBox 6"/>
+          <p:cNvSpPr txBox="1"/>
+          <p:nvPr/>
+        </p:nvSpPr>
+        <p:spPr>
+          <a:xfrm>
+            <a:off x="1234440" y="1600200"/>
+            <a:ext cx="10408615" cy="791870"/>
+          </a:xfrm>
+          <a:prstGeom prst="rect">
+            <a:avLst/>
+          </a:prstGeom>
+          <a:noFill/>
+        </p:spPr>
+        <p:txBody>
+          <a:bodyPr wrap="square" anchor="t" lIns="0" rIns="0" tIns="0" bIns="0"/>
+          <a:lstStyle/>
+          <a:p>
+            <a:pPr algn="l"/>
+            <a:r>
+              <a:rPr sz="1800" b="0" i="0">
+                <a:solidFill>
+                  <a:srgbClr val="54595D"/>
+                </a:solidFill>
+                <a:latin typeface="Calibri"/>
+              </a:rPr>
+              <a:t>What makes a backup immutable?</a:t>
+            </a:r>
+          </a:p>
+          <a:p>
+            <a:r>
+              <a:rPr sz="1800" b="1">
+                <a:solidFill>
+                  <a:srgbClr val="03306E"/>
+                </a:solidFill>
+                <a:latin typeface="Calibri"/>
+              </a:rPr>
+              <a:t>It cannot be changed, overwritten or deleted.</a:t>
+            </a:r>
+          </a:p>
+        </p:txBody>
+      </p:sp>
+      <p:sp>
+        <p:nvSpPr>
+          <p:cNvPr id="8" name="Oval 7"/>
+          <p:cNvSpPr/>
+          <p:nvPr/>
+        </p:nvSpPr>
+        <p:spPr>
+          <a:xfrm>
+            <a:off x="548640" y="2574950"/>
+            <a:ext cx="411480" cy="411480"/>
+          </a:xfrm>
+          <a:prstGeom prst="ellipse">
+            <a:avLst/>
+          </a:prstGeom>
+          <a:solidFill>
+            <a:srgbClr val="E0463A"/>
+          </a:solidFill>
+          <a:ln>
+            <a:noFill/>
+          </a:ln>
+          <a:effectLst/>
+        </p:spPr>
+        <p:style>
+          <a:lnRef idx="1">
+            <a:schemeClr val="accent1"/>
+          </a:lnRef>
+          <a:fillRef idx="3">
+            <a:schemeClr val="accent1"/>
+          </a:fillRef>
+          <a:effectRef idx="2">
+            <a:schemeClr val="accent1"/>
+          </a:effectRef>
+          <a:fontRef idx="minor">
+            <a:schemeClr val="lt1"/>
+          </a:fontRef>
+        </p:style>
+        <p:txBody>
+          <a:bodyPr rtlCol="0" anchor="ctr" lIns="0" rIns="0" tIns="0" bIns="0"/>
+          <a:lstStyle/>
+          <a:p>
+            <a:pPr algn="ctr"/>
+            <a:r>
+              <a:rPr sz="1400" b="1">
+                <a:solidFill>
+                  <a:srgbClr val="FFFFFF"/>
+                </a:solidFill>
+                <a:latin typeface="Calibri"/>
+              </a:rPr>
+              <a:t>2</a:t>
+            </a:r>
+          </a:p>
+        </p:txBody>
+      </p:sp>
+      <p:sp>
+        <p:nvSpPr>
+          <p:cNvPr id="9" name="TextBox 8"/>
+          <p:cNvSpPr txBox="1"/>
+          <p:nvPr/>
+        </p:nvSpPr>
+        <p:spPr>
+          <a:xfrm>
+            <a:off x="1234440" y="2556662"/>
+            <a:ext cx="10408615" cy="791870"/>
+          </a:xfrm>
+          <a:prstGeom prst="rect">
+            <a:avLst/>
+          </a:prstGeom>
+          <a:noFill/>
+        </p:spPr>
+        <p:txBody>
+          <a:bodyPr wrap="square" anchor="t" lIns="0" rIns="0" tIns="0" bIns="0"/>
+          <a:lstStyle/>
+          <a:p>
+            <a:pPr algn="l"/>
+            <a:r>
+              <a:rPr sz="1800" b="0" i="0">
+                <a:solidFill>
+                  <a:srgbClr val="54595D"/>
+                </a:solidFill>
+                <a:latin typeface="Calibri"/>
+              </a:rPr>
+              <a:t>What is PAM used for?</a:t>
+            </a:r>
+          </a:p>
+          <a:p>
+            <a:r>
+              <a:rPr sz="1800" b="1">
+                <a:solidFill>
+                  <a:srgbClr val="03306E"/>
+                </a:solidFill>
+                <a:latin typeface="Calibri"/>
+              </a:rPr>
+              <a:t>Managing privileged (elevated) access such as super-user accounts.</a:t>
+            </a:r>
+          </a:p>
+        </p:txBody>
+      </p:sp>
+      <p:sp>
+        <p:nvSpPr>
+          <p:cNvPr id="10" name="Oval 9"/>
+          <p:cNvSpPr/>
+          <p:nvPr/>
+        </p:nvSpPr>
+        <p:spPr>
+          <a:xfrm>
+            <a:off x="548640" y="3531412"/>
+            <a:ext cx="411480" cy="411480"/>
+          </a:xfrm>
+          <a:prstGeom prst="ellipse">
+            <a:avLst/>
+          </a:prstGeom>
+          <a:solidFill>
+            <a:srgbClr val="E0463A"/>
+          </a:solidFill>
+          <a:ln>
+            <a:noFill/>
+          </a:ln>
+          <a:effectLst/>
+        </p:spPr>
+        <p:style>
+          <a:lnRef idx="1">
+            <a:schemeClr val="accent1"/>
+          </a:lnRef>
+          <a:fillRef idx="3">
+            <a:schemeClr val="accent1"/>
+          </a:fillRef>
+          <a:effectRef idx="2">
+            <a:schemeClr val="accent1"/>
+          </a:effectRef>
+          <a:fontRef idx="minor">
+            <a:schemeClr val="lt1"/>
+          </a:fontRef>
+        </p:style>
+        <p:txBody>
+          <a:bodyPr rtlCol="0" anchor="ctr" lIns="0" rIns="0" tIns="0" bIns="0"/>
+          <a:lstStyle/>
+          <a:p>
+            <a:pPr algn="ctr"/>
+            <a:r>
+              <a:rPr sz="1400" b="1">
+                <a:solidFill>
+                  <a:srgbClr val="FFFFFF"/>
+                </a:solidFill>
+                <a:latin typeface="Calibri"/>
+              </a:rPr>
+              <a:t>3</a:t>
+            </a:r>
+          </a:p>
+        </p:txBody>
+      </p:sp>
+      <p:sp>
+        <p:nvSpPr>
+          <p:cNvPr id="11" name="TextBox 10"/>
+          <p:cNvSpPr txBox="1"/>
+          <p:nvPr/>
+        </p:nvSpPr>
+        <p:spPr>
+          <a:xfrm>
+            <a:off x="1234440" y="3513124"/>
+            <a:ext cx="10408615" cy="791870"/>
+          </a:xfrm>
+          <a:prstGeom prst="rect">
+            <a:avLst/>
+          </a:prstGeom>
+          <a:noFill/>
+        </p:spPr>
+        <p:txBody>
+          <a:bodyPr wrap="square" anchor="t" lIns="0" rIns="0" tIns="0" bIns="0"/>
+          <a:lstStyle/>
+          <a:p>
+            <a:pPr algn="l"/>
+            <a:r>
+              <a:rPr sz="1800" b="0" i="0">
+                <a:solidFill>
+                  <a:srgbClr val="54595D"/>
+                </a:solidFill>
+                <a:latin typeface="Calibri"/>
+              </a:rPr>
+              <a:t>Give a mitigation for insider threats.</a:t>
+            </a:r>
+          </a:p>
+          <a:p>
+            <a:r>
+              <a:rPr sz="1800" b="1">
+                <a:solidFill>
+                  <a:srgbClr val="03306E"/>
+                </a:solidFill>
+                <a:latin typeface="Calibri"/>
+              </a:rPr>
+              <a:t>Access controls, monitoring unusual activity or segregation of duties.</a:t>
+            </a:r>
+          </a:p>
+        </p:txBody>
+      </p:sp>
+      <p:sp>
+        <p:nvSpPr>
+          <p:cNvPr id="12" name="Oval 11"/>
+          <p:cNvSpPr/>
+          <p:nvPr/>
+        </p:nvSpPr>
+        <p:spPr>
+          <a:xfrm>
+            <a:off x="548640" y="4487875"/>
+            <a:ext cx="411480" cy="411480"/>
+          </a:xfrm>
+          <a:prstGeom prst="ellipse">
+            <a:avLst/>
+          </a:prstGeom>
+          <a:solidFill>
+            <a:srgbClr val="E0463A"/>
+          </a:solidFill>
+          <a:ln>
+            <a:noFill/>
+          </a:ln>
+          <a:effectLst/>
+        </p:spPr>
+        <p:style>
+          <a:lnRef idx="1">
+            <a:schemeClr val="accent1"/>
+          </a:lnRef>
+          <a:fillRef idx="3">
+            <a:schemeClr val="accent1"/>
+          </a:fillRef>
+          <a:effectRef idx="2">
+            <a:schemeClr val="accent1"/>
+          </a:effectRef>
+          <a:fontRef idx="minor">
+            <a:schemeClr val="lt1"/>
+          </a:fontRef>
+        </p:style>
+        <p:txBody>
+          <a:bodyPr rtlCol="0" anchor="ctr" lIns="0" rIns="0" tIns="0" bIns="0"/>
+          <a:lstStyle/>
+          <a:p>
+            <a:pPr algn="ctr"/>
+            <a:r>
+              <a:rPr sz="1400" b="1">
+                <a:solidFill>
+                  <a:srgbClr val="FFFFFF"/>
+                </a:solidFill>
+                <a:latin typeface="Calibri"/>
+              </a:rPr>
+              <a:t>4</a:t>
+            </a:r>
+          </a:p>
+        </p:txBody>
+      </p:sp>
+      <p:sp>
+        <p:nvSpPr>
+          <p:cNvPr id="13" name="TextBox 12"/>
+          <p:cNvSpPr txBox="1"/>
+          <p:nvPr/>
+        </p:nvSpPr>
+        <p:spPr>
+          <a:xfrm>
+            <a:off x="1234440" y="4469587"/>
+            <a:ext cx="10408615" cy="791870"/>
+          </a:xfrm>
+          <a:prstGeom prst="rect">
+            <a:avLst/>
+          </a:prstGeom>
+          <a:noFill/>
+        </p:spPr>
+        <p:txBody>
+          <a:bodyPr wrap="square" anchor="t" lIns="0" rIns="0" tIns="0" bIns="0"/>
+          <a:lstStyle/>
+          <a:p>
+            <a:pPr algn="l"/>
+            <a:r>
+              <a:rPr sz="1800" b="0" i="0">
+                <a:solidFill>
+                  <a:srgbClr val="54595D"/>
+                </a:solidFill>
+                <a:latin typeface="Calibri"/>
+              </a:rPr>
+              <a:t>Name four organisational policies.</a:t>
+            </a:r>
+          </a:p>
+          <a:p>
+            <a:r>
+              <a:rPr sz="1800" b="1">
+                <a:solidFill>
+                  <a:srgbClr val="03306E"/>
+                </a:solidFill>
+                <a:latin typeface="Calibri"/>
+              </a:rPr>
+              <a:t>Any four from the list, e.g. AUP, password, BYOD, backup.</a:t>
+            </a:r>
+          </a:p>
+        </p:txBody>
+      </p:sp>
+      <p:sp>
+        <p:nvSpPr>
+          <p:cNvPr id="14" name="Oval 13"/>
+          <p:cNvSpPr/>
+          <p:nvPr/>
+        </p:nvSpPr>
+        <p:spPr>
+          <a:xfrm>
+            <a:off x="548640" y="5444337"/>
+            <a:ext cx="411480" cy="411480"/>
+          </a:xfrm>
+          <a:prstGeom prst="ellipse">
+            <a:avLst/>
+          </a:prstGeom>
+          <a:solidFill>
+            <a:srgbClr val="E0463A"/>
+          </a:solidFill>
+          <a:ln>
+            <a:noFill/>
+          </a:ln>
+          <a:effectLst/>
+        </p:spPr>
+        <p:style>
+          <a:lnRef idx="1">
+            <a:schemeClr val="accent1"/>
+          </a:lnRef>
+          <a:fillRef idx="3">
+            <a:schemeClr val="accent1"/>
+          </a:fillRef>
+          <a:effectRef idx="2">
+            <a:schemeClr val="accent1"/>
+          </a:effectRef>
+          <a:fontRef idx="minor">
+            <a:schemeClr val="lt1"/>
+          </a:fontRef>
+        </p:style>
+        <p:txBody>
+          <a:bodyPr rtlCol="0" anchor="ctr" lIns="0" rIns="0" tIns="0" bIns="0"/>
+          <a:lstStyle/>
+          <a:p>
+            <a:pPr algn="ctr"/>
+            <a:r>
+              <a:rPr sz="1400" b="1">
+                <a:solidFill>
+                  <a:srgbClr val="FFFFFF"/>
+                </a:solidFill>
+                <a:latin typeface="Calibri"/>
+              </a:rPr>
+              <a:t>5</a:t>
+            </a:r>
+          </a:p>
+        </p:txBody>
+      </p:sp>
+      <p:sp>
+        <p:nvSpPr>
+          <p:cNvPr id="15" name="TextBox 14"/>
+          <p:cNvSpPr txBox="1"/>
+          <p:nvPr/>
+        </p:nvSpPr>
+        <p:spPr>
+          <a:xfrm>
+            <a:off x="1234440" y="5426049"/>
+            <a:ext cx="10408615" cy="791870"/>
+          </a:xfrm>
+          <a:prstGeom prst="rect">
+            <a:avLst/>
+          </a:prstGeom>
+          <a:noFill/>
+        </p:spPr>
+        <p:txBody>
+          <a:bodyPr wrap="square" anchor="t" lIns="0" rIns="0" tIns="0" bIns="0"/>
+          <a:lstStyle/>
+          <a:p>
+            <a:pPr algn="l"/>
+            <a:r>
+              <a:rPr sz="1800" b="0" i="0">
+                <a:solidFill>
+                  <a:srgbClr val="54595D"/>
+                </a:solidFill>
+                <a:latin typeface="Calibri"/>
+              </a:rPr>
+              <a:t>Why test restoring backups?</a:t>
+            </a:r>
+          </a:p>
+          <a:p>
+            <a:r>
+              <a:rPr sz="1800" b="1">
+                <a:solidFill>
+                  <a:srgbClr val="03306E"/>
+                </a:solidFill>
+                <a:latin typeface="Calibri"/>
+              </a:rPr>
+              <a:t>To prove the backups actually work.</a:t>
+            </a:r>
+          </a:p>
+        </p:txBody>
+      </p:sp>
+    </p:spTree>
+  </p:cSld>
+  <p:clrMapOvr>
+    <a:masterClrMapping/>
+  </p:clrMapOvr>
+</p:sld>
+</file>
+
+<file path=ppt/slides/slide16.xml><?xml version="1.0" encoding="utf-8"?>
+<p:sld xmlns:a="http://schemas.openxmlformats.org/drawingml/2006/main" xmlns:p="http://schemas.openxmlformats.org/presentationml/2006/main" xmlns:r="http://schemas.openxmlformats.org/officeDocument/2006/relationships">
+  <p:cSld>
+    <p:bg>
+      <p:bgPr>
+        <a:solidFill>
+          <a:srgbClr val="FFFFFF"/>
+        </a:solidFill>
+        <a:effectLst/>
+      </p:bgPr>
+    </p:bg>
+    <p:spTree>
+      <p:nvGrpSpPr>
+        <p:cNvPr id="1" name=""/>
+        <p:cNvGrpSpPr/>
+        <p:nvPr/>
+      </p:nvGrpSpPr>
+      <p:grpSpPr/>
+      <p:sp>
+        <p:nvSpPr>
+          <p:cNvPr id="2" name="TextBox 1"/>
+          <p:cNvSpPr txBox="1"/>
+          <p:nvPr/>
+        </p:nvSpPr>
+        <p:spPr>
+          <a:xfrm>
+            <a:off x="548640" y="320040"/>
+            <a:ext cx="11094415" cy="274320"/>
+          </a:xfrm>
+          <a:prstGeom prst="rect">
+            <a:avLst/>
+          </a:prstGeom>
+          <a:noFill/>
+        </p:spPr>
+        <p:txBody>
+          <a:bodyPr wrap="square" anchor="t" lIns="0" rIns="0" tIns="0" bIns="0"/>
+          <a:lstStyle/>
+          <a:p>
+            <a:pPr algn="l"/>
+            <a:r>
+              <a:rPr sz="1100" b="1" i="0">
+                <a:solidFill>
+                  <a:srgbClr val="54595D"/>
+                </a:solidFill>
+                <a:latin typeface="Calibri"/>
+              </a:rPr>
+              <a:t>CYBER SECURITY  ·  Cyber Security Content Area 2</a:t>
+            </a:r>
+          </a:p>
+        </p:txBody>
+      </p:sp>
+      <p:sp>
+        <p:nvSpPr>
+          <p:cNvPr id="3" name="TextBox 2"/>
+          <p:cNvSpPr txBox="1"/>
+          <p:nvPr/>
+        </p:nvSpPr>
+        <p:spPr>
+          <a:xfrm>
+            <a:off x="548640" y="566928"/>
+            <a:ext cx="11094415" cy="822960"/>
+          </a:xfrm>
+          <a:prstGeom prst="rect">
+            <a:avLst/>
+          </a:prstGeom>
+          <a:noFill/>
+        </p:spPr>
+        <p:txBody>
+          <a:bodyPr wrap="square" anchor="ctr" lIns="0" rIns="0" tIns="0" bIns="0"/>
+          <a:lstStyle/>
+          <a:p>
+            <a:pPr algn="l"/>
+            <a:r>
+              <a:rPr sz="3200" b="1" i="0">
+                <a:solidFill>
+                  <a:srgbClr val="03306E"/>
+                </a:solidFill>
+                <a:latin typeface="Cambria"/>
+              </a:rPr>
+              <a:t>Activity: Ransomware-proof the backups</a:t>
+            </a:r>
+          </a:p>
+        </p:txBody>
+      </p:sp>
+      <p:sp>
+        <p:nvSpPr>
+          <p:cNvPr id="4" name="TextBox 3"/>
+          <p:cNvSpPr txBox="1"/>
+          <p:nvPr/>
+        </p:nvSpPr>
+        <p:spPr>
+          <a:xfrm>
+            <a:off x="548640" y="6446520"/>
+            <a:ext cx="8229600" cy="274320"/>
+          </a:xfrm>
+          <a:prstGeom prst="rect">
+            <a:avLst/>
+          </a:prstGeom>
+          <a:noFill/>
+        </p:spPr>
+        <p:txBody>
+          <a:bodyPr wrap="square" anchor="t" lIns="0" rIns="0" tIns="0" bIns="0"/>
+          <a:lstStyle/>
+          <a:p>
+            <a:pPr algn="l"/>
+            <a:r>
+              <a:rPr sz="1000" b="0" i="0">
+                <a:solidFill>
+                  <a:srgbClr val="54595D"/>
+                </a:solidFill>
+                <a:latin typeface="Calibri"/>
+              </a:rPr>
+              <a:t>Digital Support and Security T Level  ·  Mitigation, Backups, Policies and Compliance</a:t>
+            </a:r>
+          </a:p>
+        </p:txBody>
+      </p:sp>
+      <p:sp>
+        <p:nvSpPr>
+          <p:cNvPr id="5" name="TextBox 4"/>
+          <p:cNvSpPr txBox="1"/>
+          <p:nvPr/>
+        </p:nvSpPr>
+        <p:spPr>
+          <a:xfrm>
+            <a:off x="10728655" y="6446520"/>
+            <a:ext cx="914400" cy="274320"/>
+          </a:xfrm>
+          <a:prstGeom prst="rect">
+            <a:avLst/>
+          </a:prstGeom>
+          <a:noFill/>
+        </p:spPr>
+        <p:txBody>
+          <a:bodyPr wrap="square" anchor="t" lIns="0" rIns="0" tIns="0" bIns="0"/>
+          <a:lstStyle/>
+          <a:p>
+            <a:pPr algn="r"/>
+            <a:r>
+              <a:rPr sz="1000" b="0" i="0">
+                <a:solidFill>
+                  <a:srgbClr val="54595D"/>
+                </a:solidFill>
+                <a:latin typeface="Calibri"/>
+              </a:rPr>
+              <a:t>16</a:t>
             </a:r>
           </a:p>
         </p:txBody>
@@ -4752,7 +8339,7 @@
 </p:sld>
 </file>
 
-<file path=ppt/slides/slide11.xml><?xml version="1.0" encoding="utf-8"?>
+<file path=ppt/slides/slide17.xml><?xml version="1.0" encoding="utf-8"?>
 <p:sld xmlns:a="http://schemas.openxmlformats.org/drawingml/2006/main" xmlns:p="http://schemas.openxmlformats.org/presentationml/2006/main" xmlns:r="http://schemas.openxmlformats.org/officeDocument/2006/relationships">
   <p:cSld>
     <p:bg>
@@ -6069,6 +9656,382 @@
                 <a:latin typeface="Calibri"/>
               </a:rPr>
               <a:t>3</a:t>
+            </a:r>
+          </a:p>
+        </p:txBody>
+      </p:sp>
+      <p:sp>
+        <p:nvSpPr>
+          <p:cNvPr id="6" name="TextBox 5"/>
+          <p:cNvSpPr txBox="1"/>
+          <p:nvPr/>
+        </p:nvSpPr>
+        <p:spPr>
+          <a:xfrm>
+            <a:off x="548640" y="1554480"/>
+            <a:ext cx="6720840" cy="4617720"/>
+          </a:xfrm>
+          <a:prstGeom prst="rect">
+            <a:avLst/>
+          </a:prstGeom>
+          <a:noFill/>
+        </p:spPr>
+        <p:txBody>
+          <a:bodyPr wrap="square" lIns="0" rIns="0" tIns="0" bIns="0">
+            <a:spAutoFit/>
+          </a:bodyPr>
+          <a:lstStyle/>
+          <a:p>
+            <a:pPr>
+              <a:spcAft>
+                <a:spcPts val="1320"/>
+              </a:spcAft>
+            </a:pPr>
+            <a:r>
+              <a:rPr sz="2200" b="0">
+                <a:solidFill>
+                  <a:srgbClr val="202122"/>
+                </a:solidFill>
+                <a:latin typeface="Calibri"/>
+              </a:rPr>
+              <a:t>Most privacy breaches come from predictable sources, each with a matching control.</a:t>
+            </a:r>
+          </a:p>
+          <a:p>
+            <a:pPr>
+              <a:spcAft>
+                <a:spcPts val="1320"/>
+              </a:spcAft>
+            </a:pPr>
+            <a:r>
+              <a:rPr sz="2200" b="0">
+                <a:solidFill>
+                  <a:srgbClr val="202122"/>
+                </a:solidFill>
+                <a:latin typeface="Calibri"/>
+              </a:rPr>
+              <a:t>Social engineering is tackled by raising awareness of current scams. Unmanaged personal devices are restricted by policy. Untrained staff get training and clear procedures. Insider threats are limited by access controls, monitoring for unusual activity and separating duties. Unpatched applications are kept updated. Third-party suppliers are checked with due diligence before being trusted with data. Improperly disposed devices are prevented by secure wiping and following DPA 2018.</a:t>
+            </a:r>
+          </a:p>
+        </p:txBody>
+      </p:sp>
+      <p:sp>
+        <p:nvSpPr>
+          <p:cNvPr id="7" name="Rounded Rectangle 6"/>
+          <p:cNvSpPr/>
+          <p:nvPr/>
+        </p:nvSpPr>
+        <p:spPr>
+          <a:xfrm>
+            <a:off x="7772400" y="1554480"/>
+            <a:ext cx="3867912" cy="4526280"/>
+          </a:xfrm>
+          <a:prstGeom prst="roundRect">
+            <a:avLst>
+              <a:gd name="adj" fmla="val 8000"/>
+            </a:avLst>
+          </a:prstGeom>
+          <a:solidFill>
+            <a:srgbClr val="03306E"/>
+          </a:solidFill>
+          <a:ln>
+            <a:noFill/>
+          </a:ln>
+          <a:effectLst/>
+        </p:spPr>
+        <p:style>
+          <a:lnRef idx="1">
+            <a:schemeClr val="accent1"/>
+          </a:lnRef>
+          <a:fillRef idx="3">
+            <a:schemeClr val="accent1"/>
+          </a:fillRef>
+          <a:effectRef idx="2">
+            <a:schemeClr val="accent1"/>
+          </a:effectRef>
+          <a:fontRef idx="minor">
+            <a:schemeClr val="lt1"/>
+          </a:fontRef>
+        </p:style>
+        <p:txBody>
+          <a:bodyPr rtlCol="0" anchor="ctr"/>
+          <a:lstStyle/>
+          <a:p/>
+        </p:txBody>
+      </p:sp>
+      <p:sp>
+        <p:nvSpPr>
+          <p:cNvPr id="8" name="Oval 7"/>
+          <p:cNvSpPr/>
+          <p:nvPr/>
+        </p:nvSpPr>
+        <p:spPr>
+          <a:xfrm>
+            <a:off x="8046720" y="1828800"/>
+            <a:ext cx="548640" cy="548640"/>
+          </a:xfrm>
+          <a:prstGeom prst="ellipse">
+            <a:avLst/>
+          </a:prstGeom>
+          <a:solidFill>
+            <a:srgbClr val="E0463A"/>
+          </a:solidFill>
+          <a:ln>
+            <a:noFill/>
+          </a:ln>
+          <a:effectLst/>
+        </p:spPr>
+        <p:style>
+          <a:lnRef idx="1">
+            <a:schemeClr val="accent1"/>
+          </a:lnRef>
+          <a:fillRef idx="3">
+            <a:schemeClr val="accent1"/>
+          </a:fillRef>
+          <a:effectRef idx="2">
+            <a:schemeClr val="accent1"/>
+          </a:effectRef>
+          <a:fontRef idx="minor">
+            <a:schemeClr val="lt1"/>
+          </a:fontRef>
+        </p:style>
+        <p:txBody>
+          <a:bodyPr rtlCol="0" anchor="ctr" lIns="0" rIns="0" tIns="0" bIns="0"/>
+          <a:lstStyle/>
+          <a:p>
+            <a:pPr algn="ctr"/>
+            <a:r>
+              <a:rPr sz="1300" b="1">
+                <a:solidFill>
+                  <a:srgbClr val="FFFFFF"/>
+                </a:solidFill>
+                <a:latin typeface="Calibri"/>
+              </a:rPr>
+              <a:t>e.g.</a:t>
+            </a:r>
+          </a:p>
+        </p:txBody>
+      </p:sp>
+      <p:sp>
+        <p:nvSpPr>
+          <p:cNvPr id="9" name="TextBox 8"/>
+          <p:cNvSpPr txBox="1"/>
+          <p:nvPr/>
+        </p:nvSpPr>
+        <p:spPr>
+          <a:xfrm>
+            <a:off x="8046720" y="2560320"/>
+            <a:ext cx="3291840" cy="365760"/>
+          </a:xfrm>
+          <a:prstGeom prst="rect">
+            <a:avLst/>
+          </a:prstGeom>
+          <a:noFill/>
+        </p:spPr>
+        <p:txBody>
+          <a:bodyPr wrap="square" anchor="t" lIns="0" rIns="0" tIns="0" bIns="0"/>
+          <a:lstStyle/>
+          <a:p>
+            <a:pPr algn="l"/>
+            <a:r>
+              <a:rPr sz="1300" b="1" i="0">
+                <a:solidFill>
+                  <a:srgbClr val="A9C8F0"/>
+                </a:solidFill>
+                <a:latin typeface="Calibri"/>
+              </a:rPr>
+              <a:t>EXAMPLE</a:t>
+            </a:r>
+          </a:p>
+        </p:txBody>
+      </p:sp>
+      <p:sp>
+        <p:nvSpPr>
+          <p:cNvPr id="10" name="TextBox 9"/>
+          <p:cNvSpPr txBox="1"/>
+          <p:nvPr/>
+        </p:nvSpPr>
+        <p:spPr>
+          <a:xfrm>
+            <a:off x="8046720" y="2971800"/>
+            <a:ext cx="3291840" cy="2971800"/>
+          </a:xfrm>
+          <a:prstGeom prst="rect">
+            <a:avLst/>
+          </a:prstGeom>
+          <a:noFill/>
+        </p:spPr>
+        <p:txBody>
+          <a:bodyPr wrap="square" anchor="t" lIns="0" rIns="0" tIns="0" bIns="0"/>
+          <a:lstStyle/>
+          <a:p>
+            <a:pPr algn="l"/>
+            <a:r>
+              <a:rPr sz="1900" b="0" i="0">
+                <a:solidFill>
+                  <a:srgbClr val="FFFFFF"/>
+                </a:solidFill>
+                <a:latin typeface="Cambria"/>
+              </a:rPr>
+              <a:t>A firm checks its new payroll provider's security certifications and contract terms before sending it any staff data: third-party due diligence.</a:t>
+            </a:r>
+          </a:p>
+        </p:txBody>
+      </p:sp>
+    </p:spTree>
+  </p:cSld>
+  <p:clrMapOvr>
+    <a:masterClrMapping/>
+  </p:clrMapOvr>
+</p:sld>
+</file>
+
+<file path=ppt/slides/slide4.xml><?xml version="1.0" encoding="utf-8"?>
+<p:sld xmlns:a="http://schemas.openxmlformats.org/drawingml/2006/main" xmlns:p="http://schemas.openxmlformats.org/presentationml/2006/main" xmlns:r="http://schemas.openxmlformats.org/officeDocument/2006/relationships">
+  <p:cSld>
+    <p:bg>
+      <p:bgPr>
+        <a:solidFill>
+          <a:srgbClr val="FFFFFF"/>
+        </a:solidFill>
+        <a:effectLst/>
+      </p:bgPr>
+    </p:bg>
+    <p:spTree>
+      <p:nvGrpSpPr>
+        <p:cNvPr id="1" name=""/>
+        <p:cNvGrpSpPr/>
+        <p:nvPr/>
+      </p:nvGrpSpPr>
+      <p:grpSpPr/>
+      <p:sp>
+        <p:nvSpPr>
+          <p:cNvPr id="2" name="TextBox 1"/>
+          <p:cNvSpPr txBox="1"/>
+          <p:nvPr/>
+        </p:nvSpPr>
+        <p:spPr>
+          <a:xfrm>
+            <a:off x="548640" y="320040"/>
+            <a:ext cx="11094415" cy="274320"/>
+          </a:xfrm>
+          <a:prstGeom prst="rect">
+            <a:avLst/>
+          </a:prstGeom>
+          <a:noFill/>
+        </p:spPr>
+        <p:txBody>
+          <a:bodyPr wrap="square" anchor="t" lIns="0" rIns="0" tIns="0" bIns="0"/>
+          <a:lstStyle/>
+          <a:p>
+            <a:pPr algn="l"/>
+            <a:r>
+              <a:rPr sz="1100" b="1" i="0">
+                <a:solidFill>
+                  <a:srgbClr val="54595D"/>
+                </a:solidFill>
+                <a:latin typeface="Calibri"/>
+              </a:rPr>
+              <a:t>CYBER SECURITY  ·  Cyber Security Content Area 2</a:t>
+            </a:r>
+          </a:p>
+        </p:txBody>
+      </p:sp>
+      <p:sp>
+        <p:nvSpPr>
+          <p:cNvPr id="3" name="TextBox 2"/>
+          <p:cNvSpPr txBox="1"/>
+          <p:nvPr/>
+        </p:nvSpPr>
+        <p:spPr>
+          <a:xfrm>
+            <a:off x="548640" y="566928"/>
+            <a:ext cx="11094415" cy="822960"/>
+          </a:xfrm>
+          <a:prstGeom prst="rect">
+            <a:avLst/>
+          </a:prstGeom>
+          <a:noFill/>
+        </p:spPr>
+        <p:txBody>
+          <a:bodyPr wrap="square" anchor="ctr" lIns="0" rIns="0" tIns="0" bIns="0"/>
+          <a:lstStyle/>
+          <a:p>
+            <a:pPr algn="l"/>
+            <a:r>
+              <a:rPr sz="3200" b="1" i="0">
+                <a:solidFill>
+                  <a:srgbClr val="03306E"/>
+                </a:solidFill>
+                <a:latin typeface="Cambria"/>
+              </a:rPr>
+              <a:t>Mitigating privacy-breach threats</a:t>
+            </a:r>
+          </a:p>
+        </p:txBody>
+      </p:sp>
+      <p:sp>
+        <p:nvSpPr>
+          <p:cNvPr id="4" name="TextBox 3"/>
+          <p:cNvSpPr txBox="1"/>
+          <p:nvPr/>
+        </p:nvSpPr>
+        <p:spPr>
+          <a:xfrm>
+            <a:off x="548640" y="6446520"/>
+            <a:ext cx="8229600" cy="274320"/>
+          </a:xfrm>
+          <a:prstGeom prst="rect">
+            <a:avLst/>
+          </a:prstGeom>
+          <a:noFill/>
+        </p:spPr>
+        <p:txBody>
+          <a:bodyPr wrap="square" anchor="t" lIns="0" rIns="0" tIns="0" bIns="0"/>
+          <a:lstStyle/>
+          <a:p>
+            <a:pPr algn="l"/>
+            <a:r>
+              <a:rPr sz="1000" b="0" i="0">
+                <a:solidFill>
+                  <a:srgbClr val="54595D"/>
+                </a:solidFill>
+                <a:latin typeface="Calibri"/>
+              </a:rPr>
+              <a:t>Digital Support and Security T Level  ·  Mitigation, Backups, Policies and Compliance</a:t>
+            </a:r>
+          </a:p>
+        </p:txBody>
+      </p:sp>
+      <p:sp>
+        <p:nvSpPr>
+          <p:cNvPr id="5" name="TextBox 4"/>
+          <p:cNvSpPr txBox="1"/>
+          <p:nvPr/>
+        </p:nvSpPr>
+        <p:spPr>
+          <a:xfrm>
+            <a:off x="10728655" y="6446520"/>
+            <a:ext cx="914400" cy="274320"/>
+          </a:xfrm>
+          <a:prstGeom prst="rect">
+            <a:avLst/>
+          </a:prstGeom>
+          <a:noFill/>
+        </p:spPr>
+        <p:txBody>
+          <a:bodyPr wrap="square" anchor="t" lIns="0" rIns="0" tIns="0" bIns="0"/>
+          <a:lstStyle/>
+          <a:p>
+            <a:pPr algn="r"/>
+            <a:r>
+              <a:rPr sz="1000" b="0" i="0">
+                <a:solidFill>
+                  <a:srgbClr val="54595D"/>
+                </a:solidFill>
+                <a:latin typeface="Calibri"/>
+              </a:rPr>
+              <a:t>4</a:t>
             </a:r>
           </a:p>
         </p:txBody>
@@ -6475,979 +10438,6 @@
 </p:sld>
 </file>
 
-<file path=ppt/slides/slide4.xml><?xml version="1.0" encoding="utf-8"?>
-<p:sld xmlns:a="http://schemas.openxmlformats.org/drawingml/2006/main" xmlns:p="http://schemas.openxmlformats.org/presentationml/2006/main" xmlns:r="http://schemas.openxmlformats.org/officeDocument/2006/relationships">
-  <p:cSld>
-    <p:bg>
-      <p:bgPr>
-        <a:solidFill>
-          <a:srgbClr val="FFFFFF"/>
-        </a:solidFill>
-        <a:effectLst/>
-      </p:bgPr>
-    </p:bg>
-    <p:spTree>
-      <p:nvGrpSpPr>
-        <p:cNvPr id="1" name=""/>
-        <p:cNvGrpSpPr/>
-        <p:nvPr/>
-      </p:nvGrpSpPr>
-      <p:grpSpPr/>
-      <p:sp>
-        <p:nvSpPr>
-          <p:cNvPr id="2" name="TextBox 1"/>
-          <p:cNvSpPr txBox="1"/>
-          <p:nvPr/>
-        </p:nvSpPr>
-        <p:spPr>
-          <a:xfrm>
-            <a:off x="548640" y="320040"/>
-            <a:ext cx="11094415" cy="274320"/>
-          </a:xfrm>
-          <a:prstGeom prst="rect">
-            <a:avLst/>
-          </a:prstGeom>
-          <a:noFill/>
-        </p:spPr>
-        <p:txBody>
-          <a:bodyPr wrap="square" anchor="t" lIns="0" rIns="0" tIns="0" bIns="0"/>
-          <a:lstStyle/>
-          <a:p>
-            <a:pPr algn="l"/>
-            <a:r>
-              <a:rPr sz="1100" b="1" i="0">
-                <a:solidFill>
-                  <a:srgbClr val="54595D"/>
-                </a:solidFill>
-                <a:latin typeface="Calibri"/>
-              </a:rPr>
-              <a:t>CYBER SECURITY  ·  Cyber Security Content Area 2</a:t>
-            </a:r>
-          </a:p>
-        </p:txBody>
-      </p:sp>
-      <p:sp>
-        <p:nvSpPr>
-          <p:cNvPr id="3" name="TextBox 2"/>
-          <p:cNvSpPr txBox="1"/>
-          <p:nvPr/>
-        </p:nvSpPr>
-        <p:spPr>
-          <a:xfrm>
-            <a:off x="548640" y="566928"/>
-            <a:ext cx="11094415" cy="822960"/>
-          </a:xfrm>
-          <a:prstGeom prst="rect">
-            <a:avLst/>
-          </a:prstGeom>
-          <a:noFill/>
-        </p:spPr>
-        <p:txBody>
-          <a:bodyPr wrap="square" anchor="ctr" lIns="0" rIns="0" tIns="0" bIns="0"/>
-          <a:lstStyle/>
-          <a:p>
-            <a:pPr algn="l"/>
-            <a:r>
-              <a:rPr sz="3200" b="1" i="0">
-                <a:solidFill>
-                  <a:srgbClr val="03306E"/>
-                </a:solidFill>
-                <a:latin typeface="Cambria"/>
-              </a:rPr>
-              <a:t>Applying Cyber Essentials</a:t>
-            </a:r>
-          </a:p>
-        </p:txBody>
-      </p:sp>
-      <p:sp>
-        <p:nvSpPr>
-          <p:cNvPr id="4" name="TextBox 3"/>
-          <p:cNvSpPr txBox="1"/>
-          <p:nvPr/>
-        </p:nvSpPr>
-        <p:spPr>
-          <a:xfrm>
-            <a:off x="548640" y="6446520"/>
-            <a:ext cx="8229600" cy="274320"/>
-          </a:xfrm>
-          <a:prstGeom prst="rect">
-            <a:avLst/>
-          </a:prstGeom>
-          <a:noFill/>
-        </p:spPr>
-        <p:txBody>
-          <a:bodyPr wrap="square" anchor="t" lIns="0" rIns="0" tIns="0" bIns="0"/>
-          <a:lstStyle/>
-          <a:p>
-            <a:pPr algn="l"/>
-            <a:r>
-              <a:rPr sz="1000" b="0" i="0">
-                <a:solidFill>
-                  <a:srgbClr val="54595D"/>
-                </a:solidFill>
-                <a:latin typeface="Calibri"/>
-              </a:rPr>
-              <a:t>Digital Support and Security T Level  ·  Mitigation, Backups, Policies and Compliance</a:t>
-            </a:r>
-          </a:p>
-        </p:txBody>
-      </p:sp>
-      <p:sp>
-        <p:nvSpPr>
-          <p:cNvPr id="5" name="TextBox 4"/>
-          <p:cNvSpPr txBox="1"/>
-          <p:nvPr/>
-        </p:nvSpPr>
-        <p:spPr>
-          <a:xfrm>
-            <a:off x="10728655" y="6446520"/>
-            <a:ext cx="914400" cy="274320"/>
-          </a:xfrm>
-          <a:prstGeom prst="rect">
-            <a:avLst/>
-          </a:prstGeom>
-          <a:noFill/>
-        </p:spPr>
-        <p:txBody>
-          <a:bodyPr wrap="square" anchor="t" lIns="0" rIns="0" tIns="0" bIns="0"/>
-          <a:lstStyle/>
-          <a:p>
-            <a:pPr algn="r"/>
-            <a:r>
-              <a:rPr sz="1000" b="0" i="0">
-                <a:solidFill>
-                  <a:srgbClr val="54595D"/>
-                </a:solidFill>
-                <a:latin typeface="Calibri"/>
-              </a:rPr>
-              <a:t>4</a:t>
-            </a:r>
-          </a:p>
-        </p:txBody>
-      </p:sp>
-      <p:sp>
-        <p:nvSpPr>
-          <p:cNvPr id="6" name="Rounded Rectangle 5"/>
-          <p:cNvSpPr/>
-          <p:nvPr/>
-        </p:nvSpPr>
-        <p:spPr>
-          <a:xfrm>
-            <a:off x="548640" y="1600200"/>
-            <a:ext cx="3515258" cy="2148840"/>
-          </a:xfrm>
-          <a:prstGeom prst="roundRect">
-            <a:avLst>
-              <a:gd name="adj" fmla="val 6000"/>
-            </a:avLst>
-          </a:prstGeom>
-          <a:solidFill>
-            <a:srgbClr val="EAF3FF"/>
-          </a:solidFill>
-          <a:ln>
-            <a:noFill/>
-          </a:ln>
-          <a:effectLst/>
-        </p:spPr>
-        <p:style>
-          <a:lnRef idx="1">
-            <a:schemeClr val="accent1"/>
-          </a:lnRef>
-          <a:fillRef idx="3">
-            <a:schemeClr val="accent1"/>
-          </a:fillRef>
-          <a:effectRef idx="2">
-            <a:schemeClr val="accent1"/>
-          </a:effectRef>
-          <a:fontRef idx="minor">
-            <a:schemeClr val="lt1"/>
-          </a:fontRef>
-        </p:style>
-        <p:txBody>
-          <a:bodyPr rtlCol="0" anchor="ctr"/>
-          <a:lstStyle/>
-          <a:p/>
-        </p:txBody>
-      </p:sp>
-      <p:sp>
-        <p:nvSpPr>
-          <p:cNvPr id="7" name="Oval 6"/>
-          <p:cNvSpPr/>
-          <p:nvPr/>
-        </p:nvSpPr>
-        <p:spPr>
-          <a:xfrm>
-            <a:off x="777240" y="1828800"/>
-            <a:ext cx="457200" cy="457200"/>
-          </a:xfrm>
-          <a:prstGeom prst="ellipse">
-            <a:avLst/>
-          </a:prstGeom>
-          <a:solidFill>
-            <a:srgbClr val="E0463A"/>
-          </a:solidFill>
-          <a:ln>
-            <a:noFill/>
-          </a:ln>
-          <a:effectLst/>
-        </p:spPr>
-        <p:style>
-          <a:lnRef idx="1">
-            <a:schemeClr val="accent1"/>
-          </a:lnRef>
-          <a:fillRef idx="3">
-            <a:schemeClr val="accent1"/>
-          </a:fillRef>
-          <a:effectRef idx="2">
-            <a:schemeClr val="accent1"/>
-          </a:effectRef>
-          <a:fontRef idx="minor">
-            <a:schemeClr val="lt1"/>
-          </a:fontRef>
-        </p:style>
-        <p:txBody>
-          <a:bodyPr rtlCol="0" anchor="ctr" lIns="0" rIns="0" tIns="0" bIns="0"/>
-          <a:lstStyle/>
-          <a:p>
-            <a:pPr algn="ctr"/>
-            <a:r>
-              <a:rPr sz="1500" b="1">
-                <a:solidFill>
-                  <a:srgbClr val="FFFFFF"/>
-                </a:solidFill>
-                <a:latin typeface="Calibri"/>
-              </a:rPr>
-              <a:t>1</a:t>
-            </a:r>
-          </a:p>
-        </p:txBody>
-      </p:sp>
-      <p:sp>
-        <p:nvSpPr>
-          <p:cNvPr id="8" name="TextBox 7"/>
-          <p:cNvSpPr txBox="1"/>
-          <p:nvPr/>
-        </p:nvSpPr>
-        <p:spPr>
-          <a:xfrm>
-            <a:off x="1371600" y="1801368"/>
-            <a:ext cx="2509418" cy="512064"/>
-          </a:xfrm>
-          <a:prstGeom prst="rect">
-            <a:avLst/>
-          </a:prstGeom>
-          <a:noFill/>
-        </p:spPr>
-        <p:txBody>
-          <a:bodyPr wrap="square" anchor="ctr" lIns="0" rIns="0" tIns="0" bIns="0"/>
-          <a:lstStyle/>
-          <a:p>
-            <a:pPr algn="l"/>
-            <a:r>
-              <a:rPr sz="1900" b="1" i="0">
-                <a:solidFill>
-                  <a:srgbClr val="03306E"/>
-                </a:solidFill>
-                <a:latin typeface="Calibri"/>
-              </a:rPr>
-              <a:t>Boundary firewalls</a:t>
-            </a:r>
-          </a:p>
-        </p:txBody>
-      </p:sp>
-      <p:sp>
-        <p:nvSpPr>
-          <p:cNvPr id="9" name="TextBox 8"/>
-          <p:cNvSpPr txBox="1"/>
-          <p:nvPr/>
-        </p:nvSpPr>
-        <p:spPr>
-          <a:xfrm>
-            <a:off x="777240" y="2468880"/>
-            <a:ext cx="3058058" cy="1143000"/>
-          </a:xfrm>
-          <a:prstGeom prst="rect">
-            <a:avLst/>
-          </a:prstGeom>
-          <a:noFill/>
-        </p:spPr>
-        <p:txBody>
-          <a:bodyPr wrap="square" anchor="t" lIns="0" rIns="0" tIns="0" bIns="0"/>
-          <a:lstStyle/>
-          <a:p>
-            <a:pPr algn="l"/>
-            <a:r>
-              <a:rPr sz="2000" b="0" i="0">
-                <a:solidFill>
-                  <a:srgbClr val="202122"/>
-                </a:solidFill>
-                <a:latin typeface="Calibri"/>
-              </a:rPr>
-              <a:t>Restrict traffic flowing in and out.</a:t>
-            </a:r>
-          </a:p>
-        </p:txBody>
-      </p:sp>
-      <p:sp>
-        <p:nvSpPr>
-          <p:cNvPr id="10" name="Rounded Rectangle 9"/>
-          <p:cNvSpPr/>
-          <p:nvPr/>
-        </p:nvSpPr>
-        <p:spPr>
-          <a:xfrm>
-            <a:off x="4338218" y="1600200"/>
-            <a:ext cx="3515258" cy="2148840"/>
-          </a:xfrm>
-          <a:prstGeom prst="roundRect">
-            <a:avLst>
-              <a:gd name="adj" fmla="val 6000"/>
-            </a:avLst>
-          </a:prstGeom>
-          <a:solidFill>
-            <a:srgbClr val="EAF3FF"/>
-          </a:solidFill>
-          <a:ln>
-            <a:noFill/>
-          </a:ln>
-          <a:effectLst/>
-        </p:spPr>
-        <p:style>
-          <a:lnRef idx="1">
-            <a:schemeClr val="accent1"/>
-          </a:lnRef>
-          <a:fillRef idx="3">
-            <a:schemeClr val="accent1"/>
-          </a:fillRef>
-          <a:effectRef idx="2">
-            <a:schemeClr val="accent1"/>
-          </a:effectRef>
-          <a:fontRef idx="minor">
-            <a:schemeClr val="lt1"/>
-          </a:fontRef>
-        </p:style>
-        <p:txBody>
-          <a:bodyPr rtlCol="0" anchor="ctr"/>
-          <a:lstStyle/>
-          <a:p/>
-        </p:txBody>
-      </p:sp>
-      <p:sp>
-        <p:nvSpPr>
-          <p:cNvPr id="11" name="Oval 10"/>
-          <p:cNvSpPr/>
-          <p:nvPr/>
-        </p:nvSpPr>
-        <p:spPr>
-          <a:xfrm>
-            <a:off x="4566818" y="1828800"/>
-            <a:ext cx="457200" cy="457200"/>
-          </a:xfrm>
-          <a:prstGeom prst="ellipse">
-            <a:avLst/>
-          </a:prstGeom>
-          <a:solidFill>
-            <a:srgbClr val="E0463A"/>
-          </a:solidFill>
-          <a:ln>
-            <a:noFill/>
-          </a:ln>
-          <a:effectLst/>
-        </p:spPr>
-        <p:style>
-          <a:lnRef idx="1">
-            <a:schemeClr val="accent1"/>
-          </a:lnRef>
-          <a:fillRef idx="3">
-            <a:schemeClr val="accent1"/>
-          </a:fillRef>
-          <a:effectRef idx="2">
-            <a:schemeClr val="accent1"/>
-          </a:effectRef>
-          <a:fontRef idx="minor">
-            <a:schemeClr val="lt1"/>
-          </a:fontRef>
-        </p:style>
-        <p:txBody>
-          <a:bodyPr rtlCol="0" anchor="ctr" lIns="0" rIns="0" tIns="0" bIns="0"/>
-          <a:lstStyle/>
-          <a:p>
-            <a:pPr algn="ctr"/>
-            <a:r>
-              <a:rPr sz="1500" b="1">
-                <a:solidFill>
-                  <a:srgbClr val="FFFFFF"/>
-                </a:solidFill>
-                <a:latin typeface="Calibri"/>
-              </a:rPr>
-              <a:t>2</a:t>
-            </a:r>
-          </a:p>
-        </p:txBody>
-      </p:sp>
-      <p:sp>
-        <p:nvSpPr>
-          <p:cNvPr id="12" name="TextBox 11"/>
-          <p:cNvSpPr txBox="1"/>
-          <p:nvPr/>
-        </p:nvSpPr>
-        <p:spPr>
-          <a:xfrm>
-            <a:off x="5161178" y="1801368"/>
-            <a:ext cx="2509418" cy="512064"/>
-          </a:xfrm>
-          <a:prstGeom prst="rect">
-            <a:avLst/>
-          </a:prstGeom>
-          <a:noFill/>
-        </p:spPr>
-        <p:txBody>
-          <a:bodyPr wrap="square" anchor="ctr" lIns="0" rIns="0" tIns="0" bIns="0"/>
-          <a:lstStyle/>
-          <a:p>
-            <a:pPr algn="l"/>
-            <a:r>
-              <a:rPr sz="1800" b="1" i="0">
-                <a:solidFill>
-                  <a:srgbClr val="03306E"/>
-                </a:solidFill>
-                <a:latin typeface="Calibri"/>
-              </a:rPr>
-              <a:t>Secure configuration</a:t>
-            </a:r>
-          </a:p>
-        </p:txBody>
-      </p:sp>
-      <p:sp>
-        <p:nvSpPr>
-          <p:cNvPr id="13" name="TextBox 12"/>
-          <p:cNvSpPr txBox="1"/>
-          <p:nvPr/>
-        </p:nvSpPr>
-        <p:spPr>
-          <a:xfrm>
-            <a:off x="4566818" y="2468880"/>
-            <a:ext cx="3058058" cy="1143000"/>
-          </a:xfrm>
-          <a:prstGeom prst="rect">
-            <a:avLst/>
-          </a:prstGeom>
-          <a:noFill/>
-        </p:spPr>
-        <p:txBody>
-          <a:bodyPr wrap="square" anchor="t" lIns="0" rIns="0" tIns="0" bIns="0"/>
-          <a:lstStyle/>
-          <a:p>
-            <a:pPr algn="l"/>
-            <a:r>
-              <a:rPr sz="2000" b="0" i="0">
-                <a:solidFill>
-                  <a:srgbClr val="202122"/>
-                </a:solidFill>
-                <a:latin typeface="Calibri"/>
-              </a:rPr>
-              <a:t>Enable only the functions needed.</a:t>
-            </a:r>
-          </a:p>
-        </p:txBody>
-      </p:sp>
-      <p:sp>
-        <p:nvSpPr>
-          <p:cNvPr id="14" name="Rounded Rectangle 13"/>
-          <p:cNvSpPr/>
-          <p:nvPr/>
-        </p:nvSpPr>
-        <p:spPr>
-          <a:xfrm>
-            <a:off x="8127796" y="1600200"/>
-            <a:ext cx="3515258" cy="2148840"/>
-          </a:xfrm>
-          <a:prstGeom prst="roundRect">
-            <a:avLst>
-              <a:gd name="adj" fmla="val 6000"/>
-            </a:avLst>
-          </a:prstGeom>
-          <a:solidFill>
-            <a:srgbClr val="EAF3FF"/>
-          </a:solidFill>
-          <a:ln>
-            <a:noFill/>
-          </a:ln>
-          <a:effectLst/>
-        </p:spPr>
-        <p:style>
-          <a:lnRef idx="1">
-            <a:schemeClr val="accent1"/>
-          </a:lnRef>
-          <a:fillRef idx="3">
-            <a:schemeClr val="accent1"/>
-          </a:fillRef>
-          <a:effectRef idx="2">
-            <a:schemeClr val="accent1"/>
-          </a:effectRef>
-          <a:fontRef idx="minor">
-            <a:schemeClr val="lt1"/>
-          </a:fontRef>
-        </p:style>
-        <p:txBody>
-          <a:bodyPr rtlCol="0" anchor="ctr"/>
-          <a:lstStyle/>
-          <a:p/>
-        </p:txBody>
-      </p:sp>
-      <p:sp>
-        <p:nvSpPr>
-          <p:cNvPr id="15" name="Oval 14"/>
-          <p:cNvSpPr/>
-          <p:nvPr/>
-        </p:nvSpPr>
-        <p:spPr>
-          <a:xfrm>
-            <a:off x="8356396" y="1828800"/>
-            <a:ext cx="457200" cy="457200"/>
-          </a:xfrm>
-          <a:prstGeom prst="ellipse">
-            <a:avLst/>
-          </a:prstGeom>
-          <a:solidFill>
-            <a:srgbClr val="E0463A"/>
-          </a:solidFill>
-          <a:ln>
-            <a:noFill/>
-          </a:ln>
-          <a:effectLst/>
-        </p:spPr>
-        <p:style>
-          <a:lnRef idx="1">
-            <a:schemeClr val="accent1"/>
-          </a:lnRef>
-          <a:fillRef idx="3">
-            <a:schemeClr val="accent1"/>
-          </a:fillRef>
-          <a:effectRef idx="2">
-            <a:schemeClr val="accent1"/>
-          </a:effectRef>
-          <a:fontRef idx="minor">
-            <a:schemeClr val="lt1"/>
-          </a:fontRef>
-        </p:style>
-        <p:txBody>
-          <a:bodyPr rtlCol="0" anchor="ctr" lIns="0" rIns="0" tIns="0" bIns="0"/>
-          <a:lstStyle/>
-          <a:p>
-            <a:pPr algn="ctr"/>
-            <a:r>
-              <a:rPr sz="1500" b="1">
-                <a:solidFill>
-                  <a:srgbClr val="FFFFFF"/>
-                </a:solidFill>
-                <a:latin typeface="Calibri"/>
-              </a:rPr>
-              <a:t>3</a:t>
-            </a:r>
-          </a:p>
-        </p:txBody>
-      </p:sp>
-      <p:sp>
-        <p:nvSpPr>
-          <p:cNvPr id="16" name="TextBox 15"/>
-          <p:cNvSpPr txBox="1"/>
-          <p:nvPr/>
-        </p:nvSpPr>
-        <p:spPr>
-          <a:xfrm>
-            <a:off x="8950756" y="1801368"/>
-            <a:ext cx="2509418" cy="512064"/>
-          </a:xfrm>
-          <a:prstGeom prst="rect">
-            <a:avLst/>
-          </a:prstGeom>
-          <a:noFill/>
-        </p:spPr>
-        <p:txBody>
-          <a:bodyPr wrap="square" anchor="ctr" lIns="0" rIns="0" tIns="0" bIns="0"/>
-          <a:lstStyle/>
-          <a:p>
-            <a:pPr algn="l"/>
-            <a:r>
-              <a:rPr sz="1900" b="1" i="0">
-                <a:solidFill>
-                  <a:srgbClr val="03306E"/>
-                </a:solidFill>
-                <a:latin typeface="Calibri"/>
-              </a:rPr>
-              <a:t>Malware protection</a:t>
-            </a:r>
-          </a:p>
-        </p:txBody>
-      </p:sp>
-      <p:sp>
-        <p:nvSpPr>
-          <p:cNvPr id="17" name="TextBox 16"/>
-          <p:cNvSpPr txBox="1"/>
-          <p:nvPr/>
-        </p:nvSpPr>
-        <p:spPr>
-          <a:xfrm>
-            <a:off x="8356396" y="2468880"/>
-            <a:ext cx="3058058" cy="1143000"/>
-          </a:xfrm>
-          <a:prstGeom prst="rect">
-            <a:avLst/>
-          </a:prstGeom>
-          <a:noFill/>
-        </p:spPr>
-        <p:txBody>
-          <a:bodyPr wrap="square" anchor="t" lIns="0" rIns="0" tIns="0" bIns="0"/>
-          <a:lstStyle/>
-          <a:p>
-            <a:pPr algn="l"/>
-            <a:r>
-              <a:rPr sz="2000" b="0" i="0">
-                <a:solidFill>
-                  <a:srgbClr val="202122"/>
-                </a:solidFill>
-                <a:latin typeface="Calibri"/>
-              </a:rPr>
-              <a:t>Current anti-malware and regular scans.</a:t>
-            </a:r>
-          </a:p>
-        </p:txBody>
-      </p:sp>
-      <p:sp>
-        <p:nvSpPr>
-          <p:cNvPr id="18" name="Rounded Rectangle 17"/>
-          <p:cNvSpPr/>
-          <p:nvPr/>
-        </p:nvSpPr>
-        <p:spPr>
-          <a:xfrm>
-            <a:off x="548640" y="4023360"/>
-            <a:ext cx="3515258" cy="2148840"/>
-          </a:xfrm>
-          <a:prstGeom prst="roundRect">
-            <a:avLst>
-              <a:gd name="adj" fmla="val 6000"/>
-            </a:avLst>
-          </a:prstGeom>
-          <a:solidFill>
-            <a:srgbClr val="EAF3FF"/>
-          </a:solidFill>
-          <a:ln>
-            <a:noFill/>
-          </a:ln>
-          <a:effectLst/>
-        </p:spPr>
-        <p:style>
-          <a:lnRef idx="1">
-            <a:schemeClr val="accent1"/>
-          </a:lnRef>
-          <a:fillRef idx="3">
-            <a:schemeClr val="accent1"/>
-          </a:fillRef>
-          <a:effectRef idx="2">
-            <a:schemeClr val="accent1"/>
-          </a:effectRef>
-          <a:fontRef idx="minor">
-            <a:schemeClr val="lt1"/>
-          </a:fontRef>
-        </p:style>
-        <p:txBody>
-          <a:bodyPr rtlCol="0" anchor="ctr"/>
-          <a:lstStyle/>
-          <a:p/>
-        </p:txBody>
-      </p:sp>
-      <p:sp>
-        <p:nvSpPr>
-          <p:cNvPr id="19" name="Oval 18"/>
-          <p:cNvSpPr/>
-          <p:nvPr/>
-        </p:nvSpPr>
-        <p:spPr>
-          <a:xfrm>
-            <a:off x="777240" y="4251960"/>
-            <a:ext cx="457200" cy="457200"/>
-          </a:xfrm>
-          <a:prstGeom prst="ellipse">
-            <a:avLst/>
-          </a:prstGeom>
-          <a:solidFill>
-            <a:srgbClr val="E0463A"/>
-          </a:solidFill>
-          <a:ln>
-            <a:noFill/>
-          </a:ln>
-          <a:effectLst/>
-        </p:spPr>
-        <p:style>
-          <a:lnRef idx="1">
-            <a:schemeClr val="accent1"/>
-          </a:lnRef>
-          <a:fillRef idx="3">
-            <a:schemeClr val="accent1"/>
-          </a:fillRef>
-          <a:effectRef idx="2">
-            <a:schemeClr val="accent1"/>
-          </a:effectRef>
-          <a:fontRef idx="minor">
-            <a:schemeClr val="lt1"/>
-          </a:fontRef>
-        </p:style>
-        <p:txBody>
-          <a:bodyPr rtlCol="0" anchor="ctr" lIns="0" rIns="0" tIns="0" bIns="0"/>
-          <a:lstStyle/>
-          <a:p>
-            <a:pPr algn="ctr"/>
-            <a:r>
-              <a:rPr sz="1500" b="1">
-                <a:solidFill>
-                  <a:srgbClr val="FFFFFF"/>
-                </a:solidFill>
-                <a:latin typeface="Calibri"/>
-              </a:rPr>
-              <a:t>4</a:t>
-            </a:r>
-          </a:p>
-        </p:txBody>
-      </p:sp>
-      <p:sp>
-        <p:nvSpPr>
-          <p:cNvPr id="20" name="TextBox 19"/>
-          <p:cNvSpPr txBox="1"/>
-          <p:nvPr/>
-        </p:nvSpPr>
-        <p:spPr>
-          <a:xfrm>
-            <a:off x="1371600" y="4224528"/>
-            <a:ext cx="2509418" cy="512064"/>
-          </a:xfrm>
-          <a:prstGeom prst="rect">
-            <a:avLst/>
-          </a:prstGeom>
-          <a:noFill/>
-        </p:spPr>
-        <p:txBody>
-          <a:bodyPr wrap="square" anchor="ctr" lIns="0" rIns="0" tIns="0" bIns="0"/>
-          <a:lstStyle/>
-          <a:p>
-            <a:pPr algn="l"/>
-            <a:r>
-              <a:rPr sz="1900" b="1" i="0">
-                <a:solidFill>
-                  <a:srgbClr val="03306E"/>
-                </a:solidFill>
-                <a:latin typeface="Calibri"/>
-              </a:rPr>
-              <a:t>Security updates</a:t>
-            </a:r>
-          </a:p>
-        </p:txBody>
-      </p:sp>
-      <p:sp>
-        <p:nvSpPr>
-          <p:cNvPr id="21" name="TextBox 20"/>
-          <p:cNvSpPr txBox="1"/>
-          <p:nvPr/>
-        </p:nvSpPr>
-        <p:spPr>
-          <a:xfrm>
-            <a:off x="777240" y="4892040"/>
-            <a:ext cx="3058058" cy="1143000"/>
-          </a:xfrm>
-          <a:prstGeom prst="rect">
-            <a:avLst/>
-          </a:prstGeom>
-          <a:noFill/>
-        </p:spPr>
-        <p:txBody>
-          <a:bodyPr wrap="square" anchor="t" lIns="0" rIns="0" tIns="0" bIns="0"/>
-          <a:lstStyle/>
-          <a:p>
-            <a:pPr algn="l"/>
-            <a:r>
-              <a:rPr sz="2000" b="0" i="0">
-                <a:solidFill>
-                  <a:srgbClr val="202122"/>
-                </a:solidFill>
-                <a:latin typeface="Calibri"/>
-              </a:rPr>
-              <a:t>Keep patches current.</a:t>
-            </a:r>
-          </a:p>
-        </p:txBody>
-      </p:sp>
-      <p:sp>
-        <p:nvSpPr>
-          <p:cNvPr id="22" name="Rounded Rectangle 21"/>
-          <p:cNvSpPr/>
-          <p:nvPr/>
-        </p:nvSpPr>
-        <p:spPr>
-          <a:xfrm>
-            <a:off x="4338218" y="4023360"/>
-            <a:ext cx="3515258" cy="2148840"/>
-          </a:xfrm>
-          <a:prstGeom prst="roundRect">
-            <a:avLst>
-              <a:gd name="adj" fmla="val 6000"/>
-            </a:avLst>
-          </a:prstGeom>
-          <a:solidFill>
-            <a:srgbClr val="EAF3FF"/>
-          </a:solidFill>
-          <a:ln>
-            <a:noFill/>
-          </a:ln>
-          <a:effectLst/>
-        </p:spPr>
-        <p:style>
-          <a:lnRef idx="1">
-            <a:schemeClr val="accent1"/>
-          </a:lnRef>
-          <a:fillRef idx="3">
-            <a:schemeClr val="accent1"/>
-          </a:fillRef>
-          <a:effectRef idx="2">
-            <a:schemeClr val="accent1"/>
-          </a:effectRef>
-          <a:fontRef idx="minor">
-            <a:schemeClr val="lt1"/>
-          </a:fontRef>
-        </p:style>
-        <p:txBody>
-          <a:bodyPr rtlCol="0" anchor="ctr"/>
-          <a:lstStyle/>
-          <a:p/>
-        </p:txBody>
-      </p:sp>
-      <p:sp>
-        <p:nvSpPr>
-          <p:cNvPr id="23" name="Oval 22"/>
-          <p:cNvSpPr/>
-          <p:nvPr/>
-        </p:nvSpPr>
-        <p:spPr>
-          <a:xfrm>
-            <a:off x="4566818" y="4251960"/>
-            <a:ext cx="457200" cy="457200"/>
-          </a:xfrm>
-          <a:prstGeom prst="ellipse">
-            <a:avLst/>
-          </a:prstGeom>
-          <a:solidFill>
-            <a:srgbClr val="E0463A"/>
-          </a:solidFill>
-          <a:ln>
-            <a:noFill/>
-          </a:ln>
-          <a:effectLst/>
-        </p:spPr>
-        <p:style>
-          <a:lnRef idx="1">
-            <a:schemeClr val="accent1"/>
-          </a:lnRef>
-          <a:fillRef idx="3">
-            <a:schemeClr val="accent1"/>
-          </a:fillRef>
-          <a:effectRef idx="2">
-            <a:schemeClr val="accent1"/>
-          </a:effectRef>
-          <a:fontRef idx="minor">
-            <a:schemeClr val="lt1"/>
-          </a:fontRef>
-        </p:style>
-        <p:txBody>
-          <a:bodyPr rtlCol="0" anchor="ctr" lIns="0" rIns="0" tIns="0" bIns="0"/>
-          <a:lstStyle/>
-          <a:p>
-            <a:pPr algn="ctr"/>
-            <a:r>
-              <a:rPr sz="1500" b="1">
-                <a:solidFill>
-                  <a:srgbClr val="FFFFFF"/>
-                </a:solidFill>
-                <a:latin typeface="Calibri"/>
-              </a:rPr>
-              <a:t>5</a:t>
-            </a:r>
-          </a:p>
-        </p:txBody>
-      </p:sp>
-      <p:sp>
-        <p:nvSpPr>
-          <p:cNvPr id="24" name="TextBox 23"/>
-          <p:cNvSpPr txBox="1"/>
-          <p:nvPr/>
-        </p:nvSpPr>
-        <p:spPr>
-          <a:xfrm>
-            <a:off x="5161178" y="4224528"/>
-            <a:ext cx="2509418" cy="512064"/>
-          </a:xfrm>
-          <a:prstGeom prst="rect">
-            <a:avLst/>
-          </a:prstGeom>
-          <a:noFill/>
-        </p:spPr>
-        <p:txBody>
-          <a:bodyPr wrap="square" anchor="ctr" lIns="0" rIns="0" tIns="0" bIns="0"/>
-          <a:lstStyle/>
-          <a:p>
-            <a:pPr algn="l"/>
-            <a:r>
-              <a:rPr sz="1900" b="1" i="0">
-                <a:solidFill>
-                  <a:srgbClr val="03306E"/>
-                </a:solidFill>
-                <a:latin typeface="Calibri"/>
-              </a:rPr>
-              <a:t>Access control</a:t>
-            </a:r>
-          </a:p>
-        </p:txBody>
-      </p:sp>
-      <p:sp>
-        <p:nvSpPr>
-          <p:cNvPr id="25" name="TextBox 24"/>
-          <p:cNvSpPr txBox="1"/>
-          <p:nvPr/>
-        </p:nvSpPr>
-        <p:spPr>
-          <a:xfrm>
-            <a:off x="4566818" y="4892040"/>
-            <a:ext cx="3058058" cy="1143000"/>
-          </a:xfrm>
-          <a:prstGeom prst="rect">
-            <a:avLst/>
-          </a:prstGeom>
-          <a:noFill/>
-        </p:spPr>
-        <p:txBody>
-          <a:bodyPr wrap="square" anchor="t" lIns="0" rIns="0" tIns="0" bIns="0"/>
-          <a:lstStyle/>
-          <a:p>
-            <a:pPr algn="l"/>
-            <a:r>
-              <a:rPr sz="2000" b="0" i="0">
-                <a:solidFill>
-                  <a:srgbClr val="202122"/>
-                </a:solidFill>
-                <a:latin typeface="Calibri"/>
-              </a:rPr>
-              <a:t>Least privilege, with PAM for super-user and privileged accounts.</a:t>
-            </a:r>
-          </a:p>
-        </p:txBody>
-      </p:sp>
-    </p:spTree>
-  </p:cSld>
-  <p:clrMapOvr>
-    <a:masterClrMapping/>
-  </p:clrMapOvr>
-</p:sld>
-</file>
-
 <file path=ppt/slides/slide5.xml><?xml version="1.0" encoding="utf-8"?>
 <p:sld xmlns:a="http://schemas.openxmlformats.org/drawingml/2006/main" xmlns:p="http://schemas.openxmlformats.org/presentationml/2006/main" xmlns:r="http://schemas.openxmlformats.org/officeDocument/2006/relationships">
   <p:cSld>
@@ -7527,7 +10517,7 @@
                 </a:solidFill>
                 <a:latin typeface="Cambria"/>
               </a:rPr>
-              <a:t>Backup types</a:t>
+              <a:t>Quick check: Mitigating privacy-breach threats</a:t>
             </a:r>
           </a:p>
         </p:txBody>
@@ -7594,6 +10584,1836 @@
                 <a:latin typeface="Calibri"/>
               </a:rPr>
               <a:t>5</a:t>
+            </a:r>
+          </a:p>
+        </p:txBody>
+      </p:sp>
+      <p:sp>
+        <p:nvSpPr>
+          <p:cNvPr id="6" name="Oval 5"/>
+          <p:cNvSpPr/>
+          <p:nvPr/>
+        </p:nvSpPr>
+        <p:spPr>
+          <a:xfrm>
+            <a:off x="548640" y="1691640"/>
+            <a:ext cx="502920" cy="502920"/>
+          </a:xfrm>
+          <a:prstGeom prst="ellipse">
+            <a:avLst/>
+          </a:prstGeom>
+          <a:solidFill>
+            <a:srgbClr val="E0463A"/>
+          </a:solidFill>
+          <a:ln>
+            <a:noFill/>
+          </a:ln>
+          <a:effectLst/>
+        </p:spPr>
+        <p:style>
+          <a:lnRef idx="1">
+            <a:schemeClr val="accent1"/>
+          </a:lnRef>
+          <a:fillRef idx="3">
+            <a:schemeClr val="accent1"/>
+          </a:fillRef>
+          <a:effectRef idx="2">
+            <a:schemeClr val="accent1"/>
+          </a:effectRef>
+          <a:fontRef idx="minor">
+            <a:schemeClr val="lt1"/>
+          </a:fontRef>
+        </p:style>
+        <p:txBody>
+          <a:bodyPr rtlCol="0" anchor="ctr" lIns="0" rIns="0" tIns="0" bIns="0"/>
+          <a:lstStyle/>
+          <a:p>
+            <a:pPr algn="ctr"/>
+            <a:r>
+              <a:rPr sz="1600" b="1">
+                <a:solidFill>
+                  <a:srgbClr val="FFFFFF"/>
+                </a:solidFill>
+                <a:latin typeface="Calibri"/>
+              </a:rPr>
+              <a:t>1</a:t>
+            </a:r>
+          </a:p>
+        </p:txBody>
+      </p:sp>
+      <p:sp>
+        <p:nvSpPr>
+          <p:cNvPr id="7" name="TextBox 6"/>
+          <p:cNvSpPr txBox="1"/>
+          <p:nvPr/>
+        </p:nvSpPr>
+        <p:spPr>
+          <a:xfrm>
+            <a:off x="1371600" y="1645920"/>
+            <a:ext cx="10271455" cy="1188720"/>
+          </a:xfrm>
+          <a:prstGeom prst="rect">
+            <a:avLst/>
+          </a:prstGeom>
+          <a:noFill/>
+        </p:spPr>
+        <p:txBody>
+          <a:bodyPr wrap="square" anchor="t" lIns="0" rIns="0" tIns="0" bIns="0"/>
+          <a:lstStyle/>
+          <a:p>
+            <a:pPr algn="l"/>
+            <a:r>
+              <a:rPr sz="2400" b="0" i="0">
+                <a:solidFill>
+                  <a:srgbClr val="202122"/>
+                </a:solidFill>
+                <a:latin typeface="Calibri"/>
+              </a:rPr>
+              <a:t>How are insider threats reduced?</a:t>
+            </a:r>
+          </a:p>
+        </p:txBody>
+      </p:sp>
+      <p:sp>
+        <p:nvSpPr>
+          <p:cNvPr id="8" name="Oval 7"/>
+          <p:cNvSpPr/>
+          <p:nvPr/>
+        </p:nvSpPr>
+        <p:spPr>
+          <a:xfrm>
+            <a:off x="548640" y="3108960"/>
+            <a:ext cx="502920" cy="502920"/>
+          </a:xfrm>
+          <a:prstGeom prst="ellipse">
+            <a:avLst/>
+          </a:prstGeom>
+          <a:solidFill>
+            <a:srgbClr val="E0463A"/>
+          </a:solidFill>
+          <a:ln>
+            <a:noFill/>
+          </a:ln>
+          <a:effectLst/>
+        </p:spPr>
+        <p:style>
+          <a:lnRef idx="1">
+            <a:schemeClr val="accent1"/>
+          </a:lnRef>
+          <a:fillRef idx="3">
+            <a:schemeClr val="accent1"/>
+          </a:fillRef>
+          <a:effectRef idx="2">
+            <a:schemeClr val="accent1"/>
+          </a:effectRef>
+          <a:fontRef idx="minor">
+            <a:schemeClr val="lt1"/>
+          </a:fontRef>
+        </p:style>
+        <p:txBody>
+          <a:bodyPr rtlCol="0" anchor="ctr" lIns="0" rIns="0" tIns="0" bIns="0"/>
+          <a:lstStyle/>
+          <a:p>
+            <a:pPr algn="ctr"/>
+            <a:r>
+              <a:rPr sz="1600" b="1">
+                <a:solidFill>
+                  <a:srgbClr val="FFFFFF"/>
+                </a:solidFill>
+                <a:latin typeface="Calibri"/>
+              </a:rPr>
+              <a:t>2</a:t>
+            </a:r>
+          </a:p>
+        </p:txBody>
+      </p:sp>
+      <p:sp>
+        <p:nvSpPr>
+          <p:cNvPr id="9" name="TextBox 8"/>
+          <p:cNvSpPr txBox="1"/>
+          <p:nvPr/>
+        </p:nvSpPr>
+        <p:spPr>
+          <a:xfrm>
+            <a:off x="1371600" y="3063240"/>
+            <a:ext cx="10271455" cy="1188720"/>
+          </a:xfrm>
+          <a:prstGeom prst="rect">
+            <a:avLst/>
+          </a:prstGeom>
+          <a:noFill/>
+        </p:spPr>
+        <p:txBody>
+          <a:bodyPr wrap="square" anchor="t" lIns="0" rIns="0" tIns="0" bIns="0"/>
+          <a:lstStyle/>
+          <a:p>
+            <a:pPr algn="l"/>
+            <a:r>
+              <a:rPr sz="2400" b="0" i="0">
+                <a:solidFill>
+                  <a:srgbClr val="202122"/>
+                </a:solidFill>
+                <a:latin typeface="Calibri"/>
+              </a:rPr>
+              <a:t>What is due diligence on a supplier?</a:t>
+            </a:r>
+          </a:p>
+        </p:txBody>
+      </p:sp>
+      <p:sp>
+        <p:nvSpPr>
+          <p:cNvPr id="10" name="Oval 9"/>
+          <p:cNvSpPr/>
+          <p:nvPr/>
+        </p:nvSpPr>
+        <p:spPr>
+          <a:xfrm>
+            <a:off x="548640" y="4526280"/>
+            <a:ext cx="502920" cy="502920"/>
+          </a:xfrm>
+          <a:prstGeom prst="ellipse">
+            <a:avLst/>
+          </a:prstGeom>
+          <a:solidFill>
+            <a:srgbClr val="E0463A"/>
+          </a:solidFill>
+          <a:ln>
+            <a:noFill/>
+          </a:ln>
+          <a:effectLst/>
+        </p:spPr>
+        <p:style>
+          <a:lnRef idx="1">
+            <a:schemeClr val="accent1"/>
+          </a:lnRef>
+          <a:fillRef idx="3">
+            <a:schemeClr val="accent1"/>
+          </a:fillRef>
+          <a:effectRef idx="2">
+            <a:schemeClr val="accent1"/>
+          </a:effectRef>
+          <a:fontRef idx="minor">
+            <a:schemeClr val="lt1"/>
+          </a:fontRef>
+        </p:style>
+        <p:txBody>
+          <a:bodyPr rtlCol="0" anchor="ctr" lIns="0" rIns="0" tIns="0" bIns="0"/>
+          <a:lstStyle/>
+          <a:p>
+            <a:pPr algn="ctr"/>
+            <a:r>
+              <a:rPr sz="1600" b="1">
+                <a:solidFill>
+                  <a:srgbClr val="FFFFFF"/>
+                </a:solidFill>
+                <a:latin typeface="Calibri"/>
+              </a:rPr>
+              <a:t>3</a:t>
+            </a:r>
+          </a:p>
+        </p:txBody>
+      </p:sp>
+      <p:sp>
+        <p:nvSpPr>
+          <p:cNvPr id="11" name="TextBox 10"/>
+          <p:cNvSpPr txBox="1"/>
+          <p:nvPr/>
+        </p:nvSpPr>
+        <p:spPr>
+          <a:xfrm>
+            <a:off x="1371600" y="4480560"/>
+            <a:ext cx="10271455" cy="1188720"/>
+          </a:xfrm>
+          <a:prstGeom prst="rect">
+            <a:avLst/>
+          </a:prstGeom>
+          <a:noFill/>
+        </p:spPr>
+        <p:txBody>
+          <a:bodyPr wrap="square" anchor="t" lIns="0" rIns="0" tIns="0" bIns="0"/>
+          <a:lstStyle/>
+          <a:p>
+            <a:pPr algn="l"/>
+            <a:r>
+              <a:rPr sz="2400" b="0" i="0">
+                <a:solidFill>
+                  <a:srgbClr val="202122"/>
+                </a:solidFill>
+                <a:latin typeface="Calibri"/>
+              </a:rPr>
+              <a:t>How should old devices be disposed of?</a:t>
+            </a:r>
+          </a:p>
+        </p:txBody>
+      </p:sp>
+      <p:sp>
+        <p:nvSpPr>
+          <p:cNvPr id="12" name="TextBox 11"/>
+          <p:cNvSpPr txBox="1"/>
+          <p:nvPr/>
+        </p:nvSpPr>
+        <p:spPr>
+          <a:xfrm>
+            <a:off x="548640" y="5852160"/>
+            <a:ext cx="11094415" cy="365760"/>
+          </a:xfrm>
+          <a:prstGeom prst="rect">
+            <a:avLst/>
+          </a:prstGeom>
+          <a:noFill/>
+        </p:spPr>
+        <p:txBody>
+          <a:bodyPr wrap="square" anchor="t" lIns="0" rIns="0" tIns="0" bIns="0"/>
+          <a:lstStyle/>
+          <a:p>
+            <a:pPr algn="l"/>
+            <a:r>
+              <a:rPr sz="1300" b="0" i="1">
+                <a:solidFill>
+                  <a:srgbClr val="54595D"/>
+                </a:solidFill>
+                <a:latin typeface="Calibri"/>
+              </a:rPr>
+              <a:t>Answer on mini whiteboards or in your book. Answers are in the speaker notes.</a:t>
+            </a:r>
+          </a:p>
+        </p:txBody>
+      </p:sp>
+    </p:spTree>
+  </p:cSld>
+  <p:clrMapOvr>
+    <a:masterClrMapping/>
+  </p:clrMapOvr>
+</p:sld>
+</file>
+
+<file path=ppt/slides/slide6.xml><?xml version="1.0" encoding="utf-8"?>
+<p:sld xmlns:a="http://schemas.openxmlformats.org/drawingml/2006/main" xmlns:p="http://schemas.openxmlformats.org/presentationml/2006/main" xmlns:r="http://schemas.openxmlformats.org/officeDocument/2006/relationships">
+  <p:cSld>
+    <p:bg>
+      <p:bgPr>
+        <a:solidFill>
+          <a:srgbClr val="FFFFFF"/>
+        </a:solidFill>
+        <a:effectLst/>
+      </p:bgPr>
+    </p:bg>
+    <p:spTree>
+      <p:nvGrpSpPr>
+        <p:cNvPr id="1" name=""/>
+        <p:cNvGrpSpPr/>
+        <p:nvPr/>
+      </p:nvGrpSpPr>
+      <p:grpSpPr/>
+      <p:sp>
+        <p:nvSpPr>
+          <p:cNvPr id="2" name="TextBox 1"/>
+          <p:cNvSpPr txBox="1"/>
+          <p:nvPr/>
+        </p:nvSpPr>
+        <p:spPr>
+          <a:xfrm>
+            <a:off x="548640" y="320040"/>
+            <a:ext cx="11094415" cy="274320"/>
+          </a:xfrm>
+          <a:prstGeom prst="rect">
+            <a:avLst/>
+          </a:prstGeom>
+          <a:noFill/>
+        </p:spPr>
+        <p:txBody>
+          <a:bodyPr wrap="square" anchor="t" lIns="0" rIns="0" tIns="0" bIns="0"/>
+          <a:lstStyle/>
+          <a:p>
+            <a:pPr algn="l"/>
+            <a:r>
+              <a:rPr sz="1100" b="1" i="0">
+                <a:solidFill>
+                  <a:srgbClr val="54595D"/>
+                </a:solidFill>
+                <a:latin typeface="Calibri"/>
+              </a:rPr>
+              <a:t>CYBER SECURITY  ·  Cyber Security Content Area 2</a:t>
+            </a:r>
+          </a:p>
+        </p:txBody>
+      </p:sp>
+      <p:sp>
+        <p:nvSpPr>
+          <p:cNvPr id="3" name="TextBox 2"/>
+          <p:cNvSpPr txBox="1"/>
+          <p:nvPr/>
+        </p:nvSpPr>
+        <p:spPr>
+          <a:xfrm>
+            <a:off x="548640" y="566928"/>
+            <a:ext cx="11094415" cy="822960"/>
+          </a:xfrm>
+          <a:prstGeom prst="rect">
+            <a:avLst/>
+          </a:prstGeom>
+          <a:noFill/>
+        </p:spPr>
+        <p:txBody>
+          <a:bodyPr wrap="square" anchor="ctr" lIns="0" rIns="0" tIns="0" bIns="0"/>
+          <a:lstStyle/>
+          <a:p>
+            <a:pPr algn="l"/>
+            <a:r>
+              <a:rPr sz="3200" b="1" i="0">
+                <a:solidFill>
+                  <a:srgbClr val="03306E"/>
+                </a:solidFill>
+                <a:latin typeface="Cambria"/>
+              </a:rPr>
+              <a:t>Applying Cyber Essentials</a:t>
+            </a:r>
+          </a:p>
+        </p:txBody>
+      </p:sp>
+      <p:sp>
+        <p:nvSpPr>
+          <p:cNvPr id="4" name="TextBox 3"/>
+          <p:cNvSpPr txBox="1"/>
+          <p:nvPr/>
+        </p:nvSpPr>
+        <p:spPr>
+          <a:xfrm>
+            <a:off x="548640" y="6446520"/>
+            <a:ext cx="8229600" cy="274320"/>
+          </a:xfrm>
+          <a:prstGeom prst="rect">
+            <a:avLst/>
+          </a:prstGeom>
+          <a:noFill/>
+        </p:spPr>
+        <p:txBody>
+          <a:bodyPr wrap="square" anchor="t" lIns="0" rIns="0" tIns="0" bIns="0"/>
+          <a:lstStyle/>
+          <a:p>
+            <a:pPr algn="l"/>
+            <a:r>
+              <a:rPr sz="1000" b="0" i="0">
+                <a:solidFill>
+                  <a:srgbClr val="54595D"/>
+                </a:solidFill>
+                <a:latin typeface="Calibri"/>
+              </a:rPr>
+              <a:t>Digital Support and Security T Level  ·  Mitigation, Backups, Policies and Compliance</a:t>
+            </a:r>
+          </a:p>
+        </p:txBody>
+      </p:sp>
+      <p:sp>
+        <p:nvSpPr>
+          <p:cNvPr id="5" name="TextBox 4"/>
+          <p:cNvSpPr txBox="1"/>
+          <p:nvPr/>
+        </p:nvSpPr>
+        <p:spPr>
+          <a:xfrm>
+            <a:off x="10728655" y="6446520"/>
+            <a:ext cx="914400" cy="274320"/>
+          </a:xfrm>
+          <a:prstGeom prst="rect">
+            <a:avLst/>
+          </a:prstGeom>
+          <a:noFill/>
+        </p:spPr>
+        <p:txBody>
+          <a:bodyPr wrap="square" anchor="t" lIns="0" rIns="0" tIns="0" bIns="0"/>
+          <a:lstStyle/>
+          <a:p>
+            <a:pPr algn="r"/>
+            <a:r>
+              <a:rPr sz="1000" b="0" i="0">
+                <a:solidFill>
+                  <a:srgbClr val="54595D"/>
+                </a:solidFill>
+                <a:latin typeface="Calibri"/>
+              </a:rPr>
+              <a:t>6</a:t>
+            </a:r>
+          </a:p>
+        </p:txBody>
+      </p:sp>
+      <p:sp>
+        <p:nvSpPr>
+          <p:cNvPr id="6" name="Rounded Rectangle 5"/>
+          <p:cNvSpPr/>
+          <p:nvPr/>
+        </p:nvSpPr>
+        <p:spPr>
+          <a:xfrm>
+            <a:off x="548640" y="1600200"/>
+            <a:ext cx="3515258" cy="2148840"/>
+          </a:xfrm>
+          <a:prstGeom prst="roundRect">
+            <a:avLst>
+              <a:gd name="adj" fmla="val 6000"/>
+            </a:avLst>
+          </a:prstGeom>
+          <a:solidFill>
+            <a:srgbClr val="EAF3FF"/>
+          </a:solidFill>
+          <a:ln>
+            <a:noFill/>
+          </a:ln>
+          <a:effectLst/>
+        </p:spPr>
+        <p:style>
+          <a:lnRef idx="1">
+            <a:schemeClr val="accent1"/>
+          </a:lnRef>
+          <a:fillRef idx="3">
+            <a:schemeClr val="accent1"/>
+          </a:fillRef>
+          <a:effectRef idx="2">
+            <a:schemeClr val="accent1"/>
+          </a:effectRef>
+          <a:fontRef idx="minor">
+            <a:schemeClr val="lt1"/>
+          </a:fontRef>
+        </p:style>
+        <p:txBody>
+          <a:bodyPr rtlCol="0" anchor="ctr"/>
+          <a:lstStyle/>
+          <a:p/>
+        </p:txBody>
+      </p:sp>
+      <p:sp>
+        <p:nvSpPr>
+          <p:cNvPr id="7" name="Oval 6"/>
+          <p:cNvSpPr/>
+          <p:nvPr/>
+        </p:nvSpPr>
+        <p:spPr>
+          <a:xfrm>
+            <a:off x="777240" y="1828800"/>
+            <a:ext cx="457200" cy="457200"/>
+          </a:xfrm>
+          <a:prstGeom prst="ellipse">
+            <a:avLst/>
+          </a:prstGeom>
+          <a:solidFill>
+            <a:srgbClr val="E0463A"/>
+          </a:solidFill>
+          <a:ln>
+            <a:noFill/>
+          </a:ln>
+          <a:effectLst/>
+        </p:spPr>
+        <p:style>
+          <a:lnRef idx="1">
+            <a:schemeClr val="accent1"/>
+          </a:lnRef>
+          <a:fillRef idx="3">
+            <a:schemeClr val="accent1"/>
+          </a:fillRef>
+          <a:effectRef idx="2">
+            <a:schemeClr val="accent1"/>
+          </a:effectRef>
+          <a:fontRef idx="minor">
+            <a:schemeClr val="lt1"/>
+          </a:fontRef>
+        </p:style>
+        <p:txBody>
+          <a:bodyPr rtlCol="0" anchor="ctr" lIns="0" rIns="0" tIns="0" bIns="0"/>
+          <a:lstStyle/>
+          <a:p>
+            <a:pPr algn="ctr"/>
+            <a:r>
+              <a:rPr sz="1500" b="1">
+                <a:solidFill>
+                  <a:srgbClr val="FFFFFF"/>
+                </a:solidFill>
+                <a:latin typeface="Calibri"/>
+              </a:rPr>
+              <a:t>1</a:t>
+            </a:r>
+          </a:p>
+        </p:txBody>
+      </p:sp>
+      <p:sp>
+        <p:nvSpPr>
+          <p:cNvPr id="8" name="TextBox 7"/>
+          <p:cNvSpPr txBox="1"/>
+          <p:nvPr/>
+        </p:nvSpPr>
+        <p:spPr>
+          <a:xfrm>
+            <a:off x="1371600" y="1801368"/>
+            <a:ext cx="2509418" cy="512064"/>
+          </a:xfrm>
+          <a:prstGeom prst="rect">
+            <a:avLst/>
+          </a:prstGeom>
+          <a:noFill/>
+        </p:spPr>
+        <p:txBody>
+          <a:bodyPr wrap="square" anchor="ctr" lIns="0" rIns="0" tIns="0" bIns="0"/>
+          <a:lstStyle/>
+          <a:p>
+            <a:pPr algn="l"/>
+            <a:r>
+              <a:rPr sz="1900" b="1" i="0">
+                <a:solidFill>
+                  <a:srgbClr val="03306E"/>
+                </a:solidFill>
+                <a:latin typeface="Calibri"/>
+              </a:rPr>
+              <a:t>Boundary firewalls</a:t>
+            </a:r>
+          </a:p>
+        </p:txBody>
+      </p:sp>
+      <p:sp>
+        <p:nvSpPr>
+          <p:cNvPr id="9" name="TextBox 8"/>
+          <p:cNvSpPr txBox="1"/>
+          <p:nvPr/>
+        </p:nvSpPr>
+        <p:spPr>
+          <a:xfrm>
+            <a:off x="777240" y="2468880"/>
+            <a:ext cx="3058058" cy="1143000"/>
+          </a:xfrm>
+          <a:prstGeom prst="rect">
+            <a:avLst/>
+          </a:prstGeom>
+          <a:noFill/>
+        </p:spPr>
+        <p:txBody>
+          <a:bodyPr wrap="square" anchor="t" lIns="0" rIns="0" tIns="0" bIns="0"/>
+          <a:lstStyle/>
+          <a:p>
+            <a:pPr algn="l"/>
+            <a:r>
+              <a:rPr sz="2000" b="0" i="0">
+                <a:solidFill>
+                  <a:srgbClr val="202122"/>
+                </a:solidFill>
+                <a:latin typeface="Calibri"/>
+              </a:rPr>
+              <a:t>Restrict traffic flowing in and out.</a:t>
+            </a:r>
+          </a:p>
+        </p:txBody>
+      </p:sp>
+      <p:sp>
+        <p:nvSpPr>
+          <p:cNvPr id="10" name="Rounded Rectangle 9"/>
+          <p:cNvSpPr/>
+          <p:nvPr/>
+        </p:nvSpPr>
+        <p:spPr>
+          <a:xfrm>
+            <a:off x="4338218" y="1600200"/>
+            <a:ext cx="3515258" cy="2148840"/>
+          </a:xfrm>
+          <a:prstGeom prst="roundRect">
+            <a:avLst>
+              <a:gd name="adj" fmla="val 6000"/>
+            </a:avLst>
+          </a:prstGeom>
+          <a:solidFill>
+            <a:srgbClr val="EAF3FF"/>
+          </a:solidFill>
+          <a:ln>
+            <a:noFill/>
+          </a:ln>
+          <a:effectLst/>
+        </p:spPr>
+        <p:style>
+          <a:lnRef idx="1">
+            <a:schemeClr val="accent1"/>
+          </a:lnRef>
+          <a:fillRef idx="3">
+            <a:schemeClr val="accent1"/>
+          </a:fillRef>
+          <a:effectRef idx="2">
+            <a:schemeClr val="accent1"/>
+          </a:effectRef>
+          <a:fontRef idx="minor">
+            <a:schemeClr val="lt1"/>
+          </a:fontRef>
+        </p:style>
+        <p:txBody>
+          <a:bodyPr rtlCol="0" anchor="ctr"/>
+          <a:lstStyle/>
+          <a:p/>
+        </p:txBody>
+      </p:sp>
+      <p:sp>
+        <p:nvSpPr>
+          <p:cNvPr id="11" name="Oval 10"/>
+          <p:cNvSpPr/>
+          <p:nvPr/>
+        </p:nvSpPr>
+        <p:spPr>
+          <a:xfrm>
+            <a:off x="4566818" y="1828800"/>
+            <a:ext cx="457200" cy="457200"/>
+          </a:xfrm>
+          <a:prstGeom prst="ellipse">
+            <a:avLst/>
+          </a:prstGeom>
+          <a:solidFill>
+            <a:srgbClr val="E0463A"/>
+          </a:solidFill>
+          <a:ln>
+            <a:noFill/>
+          </a:ln>
+          <a:effectLst/>
+        </p:spPr>
+        <p:style>
+          <a:lnRef idx="1">
+            <a:schemeClr val="accent1"/>
+          </a:lnRef>
+          <a:fillRef idx="3">
+            <a:schemeClr val="accent1"/>
+          </a:fillRef>
+          <a:effectRef idx="2">
+            <a:schemeClr val="accent1"/>
+          </a:effectRef>
+          <a:fontRef idx="minor">
+            <a:schemeClr val="lt1"/>
+          </a:fontRef>
+        </p:style>
+        <p:txBody>
+          <a:bodyPr rtlCol="0" anchor="ctr" lIns="0" rIns="0" tIns="0" bIns="0"/>
+          <a:lstStyle/>
+          <a:p>
+            <a:pPr algn="ctr"/>
+            <a:r>
+              <a:rPr sz="1500" b="1">
+                <a:solidFill>
+                  <a:srgbClr val="FFFFFF"/>
+                </a:solidFill>
+                <a:latin typeface="Calibri"/>
+              </a:rPr>
+              <a:t>2</a:t>
+            </a:r>
+          </a:p>
+        </p:txBody>
+      </p:sp>
+      <p:sp>
+        <p:nvSpPr>
+          <p:cNvPr id="12" name="TextBox 11"/>
+          <p:cNvSpPr txBox="1"/>
+          <p:nvPr/>
+        </p:nvSpPr>
+        <p:spPr>
+          <a:xfrm>
+            <a:off x="5161178" y="1801368"/>
+            <a:ext cx="2509418" cy="512064"/>
+          </a:xfrm>
+          <a:prstGeom prst="rect">
+            <a:avLst/>
+          </a:prstGeom>
+          <a:noFill/>
+        </p:spPr>
+        <p:txBody>
+          <a:bodyPr wrap="square" anchor="ctr" lIns="0" rIns="0" tIns="0" bIns="0"/>
+          <a:lstStyle/>
+          <a:p>
+            <a:pPr algn="l"/>
+            <a:r>
+              <a:rPr sz="1800" b="1" i="0">
+                <a:solidFill>
+                  <a:srgbClr val="03306E"/>
+                </a:solidFill>
+                <a:latin typeface="Calibri"/>
+              </a:rPr>
+              <a:t>Secure configuration</a:t>
+            </a:r>
+          </a:p>
+        </p:txBody>
+      </p:sp>
+      <p:sp>
+        <p:nvSpPr>
+          <p:cNvPr id="13" name="TextBox 12"/>
+          <p:cNvSpPr txBox="1"/>
+          <p:nvPr/>
+        </p:nvSpPr>
+        <p:spPr>
+          <a:xfrm>
+            <a:off x="4566818" y="2468880"/>
+            <a:ext cx="3058058" cy="1143000"/>
+          </a:xfrm>
+          <a:prstGeom prst="rect">
+            <a:avLst/>
+          </a:prstGeom>
+          <a:noFill/>
+        </p:spPr>
+        <p:txBody>
+          <a:bodyPr wrap="square" anchor="t" lIns="0" rIns="0" tIns="0" bIns="0"/>
+          <a:lstStyle/>
+          <a:p>
+            <a:pPr algn="l"/>
+            <a:r>
+              <a:rPr sz="2000" b="0" i="0">
+                <a:solidFill>
+                  <a:srgbClr val="202122"/>
+                </a:solidFill>
+                <a:latin typeface="Calibri"/>
+              </a:rPr>
+              <a:t>Enable only the functions needed.</a:t>
+            </a:r>
+          </a:p>
+        </p:txBody>
+      </p:sp>
+      <p:sp>
+        <p:nvSpPr>
+          <p:cNvPr id="14" name="Rounded Rectangle 13"/>
+          <p:cNvSpPr/>
+          <p:nvPr/>
+        </p:nvSpPr>
+        <p:spPr>
+          <a:xfrm>
+            <a:off x="8127796" y="1600200"/>
+            <a:ext cx="3515258" cy="2148840"/>
+          </a:xfrm>
+          <a:prstGeom prst="roundRect">
+            <a:avLst>
+              <a:gd name="adj" fmla="val 6000"/>
+            </a:avLst>
+          </a:prstGeom>
+          <a:solidFill>
+            <a:srgbClr val="EAF3FF"/>
+          </a:solidFill>
+          <a:ln>
+            <a:noFill/>
+          </a:ln>
+          <a:effectLst/>
+        </p:spPr>
+        <p:style>
+          <a:lnRef idx="1">
+            <a:schemeClr val="accent1"/>
+          </a:lnRef>
+          <a:fillRef idx="3">
+            <a:schemeClr val="accent1"/>
+          </a:fillRef>
+          <a:effectRef idx="2">
+            <a:schemeClr val="accent1"/>
+          </a:effectRef>
+          <a:fontRef idx="minor">
+            <a:schemeClr val="lt1"/>
+          </a:fontRef>
+        </p:style>
+        <p:txBody>
+          <a:bodyPr rtlCol="0" anchor="ctr"/>
+          <a:lstStyle/>
+          <a:p/>
+        </p:txBody>
+      </p:sp>
+      <p:sp>
+        <p:nvSpPr>
+          <p:cNvPr id="15" name="Oval 14"/>
+          <p:cNvSpPr/>
+          <p:nvPr/>
+        </p:nvSpPr>
+        <p:spPr>
+          <a:xfrm>
+            <a:off x="8356396" y="1828800"/>
+            <a:ext cx="457200" cy="457200"/>
+          </a:xfrm>
+          <a:prstGeom prst="ellipse">
+            <a:avLst/>
+          </a:prstGeom>
+          <a:solidFill>
+            <a:srgbClr val="E0463A"/>
+          </a:solidFill>
+          <a:ln>
+            <a:noFill/>
+          </a:ln>
+          <a:effectLst/>
+        </p:spPr>
+        <p:style>
+          <a:lnRef idx="1">
+            <a:schemeClr val="accent1"/>
+          </a:lnRef>
+          <a:fillRef idx="3">
+            <a:schemeClr val="accent1"/>
+          </a:fillRef>
+          <a:effectRef idx="2">
+            <a:schemeClr val="accent1"/>
+          </a:effectRef>
+          <a:fontRef idx="minor">
+            <a:schemeClr val="lt1"/>
+          </a:fontRef>
+        </p:style>
+        <p:txBody>
+          <a:bodyPr rtlCol="0" anchor="ctr" lIns="0" rIns="0" tIns="0" bIns="0"/>
+          <a:lstStyle/>
+          <a:p>
+            <a:pPr algn="ctr"/>
+            <a:r>
+              <a:rPr sz="1500" b="1">
+                <a:solidFill>
+                  <a:srgbClr val="FFFFFF"/>
+                </a:solidFill>
+                <a:latin typeface="Calibri"/>
+              </a:rPr>
+              <a:t>3</a:t>
+            </a:r>
+          </a:p>
+        </p:txBody>
+      </p:sp>
+      <p:sp>
+        <p:nvSpPr>
+          <p:cNvPr id="16" name="TextBox 15"/>
+          <p:cNvSpPr txBox="1"/>
+          <p:nvPr/>
+        </p:nvSpPr>
+        <p:spPr>
+          <a:xfrm>
+            <a:off x="8950756" y="1801368"/>
+            <a:ext cx="2509418" cy="512064"/>
+          </a:xfrm>
+          <a:prstGeom prst="rect">
+            <a:avLst/>
+          </a:prstGeom>
+          <a:noFill/>
+        </p:spPr>
+        <p:txBody>
+          <a:bodyPr wrap="square" anchor="ctr" lIns="0" rIns="0" tIns="0" bIns="0"/>
+          <a:lstStyle/>
+          <a:p>
+            <a:pPr algn="l"/>
+            <a:r>
+              <a:rPr sz="1900" b="1" i="0">
+                <a:solidFill>
+                  <a:srgbClr val="03306E"/>
+                </a:solidFill>
+                <a:latin typeface="Calibri"/>
+              </a:rPr>
+              <a:t>Malware protection</a:t>
+            </a:r>
+          </a:p>
+        </p:txBody>
+      </p:sp>
+      <p:sp>
+        <p:nvSpPr>
+          <p:cNvPr id="17" name="TextBox 16"/>
+          <p:cNvSpPr txBox="1"/>
+          <p:nvPr/>
+        </p:nvSpPr>
+        <p:spPr>
+          <a:xfrm>
+            <a:off x="8356396" y="2468880"/>
+            <a:ext cx="3058058" cy="1143000"/>
+          </a:xfrm>
+          <a:prstGeom prst="rect">
+            <a:avLst/>
+          </a:prstGeom>
+          <a:noFill/>
+        </p:spPr>
+        <p:txBody>
+          <a:bodyPr wrap="square" anchor="t" lIns="0" rIns="0" tIns="0" bIns="0"/>
+          <a:lstStyle/>
+          <a:p>
+            <a:pPr algn="l"/>
+            <a:r>
+              <a:rPr sz="2000" b="0" i="0">
+                <a:solidFill>
+                  <a:srgbClr val="202122"/>
+                </a:solidFill>
+                <a:latin typeface="Calibri"/>
+              </a:rPr>
+              <a:t>Current anti-malware and regular scans.</a:t>
+            </a:r>
+          </a:p>
+        </p:txBody>
+      </p:sp>
+      <p:sp>
+        <p:nvSpPr>
+          <p:cNvPr id="18" name="Rounded Rectangle 17"/>
+          <p:cNvSpPr/>
+          <p:nvPr/>
+        </p:nvSpPr>
+        <p:spPr>
+          <a:xfrm>
+            <a:off x="548640" y="4023360"/>
+            <a:ext cx="3515258" cy="2148840"/>
+          </a:xfrm>
+          <a:prstGeom prst="roundRect">
+            <a:avLst>
+              <a:gd name="adj" fmla="val 6000"/>
+            </a:avLst>
+          </a:prstGeom>
+          <a:solidFill>
+            <a:srgbClr val="EAF3FF"/>
+          </a:solidFill>
+          <a:ln>
+            <a:noFill/>
+          </a:ln>
+          <a:effectLst/>
+        </p:spPr>
+        <p:style>
+          <a:lnRef idx="1">
+            <a:schemeClr val="accent1"/>
+          </a:lnRef>
+          <a:fillRef idx="3">
+            <a:schemeClr val="accent1"/>
+          </a:fillRef>
+          <a:effectRef idx="2">
+            <a:schemeClr val="accent1"/>
+          </a:effectRef>
+          <a:fontRef idx="minor">
+            <a:schemeClr val="lt1"/>
+          </a:fontRef>
+        </p:style>
+        <p:txBody>
+          <a:bodyPr rtlCol="0" anchor="ctr"/>
+          <a:lstStyle/>
+          <a:p/>
+        </p:txBody>
+      </p:sp>
+      <p:sp>
+        <p:nvSpPr>
+          <p:cNvPr id="19" name="Oval 18"/>
+          <p:cNvSpPr/>
+          <p:nvPr/>
+        </p:nvSpPr>
+        <p:spPr>
+          <a:xfrm>
+            <a:off x="777240" y="4251960"/>
+            <a:ext cx="457200" cy="457200"/>
+          </a:xfrm>
+          <a:prstGeom prst="ellipse">
+            <a:avLst/>
+          </a:prstGeom>
+          <a:solidFill>
+            <a:srgbClr val="E0463A"/>
+          </a:solidFill>
+          <a:ln>
+            <a:noFill/>
+          </a:ln>
+          <a:effectLst/>
+        </p:spPr>
+        <p:style>
+          <a:lnRef idx="1">
+            <a:schemeClr val="accent1"/>
+          </a:lnRef>
+          <a:fillRef idx="3">
+            <a:schemeClr val="accent1"/>
+          </a:fillRef>
+          <a:effectRef idx="2">
+            <a:schemeClr val="accent1"/>
+          </a:effectRef>
+          <a:fontRef idx="minor">
+            <a:schemeClr val="lt1"/>
+          </a:fontRef>
+        </p:style>
+        <p:txBody>
+          <a:bodyPr rtlCol="0" anchor="ctr" lIns="0" rIns="0" tIns="0" bIns="0"/>
+          <a:lstStyle/>
+          <a:p>
+            <a:pPr algn="ctr"/>
+            <a:r>
+              <a:rPr sz="1500" b="1">
+                <a:solidFill>
+                  <a:srgbClr val="FFFFFF"/>
+                </a:solidFill>
+                <a:latin typeface="Calibri"/>
+              </a:rPr>
+              <a:t>4</a:t>
+            </a:r>
+          </a:p>
+        </p:txBody>
+      </p:sp>
+      <p:sp>
+        <p:nvSpPr>
+          <p:cNvPr id="20" name="TextBox 19"/>
+          <p:cNvSpPr txBox="1"/>
+          <p:nvPr/>
+        </p:nvSpPr>
+        <p:spPr>
+          <a:xfrm>
+            <a:off x="1371600" y="4224528"/>
+            <a:ext cx="2509418" cy="512064"/>
+          </a:xfrm>
+          <a:prstGeom prst="rect">
+            <a:avLst/>
+          </a:prstGeom>
+          <a:noFill/>
+        </p:spPr>
+        <p:txBody>
+          <a:bodyPr wrap="square" anchor="ctr" lIns="0" rIns="0" tIns="0" bIns="0"/>
+          <a:lstStyle/>
+          <a:p>
+            <a:pPr algn="l"/>
+            <a:r>
+              <a:rPr sz="1900" b="1" i="0">
+                <a:solidFill>
+                  <a:srgbClr val="03306E"/>
+                </a:solidFill>
+                <a:latin typeface="Calibri"/>
+              </a:rPr>
+              <a:t>Security updates</a:t>
+            </a:r>
+          </a:p>
+        </p:txBody>
+      </p:sp>
+      <p:sp>
+        <p:nvSpPr>
+          <p:cNvPr id="21" name="TextBox 20"/>
+          <p:cNvSpPr txBox="1"/>
+          <p:nvPr/>
+        </p:nvSpPr>
+        <p:spPr>
+          <a:xfrm>
+            <a:off x="777240" y="4892040"/>
+            <a:ext cx="3058058" cy="1143000"/>
+          </a:xfrm>
+          <a:prstGeom prst="rect">
+            <a:avLst/>
+          </a:prstGeom>
+          <a:noFill/>
+        </p:spPr>
+        <p:txBody>
+          <a:bodyPr wrap="square" anchor="t" lIns="0" rIns="0" tIns="0" bIns="0"/>
+          <a:lstStyle/>
+          <a:p>
+            <a:pPr algn="l"/>
+            <a:r>
+              <a:rPr sz="2000" b="0" i="0">
+                <a:solidFill>
+                  <a:srgbClr val="202122"/>
+                </a:solidFill>
+                <a:latin typeface="Calibri"/>
+              </a:rPr>
+              <a:t>Keep patches current.</a:t>
+            </a:r>
+          </a:p>
+        </p:txBody>
+      </p:sp>
+      <p:sp>
+        <p:nvSpPr>
+          <p:cNvPr id="22" name="Rounded Rectangle 21"/>
+          <p:cNvSpPr/>
+          <p:nvPr/>
+        </p:nvSpPr>
+        <p:spPr>
+          <a:xfrm>
+            <a:off x="4338218" y="4023360"/>
+            <a:ext cx="3515258" cy="2148840"/>
+          </a:xfrm>
+          <a:prstGeom prst="roundRect">
+            <a:avLst>
+              <a:gd name="adj" fmla="val 6000"/>
+            </a:avLst>
+          </a:prstGeom>
+          <a:solidFill>
+            <a:srgbClr val="EAF3FF"/>
+          </a:solidFill>
+          <a:ln>
+            <a:noFill/>
+          </a:ln>
+          <a:effectLst/>
+        </p:spPr>
+        <p:style>
+          <a:lnRef idx="1">
+            <a:schemeClr val="accent1"/>
+          </a:lnRef>
+          <a:fillRef idx="3">
+            <a:schemeClr val="accent1"/>
+          </a:fillRef>
+          <a:effectRef idx="2">
+            <a:schemeClr val="accent1"/>
+          </a:effectRef>
+          <a:fontRef idx="minor">
+            <a:schemeClr val="lt1"/>
+          </a:fontRef>
+        </p:style>
+        <p:txBody>
+          <a:bodyPr rtlCol="0" anchor="ctr"/>
+          <a:lstStyle/>
+          <a:p/>
+        </p:txBody>
+      </p:sp>
+      <p:sp>
+        <p:nvSpPr>
+          <p:cNvPr id="23" name="Oval 22"/>
+          <p:cNvSpPr/>
+          <p:nvPr/>
+        </p:nvSpPr>
+        <p:spPr>
+          <a:xfrm>
+            <a:off x="4566818" y="4251960"/>
+            <a:ext cx="457200" cy="457200"/>
+          </a:xfrm>
+          <a:prstGeom prst="ellipse">
+            <a:avLst/>
+          </a:prstGeom>
+          <a:solidFill>
+            <a:srgbClr val="E0463A"/>
+          </a:solidFill>
+          <a:ln>
+            <a:noFill/>
+          </a:ln>
+          <a:effectLst/>
+        </p:spPr>
+        <p:style>
+          <a:lnRef idx="1">
+            <a:schemeClr val="accent1"/>
+          </a:lnRef>
+          <a:fillRef idx="3">
+            <a:schemeClr val="accent1"/>
+          </a:fillRef>
+          <a:effectRef idx="2">
+            <a:schemeClr val="accent1"/>
+          </a:effectRef>
+          <a:fontRef idx="minor">
+            <a:schemeClr val="lt1"/>
+          </a:fontRef>
+        </p:style>
+        <p:txBody>
+          <a:bodyPr rtlCol="0" anchor="ctr" lIns="0" rIns="0" tIns="0" bIns="0"/>
+          <a:lstStyle/>
+          <a:p>
+            <a:pPr algn="ctr"/>
+            <a:r>
+              <a:rPr sz="1500" b="1">
+                <a:solidFill>
+                  <a:srgbClr val="FFFFFF"/>
+                </a:solidFill>
+                <a:latin typeface="Calibri"/>
+              </a:rPr>
+              <a:t>5</a:t>
+            </a:r>
+          </a:p>
+        </p:txBody>
+      </p:sp>
+      <p:sp>
+        <p:nvSpPr>
+          <p:cNvPr id="24" name="TextBox 23"/>
+          <p:cNvSpPr txBox="1"/>
+          <p:nvPr/>
+        </p:nvSpPr>
+        <p:spPr>
+          <a:xfrm>
+            <a:off x="5161178" y="4224528"/>
+            <a:ext cx="2509418" cy="512064"/>
+          </a:xfrm>
+          <a:prstGeom prst="rect">
+            <a:avLst/>
+          </a:prstGeom>
+          <a:noFill/>
+        </p:spPr>
+        <p:txBody>
+          <a:bodyPr wrap="square" anchor="ctr" lIns="0" rIns="0" tIns="0" bIns="0"/>
+          <a:lstStyle/>
+          <a:p>
+            <a:pPr algn="l"/>
+            <a:r>
+              <a:rPr sz="1900" b="1" i="0">
+                <a:solidFill>
+                  <a:srgbClr val="03306E"/>
+                </a:solidFill>
+                <a:latin typeface="Calibri"/>
+              </a:rPr>
+              <a:t>Access control</a:t>
+            </a:r>
+          </a:p>
+        </p:txBody>
+      </p:sp>
+      <p:sp>
+        <p:nvSpPr>
+          <p:cNvPr id="25" name="TextBox 24"/>
+          <p:cNvSpPr txBox="1"/>
+          <p:nvPr/>
+        </p:nvSpPr>
+        <p:spPr>
+          <a:xfrm>
+            <a:off x="4566818" y="4892040"/>
+            <a:ext cx="3058058" cy="1143000"/>
+          </a:xfrm>
+          <a:prstGeom prst="rect">
+            <a:avLst/>
+          </a:prstGeom>
+          <a:noFill/>
+        </p:spPr>
+        <p:txBody>
+          <a:bodyPr wrap="square" anchor="t" lIns="0" rIns="0" tIns="0" bIns="0"/>
+          <a:lstStyle/>
+          <a:p>
+            <a:pPr algn="l"/>
+            <a:r>
+              <a:rPr sz="2000" b="0" i="0">
+                <a:solidFill>
+                  <a:srgbClr val="202122"/>
+                </a:solidFill>
+                <a:latin typeface="Calibri"/>
+              </a:rPr>
+              <a:t>Least privilege, with PAM for super-user and privileged accounts.</a:t>
+            </a:r>
+          </a:p>
+        </p:txBody>
+      </p:sp>
+    </p:spTree>
+  </p:cSld>
+  <p:clrMapOvr>
+    <a:masterClrMapping/>
+  </p:clrMapOvr>
+</p:sld>
+</file>
+
+<file path=ppt/slides/slide7.xml><?xml version="1.0" encoding="utf-8"?>
+<p:sld xmlns:a="http://schemas.openxmlformats.org/drawingml/2006/main" xmlns:p="http://schemas.openxmlformats.org/presentationml/2006/main" xmlns:r="http://schemas.openxmlformats.org/officeDocument/2006/relationships">
+  <p:cSld>
+    <p:bg>
+      <p:bgPr>
+        <a:solidFill>
+          <a:srgbClr val="FFFFFF"/>
+        </a:solidFill>
+        <a:effectLst/>
+      </p:bgPr>
+    </p:bg>
+    <p:spTree>
+      <p:nvGrpSpPr>
+        <p:cNvPr id="1" name=""/>
+        <p:cNvGrpSpPr/>
+        <p:nvPr/>
+      </p:nvGrpSpPr>
+      <p:grpSpPr/>
+      <p:sp>
+        <p:nvSpPr>
+          <p:cNvPr id="2" name="TextBox 1"/>
+          <p:cNvSpPr txBox="1"/>
+          <p:nvPr/>
+        </p:nvSpPr>
+        <p:spPr>
+          <a:xfrm>
+            <a:off x="548640" y="320040"/>
+            <a:ext cx="11094415" cy="274320"/>
+          </a:xfrm>
+          <a:prstGeom prst="rect">
+            <a:avLst/>
+          </a:prstGeom>
+          <a:noFill/>
+        </p:spPr>
+        <p:txBody>
+          <a:bodyPr wrap="square" anchor="t" lIns="0" rIns="0" tIns="0" bIns="0"/>
+          <a:lstStyle/>
+          <a:p>
+            <a:pPr algn="l"/>
+            <a:r>
+              <a:rPr sz="1100" b="1" i="0">
+                <a:solidFill>
+                  <a:srgbClr val="54595D"/>
+                </a:solidFill>
+                <a:latin typeface="Calibri"/>
+              </a:rPr>
+              <a:t>CYBER SECURITY  ·  Cyber Security Content Area 2</a:t>
+            </a:r>
+          </a:p>
+        </p:txBody>
+      </p:sp>
+      <p:sp>
+        <p:nvSpPr>
+          <p:cNvPr id="3" name="TextBox 2"/>
+          <p:cNvSpPr txBox="1"/>
+          <p:nvPr/>
+        </p:nvSpPr>
+        <p:spPr>
+          <a:xfrm>
+            <a:off x="548640" y="566928"/>
+            <a:ext cx="11094415" cy="822960"/>
+          </a:xfrm>
+          <a:prstGeom prst="rect">
+            <a:avLst/>
+          </a:prstGeom>
+          <a:noFill/>
+        </p:spPr>
+        <p:txBody>
+          <a:bodyPr wrap="square" anchor="ctr" lIns="0" rIns="0" tIns="0" bIns="0"/>
+          <a:lstStyle/>
+          <a:p>
+            <a:pPr algn="l"/>
+            <a:r>
+              <a:rPr sz="3200" b="1" i="0">
+                <a:solidFill>
+                  <a:srgbClr val="03306E"/>
+                </a:solidFill>
+                <a:latin typeface="Cambria"/>
+              </a:rPr>
+              <a:t>Backup types</a:t>
+            </a:r>
+          </a:p>
+        </p:txBody>
+      </p:sp>
+      <p:sp>
+        <p:nvSpPr>
+          <p:cNvPr id="4" name="TextBox 3"/>
+          <p:cNvSpPr txBox="1"/>
+          <p:nvPr/>
+        </p:nvSpPr>
+        <p:spPr>
+          <a:xfrm>
+            <a:off x="548640" y="6446520"/>
+            <a:ext cx="8229600" cy="274320"/>
+          </a:xfrm>
+          <a:prstGeom prst="rect">
+            <a:avLst/>
+          </a:prstGeom>
+          <a:noFill/>
+        </p:spPr>
+        <p:txBody>
+          <a:bodyPr wrap="square" anchor="t" lIns="0" rIns="0" tIns="0" bIns="0"/>
+          <a:lstStyle/>
+          <a:p>
+            <a:pPr algn="l"/>
+            <a:r>
+              <a:rPr sz="1000" b="0" i="0">
+                <a:solidFill>
+                  <a:srgbClr val="54595D"/>
+                </a:solidFill>
+                <a:latin typeface="Calibri"/>
+              </a:rPr>
+              <a:t>Digital Support and Security T Level  ·  Mitigation, Backups, Policies and Compliance</a:t>
+            </a:r>
+          </a:p>
+        </p:txBody>
+      </p:sp>
+      <p:sp>
+        <p:nvSpPr>
+          <p:cNvPr id="5" name="TextBox 4"/>
+          <p:cNvSpPr txBox="1"/>
+          <p:nvPr/>
+        </p:nvSpPr>
+        <p:spPr>
+          <a:xfrm>
+            <a:off x="10728655" y="6446520"/>
+            <a:ext cx="914400" cy="274320"/>
+          </a:xfrm>
+          <a:prstGeom prst="rect">
+            <a:avLst/>
+          </a:prstGeom>
+          <a:noFill/>
+        </p:spPr>
+        <p:txBody>
+          <a:bodyPr wrap="square" anchor="t" lIns="0" rIns="0" tIns="0" bIns="0"/>
+          <a:lstStyle/>
+          <a:p>
+            <a:pPr algn="r"/>
+            <a:r>
+              <a:rPr sz="1000" b="0" i="0">
+                <a:solidFill>
+                  <a:srgbClr val="54595D"/>
+                </a:solidFill>
+                <a:latin typeface="Calibri"/>
+              </a:rPr>
+              <a:t>7</a:t>
+            </a:r>
+          </a:p>
+        </p:txBody>
+      </p:sp>
+      <p:sp>
+        <p:nvSpPr>
+          <p:cNvPr id="6" name="TextBox 5"/>
+          <p:cNvSpPr txBox="1"/>
+          <p:nvPr/>
+        </p:nvSpPr>
+        <p:spPr>
+          <a:xfrm>
+            <a:off x="548640" y="1554480"/>
+            <a:ext cx="6720840" cy="4617720"/>
+          </a:xfrm>
+          <a:prstGeom prst="rect">
+            <a:avLst/>
+          </a:prstGeom>
+          <a:noFill/>
+        </p:spPr>
+        <p:txBody>
+          <a:bodyPr wrap="square" lIns="0" rIns="0" tIns="0" bIns="0">
+            <a:spAutoFit/>
+          </a:bodyPr>
+          <a:lstStyle/>
+          <a:p>
+            <a:pPr>
+              <a:spcAft>
+                <a:spcPts val="1200"/>
+              </a:spcAft>
+            </a:pPr>
+            <a:r>
+              <a:rPr sz="2000" b="0">
+                <a:solidFill>
+                  <a:srgbClr val="202122"/>
+                </a:solidFill>
+                <a:latin typeface="Calibri"/>
+              </a:rPr>
+              <a:t>Backups are the last line of defence against ransomware and failure.</a:t>
+            </a:r>
+          </a:p>
+          <a:p>
+            <a:pPr>
+              <a:spcAft>
+                <a:spcPts val="1200"/>
+              </a:spcAft>
+            </a:pPr>
+            <a:r>
+              <a:rPr sz="2000" b="0">
+                <a:solidFill>
+                  <a:srgbClr val="202122"/>
+                </a:solidFill>
+                <a:latin typeface="Calibri"/>
+              </a:rPr>
+              <a:t>Full backups copy everything; incremental copy changes since the last backup; differential copy changes since the last full backup; a mirror is a live exact copy.</a:t>
+            </a:r>
+          </a:p>
+          <a:p>
+            <a:pPr>
+              <a:spcAft>
+                <a:spcPts val="1200"/>
+              </a:spcAft>
+            </a:pPr>
+            <a:r>
+              <a:rPr sz="2000" b="0">
+                <a:solidFill>
+                  <a:srgbClr val="202122"/>
+                </a:solidFill>
+                <a:latin typeface="Calibri"/>
+              </a:rPr>
+              <a:t>Immutable backups can't be changed, overwritten or deleted for a set period, even by an administrator. Ransomware often tries to destroy backups first, so immutable or offline copies are essential.</a:t>
+            </a:r>
+          </a:p>
+          <a:p>
+            <a:pPr>
+              <a:spcAft>
+                <a:spcPts val="1200"/>
+              </a:spcAft>
+            </a:pPr>
+            <a:r>
+              <a:rPr sz="2000" b="0">
+                <a:solidFill>
+                  <a:srgbClr val="202122"/>
+                </a:solidFill>
+                <a:latin typeface="Calibri"/>
+              </a:rPr>
+              <a:t>A backup strategy sets frequency, source, destination, storage medium and location, how long copies are kept, and regular test restores.</a:t>
+            </a:r>
+          </a:p>
+        </p:txBody>
+      </p:sp>
+      <p:sp>
+        <p:nvSpPr>
+          <p:cNvPr id="7" name="Rounded Rectangle 6"/>
+          <p:cNvSpPr/>
+          <p:nvPr/>
+        </p:nvSpPr>
+        <p:spPr>
+          <a:xfrm>
+            <a:off x="7772400" y="1554480"/>
+            <a:ext cx="3867912" cy="4526280"/>
+          </a:xfrm>
+          <a:prstGeom prst="roundRect">
+            <a:avLst>
+              <a:gd name="adj" fmla="val 8000"/>
+            </a:avLst>
+          </a:prstGeom>
+          <a:solidFill>
+            <a:srgbClr val="03306E"/>
+          </a:solidFill>
+          <a:ln>
+            <a:noFill/>
+          </a:ln>
+          <a:effectLst/>
+        </p:spPr>
+        <p:style>
+          <a:lnRef idx="1">
+            <a:schemeClr val="accent1"/>
+          </a:lnRef>
+          <a:fillRef idx="3">
+            <a:schemeClr val="accent1"/>
+          </a:fillRef>
+          <a:effectRef idx="2">
+            <a:schemeClr val="accent1"/>
+          </a:effectRef>
+          <a:fontRef idx="minor">
+            <a:schemeClr val="lt1"/>
+          </a:fontRef>
+        </p:style>
+        <p:txBody>
+          <a:bodyPr rtlCol="0" anchor="ctr"/>
+          <a:lstStyle/>
+          <a:p/>
+        </p:txBody>
+      </p:sp>
+      <p:sp>
+        <p:nvSpPr>
+          <p:cNvPr id="8" name="Oval 7"/>
+          <p:cNvSpPr/>
+          <p:nvPr/>
+        </p:nvSpPr>
+        <p:spPr>
+          <a:xfrm>
+            <a:off x="8046720" y="1828800"/>
+            <a:ext cx="548640" cy="548640"/>
+          </a:xfrm>
+          <a:prstGeom prst="ellipse">
+            <a:avLst/>
+          </a:prstGeom>
+          <a:solidFill>
+            <a:srgbClr val="E0463A"/>
+          </a:solidFill>
+          <a:ln>
+            <a:noFill/>
+          </a:ln>
+          <a:effectLst/>
+        </p:spPr>
+        <p:style>
+          <a:lnRef idx="1">
+            <a:schemeClr val="accent1"/>
+          </a:lnRef>
+          <a:fillRef idx="3">
+            <a:schemeClr val="accent1"/>
+          </a:fillRef>
+          <a:effectRef idx="2">
+            <a:schemeClr val="accent1"/>
+          </a:effectRef>
+          <a:fontRef idx="minor">
+            <a:schemeClr val="lt1"/>
+          </a:fontRef>
+        </p:style>
+        <p:txBody>
+          <a:bodyPr rtlCol="0" anchor="ctr" lIns="0" rIns="0" tIns="0" bIns="0"/>
+          <a:lstStyle/>
+          <a:p>
+            <a:pPr algn="ctr"/>
+            <a:r>
+              <a:rPr sz="1300" b="1">
+                <a:solidFill>
+                  <a:srgbClr val="FFFFFF"/>
+                </a:solidFill>
+                <a:latin typeface="Calibri"/>
+              </a:rPr>
+              <a:t>e.g.</a:t>
+            </a:r>
+          </a:p>
+        </p:txBody>
+      </p:sp>
+      <p:sp>
+        <p:nvSpPr>
+          <p:cNvPr id="9" name="TextBox 8"/>
+          <p:cNvSpPr txBox="1"/>
+          <p:nvPr/>
+        </p:nvSpPr>
+        <p:spPr>
+          <a:xfrm>
+            <a:off x="8046720" y="2560320"/>
+            <a:ext cx="3291840" cy="365760"/>
+          </a:xfrm>
+          <a:prstGeom prst="rect">
+            <a:avLst/>
+          </a:prstGeom>
+          <a:noFill/>
+        </p:spPr>
+        <p:txBody>
+          <a:bodyPr wrap="square" anchor="t" lIns="0" rIns="0" tIns="0" bIns="0"/>
+          <a:lstStyle/>
+          <a:p>
+            <a:pPr algn="l"/>
+            <a:r>
+              <a:rPr sz="1300" b="1" i="0">
+                <a:solidFill>
+                  <a:srgbClr val="A9C8F0"/>
+                </a:solidFill>
+                <a:latin typeface="Calibri"/>
+              </a:rPr>
+              <a:t>EXAMPLE</a:t>
+            </a:r>
+          </a:p>
+        </p:txBody>
+      </p:sp>
+      <p:sp>
+        <p:nvSpPr>
+          <p:cNvPr id="10" name="TextBox 9"/>
+          <p:cNvSpPr txBox="1"/>
+          <p:nvPr/>
+        </p:nvSpPr>
+        <p:spPr>
+          <a:xfrm>
+            <a:off x="8046720" y="2971800"/>
+            <a:ext cx="3291840" cy="2971800"/>
+          </a:xfrm>
+          <a:prstGeom prst="rect">
+            <a:avLst/>
+          </a:prstGeom>
+          <a:noFill/>
+        </p:spPr>
+        <p:txBody>
+          <a:bodyPr wrap="square" anchor="t" lIns="0" rIns="0" tIns="0" bIns="0"/>
+          <a:lstStyle/>
+          <a:p>
+            <a:pPr algn="l"/>
+            <a:r>
+              <a:rPr sz="1900" b="0" i="0">
+                <a:solidFill>
+                  <a:srgbClr val="FFFFFF"/>
+                </a:solidFill>
+                <a:latin typeface="Cambria"/>
+              </a:rPr>
+              <a:t>Ransomware encrypts a company's server and its connected backup drive, but the immutable cloud backup survives, so the company recovers without paying.</a:t>
+            </a:r>
+          </a:p>
+        </p:txBody>
+      </p:sp>
+    </p:spTree>
+  </p:cSld>
+  <p:clrMapOvr>
+    <a:masterClrMapping/>
+  </p:clrMapOvr>
+</p:sld>
+</file>
+
+<file path=ppt/slides/slide8.xml><?xml version="1.0" encoding="utf-8"?>
+<p:sld xmlns:a="http://schemas.openxmlformats.org/drawingml/2006/main" xmlns:p="http://schemas.openxmlformats.org/presentationml/2006/main" xmlns:r="http://schemas.openxmlformats.org/officeDocument/2006/relationships">
+  <p:cSld>
+    <p:bg>
+      <p:bgPr>
+        <a:solidFill>
+          <a:srgbClr val="FFFFFF"/>
+        </a:solidFill>
+        <a:effectLst/>
+      </p:bgPr>
+    </p:bg>
+    <p:spTree>
+      <p:nvGrpSpPr>
+        <p:cNvPr id="1" name=""/>
+        <p:cNvGrpSpPr/>
+        <p:nvPr/>
+      </p:nvGrpSpPr>
+      <p:grpSpPr/>
+      <p:sp>
+        <p:nvSpPr>
+          <p:cNvPr id="2" name="TextBox 1"/>
+          <p:cNvSpPr txBox="1"/>
+          <p:nvPr/>
+        </p:nvSpPr>
+        <p:spPr>
+          <a:xfrm>
+            <a:off x="548640" y="320040"/>
+            <a:ext cx="11094415" cy="274320"/>
+          </a:xfrm>
+          <a:prstGeom prst="rect">
+            <a:avLst/>
+          </a:prstGeom>
+          <a:noFill/>
+        </p:spPr>
+        <p:txBody>
+          <a:bodyPr wrap="square" anchor="t" lIns="0" rIns="0" tIns="0" bIns="0"/>
+          <a:lstStyle/>
+          <a:p>
+            <a:pPr algn="l"/>
+            <a:r>
+              <a:rPr sz="1100" b="1" i="0">
+                <a:solidFill>
+                  <a:srgbClr val="54595D"/>
+                </a:solidFill>
+                <a:latin typeface="Calibri"/>
+              </a:rPr>
+              <a:t>CYBER SECURITY  ·  Cyber Security Content Area 2</a:t>
+            </a:r>
+          </a:p>
+        </p:txBody>
+      </p:sp>
+      <p:sp>
+        <p:nvSpPr>
+          <p:cNvPr id="3" name="TextBox 2"/>
+          <p:cNvSpPr txBox="1"/>
+          <p:nvPr/>
+        </p:nvSpPr>
+        <p:spPr>
+          <a:xfrm>
+            <a:off x="548640" y="566928"/>
+            <a:ext cx="11094415" cy="822960"/>
+          </a:xfrm>
+          <a:prstGeom prst="rect">
+            <a:avLst/>
+          </a:prstGeom>
+          <a:noFill/>
+        </p:spPr>
+        <p:txBody>
+          <a:bodyPr wrap="square" anchor="ctr" lIns="0" rIns="0" tIns="0" bIns="0"/>
+          <a:lstStyle/>
+          <a:p>
+            <a:pPr algn="l"/>
+            <a:r>
+              <a:rPr sz="3200" b="1" i="0">
+                <a:solidFill>
+                  <a:srgbClr val="03306E"/>
+                </a:solidFill>
+                <a:latin typeface="Cambria"/>
+              </a:rPr>
+              <a:t>Backup types</a:t>
+            </a:r>
+          </a:p>
+        </p:txBody>
+      </p:sp>
+      <p:sp>
+        <p:nvSpPr>
+          <p:cNvPr id="4" name="TextBox 3"/>
+          <p:cNvSpPr txBox="1"/>
+          <p:nvPr/>
+        </p:nvSpPr>
+        <p:spPr>
+          <a:xfrm>
+            <a:off x="548640" y="6446520"/>
+            <a:ext cx="8229600" cy="274320"/>
+          </a:xfrm>
+          <a:prstGeom prst="rect">
+            <a:avLst/>
+          </a:prstGeom>
+          <a:noFill/>
+        </p:spPr>
+        <p:txBody>
+          <a:bodyPr wrap="square" anchor="t" lIns="0" rIns="0" tIns="0" bIns="0"/>
+          <a:lstStyle/>
+          <a:p>
+            <a:pPr algn="l"/>
+            <a:r>
+              <a:rPr sz="1000" b="0" i="0">
+                <a:solidFill>
+                  <a:srgbClr val="54595D"/>
+                </a:solidFill>
+                <a:latin typeface="Calibri"/>
+              </a:rPr>
+              <a:t>Digital Support and Security T Level  ·  Mitigation, Backups, Policies and Compliance</a:t>
+            </a:r>
+          </a:p>
+        </p:txBody>
+      </p:sp>
+      <p:sp>
+        <p:nvSpPr>
+          <p:cNvPr id="5" name="TextBox 4"/>
+          <p:cNvSpPr txBox="1"/>
+          <p:nvPr/>
+        </p:nvSpPr>
+        <p:spPr>
+          <a:xfrm>
+            <a:off x="10728655" y="6446520"/>
+            <a:ext cx="914400" cy="274320"/>
+          </a:xfrm>
+          <a:prstGeom prst="rect">
+            <a:avLst/>
+          </a:prstGeom>
+          <a:noFill/>
+        </p:spPr>
+        <p:txBody>
+          <a:bodyPr wrap="square" anchor="t" lIns="0" rIns="0" tIns="0" bIns="0"/>
+          <a:lstStyle/>
+          <a:p>
+            <a:pPr algn="r"/>
+            <a:r>
+              <a:rPr sz="1000" b="0" i="0">
+                <a:solidFill>
+                  <a:srgbClr val="54595D"/>
+                </a:solidFill>
+                <a:latin typeface="Calibri"/>
+              </a:rPr>
+              <a:t>8</a:t>
             </a:r>
           </a:p>
         </p:txBody>
@@ -7941,1832 +12761,6 @@
 </p:sld>
 </file>
 
-<file path=ppt/slides/slide6.xml><?xml version="1.0" encoding="utf-8"?>
-<p:sld xmlns:a="http://schemas.openxmlformats.org/drawingml/2006/main" xmlns:p="http://schemas.openxmlformats.org/presentationml/2006/main" xmlns:r="http://schemas.openxmlformats.org/officeDocument/2006/relationships">
-  <p:cSld>
-    <p:bg>
-      <p:bgPr>
-        <a:solidFill>
-          <a:srgbClr val="FFFFFF"/>
-        </a:solidFill>
-        <a:effectLst/>
-      </p:bgPr>
-    </p:bg>
-    <p:spTree>
-      <p:nvGrpSpPr>
-        <p:cNvPr id="1" name=""/>
-        <p:cNvGrpSpPr/>
-        <p:nvPr/>
-      </p:nvGrpSpPr>
-      <p:grpSpPr/>
-      <p:sp>
-        <p:nvSpPr>
-          <p:cNvPr id="2" name="TextBox 1"/>
-          <p:cNvSpPr txBox="1"/>
-          <p:nvPr/>
-        </p:nvSpPr>
-        <p:spPr>
-          <a:xfrm>
-            <a:off x="548640" y="320040"/>
-            <a:ext cx="11094415" cy="274320"/>
-          </a:xfrm>
-          <a:prstGeom prst="rect">
-            <a:avLst/>
-          </a:prstGeom>
-          <a:noFill/>
-        </p:spPr>
-        <p:txBody>
-          <a:bodyPr wrap="square" anchor="t" lIns="0" rIns="0" tIns="0" bIns="0"/>
-          <a:lstStyle/>
-          <a:p>
-            <a:pPr algn="l"/>
-            <a:r>
-              <a:rPr sz="1100" b="1" i="0">
-                <a:solidFill>
-                  <a:srgbClr val="54595D"/>
-                </a:solidFill>
-                <a:latin typeface="Calibri"/>
-              </a:rPr>
-              <a:t>CYBER SECURITY  ·  Cyber Security Content Area 2</a:t>
-            </a:r>
-          </a:p>
-        </p:txBody>
-      </p:sp>
-      <p:sp>
-        <p:nvSpPr>
-          <p:cNvPr id="3" name="TextBox 2"/>
-          <p:cNvSpPr txBox="1"/>
-          <p:nvPr/>
-        </p:nvSpPr>
-        <p:spPr>
-          <a:xfrm>
-            <a:off x="548640" y="566928"/>
-            <a:ext cx="11094415" cy="822960"/>
-          </a:xfrm>
-          <a:prstGeom prst="rect">
-            <a:avLst/>
-          </a:prstGeom>
-          <a:noFill/>
-        </p:spPr>
-        <p:txBody>
-          <a:bodyPr wrap="square" anchor="ctr" lIns="0" rIns="0" tIns="0" bIns="0"/>
-          <a:lstStyle/>
-          <a:p>
-            <a:pPr algn="l"/>
-            <a:r>
-              <a:rPr sz="3200" b="1" i="0">
-                <a:solidFill>
-                  <a:srgbClr val="03306E"/>
-                </a:solidFill>
-                <a:latin typeface="Cambria"/>
-              </a:rPr>
-              <a:t>Policies that support risk mitigation</a:t>
-            </a:r>
-          </a:p>
-        </p:txBody>
-      </p:sp>
-      <p:sp>
-        <p:nvSpPr>
-          <p:cNvPr id="4" name="TextBox 3"/>
-          <p:cNvSpPr txBox="1"/>
-          <p:nvPr/>
-        </p:nvSpPr>
-        <p:spPr>
-          <a:xfrm>
-            <a:off x="548640" y="6446520"/>
-            <a:ext cx="8229600" cy="274320"/>
-          </a:xfrm>
-          <a:prstGeom prst="rect">
-            <a:avLst/>
-          </a:prstGeom>
-          <a:noFill/>
-        </p:spPr>
-        <p:txBody>
-          <a:bodyPr wrap="square" anchor="t" lIns="0" rIns="0" tIns="0" bIns="0"/>
-          <a:lstStyle/>
-          <a:p>
-            <a:pPr algn="l"/>
-            <a:r>
-              <a:rPr sz="1000" b="0" i="0">
-                <a:solidFill>
-                  <a:srgbClr val="54595D"/>
-                </a:solidFill>
-                <a:latin typeface="Calibri"/>
-              </a:rPr>
-              <a:t>Digital Support and Security T Level  ·  Mitigation, Backups, Policies and Compliance</a:t>
-            </a:r>
-          </a:p>
-        </p:txBody>
-      </p:sp>
-      <p:sp>
-        <p:nvSpPr>
-          <p:cNvPr id="5" name="TextBox 4"/>
-          <p:cNvSpPr txBox="1"/>
-          <p:nvPr/>
-        </p:nvSpPr>
-        <p:spPr>
-          <a:xfrm>
-            <a:off x="10728655" y="6446520"/>
-            <a:ext cx="914400" cy="274320"/>
-          </a:xfrm>
-          <a:prstGeom prst="rect">
-            <a:avLst/>
-          </a:prstGeom>
-          <a:noFill/>
-        </p:spPr>
-        <p:txBody>
-          <a:bodyPr wrap="square" anchor="t" lIns="0" rIns="0" tIns="0" bIns="0"/>
-          <a:lstStyle/>
-          <a:p>
-            <a:pPr algn="r"/>
-            <a:r>
-              <a:rPr sz="1000" b="0" i="0">
-                <a:solidFill>
-                  <a:srgbClr val="54595D"/>
-                </a:solidFill>
-                <a:latin typeface="Calibri"/>
-              </a:rPr>
-              <a:t>6</a:t>
-            </a:r>
-          </a:p>
-        </p:txBody>
-      </p:sp>
-      <p:sp>
-        <p:nvSpPr>
-          <p:cNvPr id="6" name="Rounded Rectangle 5"/>
-          <p:cNvSpPr/>
-          <p:nvPr/>
-        </p:nvSpPr>
-        <p:spPr>
-          <a:xfrm>
-            <a:off x="548640" y="1600200"/>
-            <a:ext cx="5410047" cy="2148840"/>
-          </a:xfrm>
-          <a:prstGeom prst="roundRect">
-            <a:avLst>
-              <a:gd name="adj" fmla="val 6000"/>
-            </a:avLst>
-          </a:prstGeom>
-          <a:solidFill>
-            <a:srgbClr val="EAF3FF"/>
-          </a:solidFill>
-          <a:ln>
-            <a:noFill/>
-          </a:ln>
-          <a:effectLst/>
-        </p:spPr>
-        <p:style>
-          <a:lnRef idx="1">
-            <a:schemeClr val="accent1"/>
-          </a:lnRef>
-          <a:fillRef idx="3">
-            <a:schemeClr val="accent1"/>
-          </a:fillRef>
-          <a:effectRef idx="2">
-            <a:schemeClr val="accent1"/>
-          </a:effectRef>
-          <a:fontRef idx="minor">
-            <a:schemeClr val="lt1"/>
-          </a:fontRef>
-        </p:style>
-        <p:txBody>
-          <a:bodyPr rtlCol="0" anchor="ctr"/>
-          <a:lstStyle/>
-          <a:p/>
-        </p:txBody>
-      </p:sp>
-      <p:sp>
-        <p:nvSpPr>
-          <p:cNvPr id="7" name="Oval 6"/>
-          <p:cNvSpPr/>
-          <p:nvPr/>
-        </p:nvSpPr>
-        <p:spPr>
-          <a:xfrm>
-            <a:off x="777240" y="1828800"/>
-            <a:ext cx="457200" cy="457200"/>
-          </a:xfrm>
-          <a:prstGeom prst="ellipse">
-            <a:avLst/>
-          </a:prstGeom>
-          <a:solidFill>
-            <a:srgbClr val="E0463A"/>
-          </a:solidFill>
-          <a:ln>
-            <a:noFill/>
-          </a:ln>
-          <a:effectLst/>
-        </p:spPr>
-        <p:style>
-          <a:lnRef idx="1">
-            <a:schemeClr val="accent1"/>
-          </a:lnRef>
-          <a:fillRef idx="3">
-            <a:schemeClr val="accent1"/>
-          </a:fillRef>
-          <a:effectRef idx="2">
-            <a:schemeClr val="accent1"/>
-          </a:effectRef>
-          <a:fontRef idx="minor">
-            <a:schemeClr val="lt1"/>
-          </a:fontRef>
-        </p:style>
-        <p:txBody>
-          <a:bodyPr rtlCol="0" anchor="ctr" lIns="0" rIns="0" tIns="0" bIns="0"/>
-          <a:lstStyle/>
-          <a:p>
-            <a:pPr algn="ctr"/>
-            <a:r>
-              <a:rPr sz="1500" b="1">
-                <a:solidFill>
-                  <a:srgbClr val="FFFFFF"/>
-                </a:solidFill>
-                <a:latin typeface="Calibri"/>
-              </a:rPr>
-              <a:t>1</a:t>
-            </a:r>
-          </a:p>
-        </p:txBody>
-      </p:sp>
-      <p:sp>
-        <p:nvSpPr>
-          <p:cNvPr id="8" name="TextBox 7"/>
-          <p:cNvSpPr txBox="1"/>
-          <p:nvPr/>
-        </p:nvSpPr>
-        <p:spPr>
-          <a:xfrm>
-            <a:off x="1371600" y="1801368"/>
-            <a:ext cx="4404207" cy="512064"/>
-          </a:xfrm>
-          <a:prstGeom prst="rect">
-            <a:avLst/>
-          </a:prstGeom>
-          <a:noFill/>
-        </p:spPr>
-        <p:txBody>
-          <a:bodyPr wrap="square" anchor="ctr" lIns="0" rIns="0" tIns="0" bIns="0"/>
-          <a:lstStyle/>
-          <a:p>
-            <a:pPr algn="l"/>
-            <a:r>
-              <a:rPr sz="1900" b="1" i="0">
-                <a:solidFill>
-                  <a:srgbClr val="03306E"/>
-                </a:solidFill>
-                <a:latin typeface="Calibri"/>
-              </a:rPr>
-              <a:t>Data</a:t>
-            </a:r>
-          </a:p>
-        </p:txBody>
-      </p:sp>
-      <p:sp>
-        <p:nvSpPr>
-          <p:cNvPr id="9" name="TextBox 8"/>
-          <p:cNvSpPr txBox="1"/>
-          <p:nvPr/>
-        </p:nvSpPr>
-        <p:spPr>
-          <a:xfrm>
-            <a:off x="777240" y="2468880"/>
-            <a:ext cx="4952847" cy="1143000"/>
-          </a:xfrm>
-          <a:prstGeom prst="rect">
-            <a:avLst/>
-          </a:prstGeom>
-          <a:noFill/>
-        </p:spPr>
-        <p:txBody>
-          <a:bodyPr wrap="square" anchor="t" lIns="0" rIns="0" tIns="0" bIns="0"/>
-          <a:lstStyle/>
-          <a:p>
-            <a:pPr algn="l"/>
-            <a:r>
-              <a:rPr sz="2000" b="0" i="0">
-                <a:solidFill>
-                  <a:srgbClr val="202122"/>
-                </a:solidFill>
-                <a:latin typeface="Calibri"/>
-              </a:rPr>
-              <a:t>Data protection, data retention, asset classification.</a:t>
-            </a:r>
-          </a:p>
-        </p:txBody>
-      </p:sp>
-      <p:sp>
-        <p:nvSpPr>
-          <p:cNvPr id="10" name="Rounded Rectangle 9"/>
-          <p:cNvSpPr/>
-          <p:nvPr/>
-        </p:nvSpPr>
-        <p:spPr>
-          <a:xfrm>
-            <a:off x="6233007" y="1600200"/>
-            <a:ext cx="5410047" cy="2148840"/>
-          </a:xfrm>
-          <a:prstGeom prst="roundRect">
-            <a:avLst>
-              <a:gd name="adj" fmla="val 6000"/>
-            </a:avLst>
-          </a:prstGeom>
-          <a:solidFill>
-            <a:srgbClr val="EAF3FF"/>
-          </a:solidFill>
-          <a:ln>
-            <a:noFill/>
-          </a:ln>
-          <a:effectLst/>
-        </p:spPr>
-        <p:style>
-          <a:lnRef idx="1">
-            <a:schemeClr val="accent1"/>
-          </a:lnRef>
-          <a:fillRef idx="3">
-            <a:schemeClr val="accent1"/>
-          </a:fillRef>
-          <a:effectRef idx="2">
-            <a:schemeClr val="accent1"/>
-          </a:effectRef>
-          <a:fontRef idx="minor">
-            <a:schemeClr val="lt1"/>
-          </a:fontRef>
-        </p:style>
-        <p:txBody>
-          <a:bodyPr rtlCol="0" anchor="ctr"/>
-          <a:lstStyle/>
-          <a:p/>
-        </p:txBody>
-      </p:sp>
-      <p:sp>
-        <p:nvSpPr>
-          <p:cNvPr id="11" name="Oval 10"/>
-          <p:cNvSpPr/>
-          <p:nvPr/>
-        </p:nvSpPr>
-        <p:spPr>
-          <a:xfrm>
-            <a:off x="6461607" y="1828800"/>
-            <a:ext cx="457200" cy="457200"/>
-          </a:xfrm>
-          <a:prstGeom prst="ellipse">
-            <a:avLst/>
-          </a:prstGeom>
-          <a:solidFill>
-            <a:srgbClr val="E0463A"/>
-          </a:solidFill>
-          <a:ln>
-            <a:noFill/>
-          </a:ln>
-          <a:effectLst/>
-        </p:spPr>
-        <p:style>
-          <a:lnRef idx="1">
-            <a:schemeClr val="accent1"/>
-          </a:lnRef>
-          <a:fillRef idx="3">
-            <a:schemeClr val="accent1"/>
-          </a:fillRef>
-          <a:effectRef idx="2">
-            <a:schemeClr val="accent1"/>
-          </a:effectRef>
-          <a:fontRef idx="minor">
-            <a:schemeClr val="lt1"/>
-          </a:fontRef>
-        </p:style>
-        <p:txBody>
-          <a:bodyPr rtlCol="0" anchor="ctr" lIns="0" rIns="0" tIns="0" bIns="0"/>
-          <a:lstStyle/>
-          <a:p>
-            <a:pPr algn="ctr"/>
-            <a:r>
-              <a:rPr sz="1500" b="1">
-                <a:solidFill>
-                  <a:srgbClr val="FFFFFF"/>
-                </a:solidFill>
-                <a:latin typeface="Calibri"/>
-              </a:rPr>
-              <a:t>2</a:t>
-            </a:r>
-          </a:p>
-        </p:txBody>
-      </p:sp>
-      <p:sp>
-        <p:nvSpPr>
-          <p:cNvPr id="12" name="TextBox 11"/>
-          <p:cNvSpPr txBox="1"/>
-          <p:nvPr/>
-        </p:nvSpPr>
-        <p:spPr>
-          <a:xfrm>
-            <a:off x="7055967" y="1801368"/>
-            <a:ext cx="4404207" cy="512064"/>
-          </a:xfrm>
-          <a:prstGeom prst="rect">
-            <a:avLst/>
-          </a:prstGeom>
-          <a:noFill/>
-        </p:spPr>
-        <p:txBody>
-          <a:bodyPr wrap="square" anchor="ctr" lIns="0" rIns="0" tIns="0" bIns="0"/>
-          <a:lstStyle/>
-          <a:p>
-            <a:pPr algn="l"/>
-            <a:r>
-              <a:rPr sz="1900" b="1" i="0">
-                <a:solidFill>
-                  <a:srgbClr val="03306E"/>
-                </a:solidFill>
-                <a:latin typeface="Calibri"/>
-              </a:rPr>
-              <a:t>Access</a:t>
-            </a:r>
-          </a:p>
-        </p:txBody>
-      </p:sp>
-      <p:sp>
-        <p:nvSpPr>
-          <p:cNvPr id="13" name="TextBox 12"/>
-          <p:cNvSpPr txBox="1"/>
-          <p:nvPr/>
-        </p:nvSpPr>
-        <p:spPr>
-          <a:xfrm>
-            <a:off x="6461607" y="2468880"/>
-            <a:ext cx="4952847" cy="1143000"/>
-          </a:xfrm>
-          <a:prstGeom prst="rect">
-            <a:avLst/>
-          </a:prstGeom>
-          <a:noFill/>
-        </p:spPr>
-        <p:txBody>
-          <a:bodyPr wrap="square" anchor="t" lIns="0" rIns="0" tIns="0" bIns="0"/>
-          <a:lstStyle/>
-          <a:p>
-            <a:pPr algn="l"/>
-            <a:r>
-              <a:rPr sz="2000" b="0" i="0">
-                <a:solidFill>
-                  <a:srgbClr val="202122"/>
-                </a:solidFill>
-                <a:latin typeface="Calibri"/>
-              </a:rPr>
-              <a:t>Access control, password, acceptable use.</a:t>
-            </a:r>
-          </a:p>
-        </p:txBody>
-      </p:sp>
-      <p:sp>
-        <p:nvSpPr>
-          <p:cNvPr id="14" name="Rounded Rectangle 13"/>
-          <p:cNvSpPr/>
-          <p:nvPr/>
-        </p:nvSpPr>
-        <p:spPr>
-          <a:xfrm>
-            <a:off x="548640" y="4023360"/>
-            <a:ext cx="5410047" cy="2148840"/>
-          </a:xfrm>
-          <a:prstGeom prst="roundRect">
-            <a:avLst>
-              <a:gd name="adj" fmla="val 6000"/>
-            </a:avLst>
-          </a:prstGeom>
-          <a:solidFill>
-            <a:srgbClr val="EAF3FF"/>
-          </a:solidFill>
-          <a:ln>
-            <a:noFill/>
-          </a:ln>
-          <a:effectLst/>
-        </p:spPr>
-        <p:style>
-          <a:lnRef idx="1">
-            <a:schemeClr val="accent1"/>
-          </a:lnRef>
-          <a:fillRef idx="3">
-            <a:schemeClr val="accent1"/>
-          </a:fillRef>
-          <a:effectRef idx="2">
-            <a:schemeClr val="accent1"/>
-          </a:effectRef>
-          <a:fontRef idx="minor">
-            <a:schemeClr val="lt1"/>
-          </a:fontRef>
-        </p:style>
-        <p:txBody>
-          <a:bodyPr rtlCol="0" anchor="ctr"/>
-          <a:lstStyle/>
-          <a:p/>
-        </p:txBody>
-      </p:sp>
-      <p:sp>
-        <p:nvSpPr>
-          <p:cNvPr id="15" name="Oval 14"/>
-          <p:cNvSpPr/>
-          <p:nvPr/>
-        </p:nvSpPr>
-        <p:spPr>
-          <a:xfrm>
-            <a:off x="777240" y="4251960"/>
-            <a:ext cx="457200" cy="457200"/>
-          </a:xfrm>
-          <a:prstGeom prst="ellipse">
-            <a:avLst/>
-          </a:prstGeom>
-          <a:solidFill>
-            <a:srgbClr val="E0463A"/>
-          </a:solidFill>
-          <a:ln>
-            <a:noFill/>
-          </a:ln>
-          <a:effectLst/>
-        </p:spPr>
-        <p:style>
-          <a:lnRef idx="1">
-            <a:schemeClr val="accent1"/>
-          </a:lnRef>
-          <a:fillRef idx="3">
-            <a:schemeClr val="accent1"/>
-          </a:fillRef>
-          <a:effectRef idx="2">
-            <a:schemeClr val="accent1"/>
-          </a:effectRef>
-          <a:fontRef idx="minor">
-            <a:schemeClr val="lt1"/>
-          </a:fontRef>
-        </p:style>
-        <p:txBody>
-          <a:bodyPr rtlCol="0" anchor="ctr" lIns="0" rIns="0" tIns="0" bIns="0"/>
-          <a:lstStyle/>
-          <a:p>
-            <a:pPr algn="ctr"/>
-            <a:r>
-              <a:rPr sz="1500" b="1">
-                <a:solidFill>
-                  <a:srgbClr val="FFFFFF"/>
-                </a:solidFill>
-                <a:latin typeface="Calibri"/>
-              </a:rPr>
-              <a:t>3</a:t>
-            </a:r>
-          </a:p>
-        </p:txBody>
-      </p:sp>
-      <p:sp>
-        <p:nvSpPr>
-          <p:cNvPr id="16" name="TextBox 15"/>
-          <p:cNvSpPr txBox="1"/>
-          <p:nvPr/>
-        </p:nvSpPr>
-        <p:spPr>
-          <a:xfrm>
-            <a:off x="1371600" y="4224528"/>
-            <a:ext cx="4404207" cy="512064"/>
-          </a:xfrm>
-          <a:prstGeom prst="rect">
-            <a:avLst/>
-          </a:prstGeom>
-          <a:noFill/>
-        </p:spPr>
-        <p:txBody>
-          <a:bodyPr wrap="square" anchor="ctr" lIns="0" rIns="0" tIns="0" bIns="0"/>
-          <a:lstStyle/>
-          <a:p>
-            <a:pPr algn="l"/>
-            <a:r>
-              <a:rPr sz="1900" b="1" i="0">
-                <a:solidFill>
-                  <a:srgbClr val="03306E"/>
-                </a:solidFill>
-                <a:latin typeface="Calibri"/>
-              </a:rPr>
-              <a:t>Devices</a:t>
-            </a:r>
-          </a:p>
-        </p:txBody>
-      </p:sp>
-      <p:sp>
-        <p:nvSpPr>
-          <p:cNvPr id="17" name="TextBox 16"/>
-          <p:cNvSpPr txBox="1"/>
-          <p:nvPr/>
-        </p:nvSpPr>
-        <p:spPr>
-          <a:xfrm>
-            <a:off x="777240" y="4892040"/>
-            <a:ext cx="4952847" cy="1143000"/>
-          </a:xfrm>
-          <a:prstGeom prst="rect">
-            <a:avLst/>
-          </a:prstGeom>
-          <a:noFill/>
-        </p:spPr>
-        <p:txBody>
-          <a:bodyPr wrap="square" anchor="t" lIns="0" rIns="0" tIns="0" bIns="0"/>
-          <a:lstStyle/>
-          <a:p>
-            <a:pPr algn="l"/>
-            <a:r>
-              <a:rPr sz="2000" b="0" i="0">
-                <a:solidFill>
-                  <a:srgbClr val="202122"/>
-                </a:solidFill>
-                <a:latin typeface="Calibri"/>
-              </a:rPr>
-              <a:t>Mobile device, BYOD, asset disposal.</a:t>
-            </a:r>
-          </a:p>
-        </p:txBody>
-      </p:sp>
-      <p:sp>
-        <p:nvSpPr>
-          <p:cNvPr id="18" name="Rounded Rectangle 17"/>
-          <p:cNvSpPr/>
-          <p:nvPr/>
-        </p:nvSpPr>
-        <p:spPr>
-          <a:xfrm>
-            <a:off x="6233007" y="4023360"/>
-            <a:ext cx="5410047" cy="2148840"/>
-          </a:xfrm>
-          <a:prstGeom prst="roundRect">
-            <a:avLst>
-              <a:gd name="adj" fmla="val 6000"/>
-            </a:avLst>
-          </a:prstGeom>
-          <a:solidFill>
-            <a:srgbClr val="EAF3FF"/>
-          </a:solidFill>
-          <a:ln>
-            <a:noFill/>
-          </a:ln>
-          <a:effectLst/>
-        </p:spPr>
-        <p:style>
-          <a:lnRef idx="1">
-            <a:schemeClr val="accent1"/>
-          </a:lnRef>
-          <a:fillRef idx="3">
-            <a:schemeClr val="accent1"/>
-          </a:fillRef>
-          <a:effectRef idx="2">
-            <a:schemeClr val="accent1"/>
-          </a:effectRef>
-          <a:fontRef idx="minor">
-            <a:schemeClr val="lt1"/>
-          </a:fontRef>
-        </p:style>
-        <p:txBody>
-          <a:bodyPr rtlCol="0" anchor="ctr"/>
-          <a:lstStyle/>
-          <a:p/>
-        </p:txBody>
-      </p:sp>
-      <p:sp>
-        <p:nvSpPr>
-          <p:cNvPr id="19" name="Oval 18"/>
-          <p:cNvSpPr/>
-          <p:nvPr/>
-        </p:nvSpPr>
-        <p:spPr>
-          <a:xfrm>
-            <a:off x="6461607" y="4251960"/>
-            <a:ext cx="457200" cy="457200"/>
-          </a:xfrm>
-          <a:prstGeom prst="ellipse">
-            <a:avLst/>
-          </a:prstGeom>
-          <a:solidFill>
-            <a:srgbClr val="E0463A"/>
-          </a:solidFill>
-          <a:ln>
-            <a:noFill/>
-          </a:ln>
-          <a:effectLst/>
-        </p:spPr>
-        <p:style>
-          <a:lnRef idx="1">
-            <a:schemeClr val="accent1"/>
-          </a:lnRef>
-          <a:fillRef idx="3">
-            <a:schemeClr val="accent1"/>
-          </a:fillRef>
-          <a:effectRef idx="2">
-            <a:schemeClr val="accent1"/>
-          </a:effectRef>
-          <a:fontRef idx="minor">
-            <a:schemeClr val="lt1"/>
-          </a:fontRef>
-        </p:style>
-        <p:txBody>
-          <a:bodyPr rtlCol="0" anchor="ctr" lIns="0" rIns="0" tIns="0" bIns="0"/>
-          <a:lstStyle/>
-          <a:p>
-            <a:pPr algn="ctr"/>
-            <a:r>
-              <a:rPr sz="1500" b="1">
-                <a:solidFill>
-                  <a:srgbClr val="FFFFFF"/>
-                </a:solidFill>
-                <a:latin typeface="Calibri"/>
-              </a:rPr>
-              <a:t>4</a:t>
-            </a:r>
-          </a:p>
-        </p:txBody>
-      </p:sp>
-      <p:sp>
-        <p:nvSpPr>
-          <p:cNvPr id="20" name="TextBox 19"/>
-          <p:cNvSpPr txBox="1"/>
-          <p:nvPr/>
-        </p:nvSpPr>
-        <p:spPr>
-          <a:xfrm>
-            <a:off x="7055967" y="4224528"/>
-            <a:ext cx="4404207" cy="512064"/>
-          </a:xfrm>
-          <a:prstGeom prst="rect">
-            <a:avLst/>
-          </a:prstGeom>
-          <a:noFill/>
-        </p:spPr>
-        <p:txBody>
-          <a:bodyPr wrap="square" anchor="ctr" lIns="0" rIns="0" tIns="0" bIns="0"/>
-          <a:lstStyle/>
-          <a:p>
-            <a:pPr algn="l"/>
-            <a:r>
-              <a:rPr sz="1900" b="1" i="0">
-                <a:solidFill>
-                  <a:srgbClr val="03306E"/>
-                </a:solidFill>
-                <a:latin typeface="Calibri"/>
-              </a:rPr>
-              <a:t>Resilience</a:t>
-            </a:r>
-          </a:p>
-        </p:txBody>
-      </p:sp>
-      <p:sp>
-        <p:nvSpPr>
-          <p:cNvPr id="21" name="TextBox 20"/>
-          <p:cNvSpPr txBox="1"/>
-          <p:nvPr/>
-        </p:nvSpPr>
-        <p:spPr>
-          <a:xfrm>
-            <a:off x="6461607" y="4892040"/>
-            <a:ext cx="4952847" cy="1143000"/>
-          </a:xfrm>
-          <a:prstGeom prst="rect">
-            <a:avLst/>
-          </a:prstGeom>
-          <a:noFill/>
-        </p:spPr>
-        <p:txBody>
-          <a:bodyPr wrap="square" anchor="t" lIns="0" rIns="0" tIns="0" bIns="0"/>
-          <a:lstStyle/>
-          <a:p>
-            <a:pPr algn="l"/>
-            <a:r>
-              <a:rPr sz="2000" b="0" i="0">
-                <a:solidFill>
-                  <a:srgbClr val="202122"/>
-                </a:solidFill>
-                <a:latin typeface="Calibri"/>
-              </a:rPr>
-              <a:t>Backup policy, incident response procedure, information security policy.</a:t>
-            </a:r>
-          </a:p>
-        </p:txBody>
-      </p:sp>
-    </p:spTree>
-  </p:cSld>
-  <p:clrMapOvr>
-    <a:masterClrMapping/>
-  </p:clrMapOvr>
-</p:sld>
-</file>
-
-<file path=ppt/slides/slide7.xml><?xml version="1.0" encoding="utf-8"?>
-<p:sld xmlns:a="http://schemas.openxmlformats.org/drawingml/2006/main" xmlns:p="http://schemas.openxmlformats.org/presentationml/2006/main" xmlns:r="http://schemas.openxmlformats.org/officeDocument/2006/relationships">
-  <p:cSld>
-    <p:bg>
-      <p:bgPr>
-        <a:solidFill>
-          <a:srgbClr val="FFFFFF"/>
-        </a:solidFill>
-        <a:effectLst/>
-      </p:bgPr>
-    </p:bg>
-    <p:spTree>
-      <p:nvGrpSpPr>
-        <p:cNvPr id="1" name=""/>
-        <p:cNvGrpSpPr/>
-        <p:nvPr/>
-      </p:nvGrpSpPr>
-      <p:grpSpPr/>
-      <p:sp>
-        <p:nvSpPr>
-          <p:cNvPr id="2" name="TextBox 1"/>
-          <p:cNvSpPr txBox="1"/>
-          <p:nvPr/>
-        </p:nvSpPr>
-        <p:spPr>
-          <a:xfrm>
-            <a:off x="548640" y="320040"/>
-            <a:ext cx="11094415" cy="274320"/>
-          </a:xfrm>
-          <a:prstGeom prst="rect">
-            <a:avLst/>
-          </a:prstGeom>
-          <a:noFill/>
-        </p:spPr>
-        <p:txBody>
-          <a:bodyPr wrap="square" anchor="t" lIns="0" rIns="0" tIns="0" bIns="0"/>
-          <a:lstStyle/>
-          <a:p>
-            <a:pPr algn="l"/>
-            <a:r>
-              <a:rPr sz="1100" b="1" i="0">
-                <a:solidFill>
-                  <a:srgbClr val="54595D"/>
-                </a:solidFill>
-                <a:latin typeface="Calibri"/>
-              </a:rPr>
-              <a:t>CYBER SECURITY  ·  Cyber Security Content Area 2</a:t>
-            </a:r>
-          </a:p>
-        </p:txBody>
-      </p:sp>
-      <p:sp>
-        <p:nvSpPr>
-          <p:cNvPr id="3" name="TextBox 2"/>
-          <p:cNvSpPr txBox="1"/>
-          <p:nvPr/>
-        </p:nvSpPr>
-        <p:spPr>
-          <a:xfrm>
-            <a:off x="548640" y="566928"/>
-            <a:ext cx="11094415" cy="822960"/>
-          </a:xfrm>
-          <a:prstGeom prst="rect">
-            <a:avLst/>
-          </a:prstGeom>
-          <a:noFill/>
-        </p:spPr>
-        <p:txBody>
-          <a:bodyPr wrap="square" anchor="ctr" lIns="0" rIns="0" tIns="0" bIns="0"/>
-          <a:lstStyle/>
-          <a:p>
-            <a:pPr algn="l"/>
-            <a:r>
-              <a:rPr sz="3200" b="1" i="0">
-                <a:solidFill>
-                  <a:srgbClr val="03306E"/>
-                </a:solidFill>
-                <a:latin typeface="Cambria"/>
-              </a:rPr>
-              <a:t>Monitoring compliance</a:t>
-            </a:r>
-          </a:p>
-        </p:txBody>
-      </p:sp>
-      <p:sp>
-        <p:nvSpPr>
-          <p:cNvPr id="4" name="TextBox 3"/>
-          <p:cNvSpPr txBox="1"/>
-          <p:nvPr/>
-        </p:nvSpPr>
-        <p:spPr>
-          <a:xfrm>
-            <a:off x="548640" y="6446520"/>
-            <a:ext cx="8229600" cy="274320"/>
-          </a:xfrm>
-          <a:prstGeom prst="rect">
-            <a:avLst/>
-          </a:prstGeom>
-          <a:noFill/>
-        </p:spPr>
-        <p:txBody>
-          <a:bodyPr wrap="square" anchor="t" lIns="0" rIns="0" tIns="0" bIns="0"/>
-          <a:lstStyle/>
-          <a:p>
-            <a:pPr algn="l"/>
-            <a:r>
-              <a:rPr sz="1000" b="0" i="0">
-                <a:solidFill>
-                  <a:srgbClr val="54595D"/>
-                </a:solidFill>
-                <a:latin typeface="Calibri"/>
-              </a:rPr>
-              <a:t>Digital Support and Security T Level  ·  Mitigation, Backups, Policies and Compliance</a:t>
-            </a:r>
-          </a:p>
-        </p:txBody>
-      </p:sp>
-      <p:sp>
-        <p:nvSpPr>
-          <p:cNvPr id="5" name="TextBox 4"/>
-          <p:cNvSpPr txBox="1"/>
-          <p:nvPr/>
-        </p:nvSpPr>
-        <p:spPr>
-          <a:xfrm>
-            <a:off x="10728655" y="6446520"/>
-            <a:ext cx="914400" cy="274320"/>
-          </a:xfrm>
-          <a:prstGeom prst="rect">
-            <a:avLst/>
-          </a:prstGeom>
-          <a:noFill/>
-        </p:spPr>
-        <p:txBody>
-          <a:bodyPr wrap="square" anchor="t" lIns="0" rIns="0" tIns="0" bIns="0"/>
-          <a:lstStyle/>
-          <a:p>
-            <a:pPr algn="r"/>
-            <a:r>
-              <a:rPr sz="1000" b="0" i="0">
-                <a:solidFill>
-                  <a:srgbClr val="54595D"/>
-                </a:solidFill>
-                <a:latin typeface="Calibri"/>
-              </a:rPr>
-              <a:t>7</a:t>
-            </a:r>
-          </a:p>
-        </p:txBody>
-      </p:sp>
-      <p:sp>
-        <p:nvSpPr>
-          <p:cNvPr id="6" name="TextBox 5"/>
-          <p:cNvSpPr txBox="1"/>
-          <p:nvPr/>
-        </p:nvSpPr>
-        <p:spPr>
-          <a:xfrm>
-            <a:off x="548640" y="1600200"/>
-            <a:ext cx="6675120" cy="4572000"/>
-          </a:xfrm>
-          <a:prstGeom prst="rect">
-            <a:avLst/>
-          </a:prstGeom>
-          <a:noFill/>
-        </p:spPr>
-        <p:txBody>
-          <a:bodyPr wrap="square" lIns="0" rIns="0" tIns="0" bIns="0">
-            <a:spAutoFit/>
-          </a:bodyPr>
-          <a:lstStyle/>
-          <a:p>
-            <a:pPr marL="274320" indent="-274320">
-              <a:spcAft>
-                <a:spcPts val="1080"/>
-              </a:spcAft>
-              <a:buClr>
-                <a:srgbClr val="0645AD"/>
-              </a:buClr>
-              <a:buFont typeface="Arial"/>
-              <a:buChar char="•"/>
-            </a:pPr>
-            <a:r>
-              <a:rPr sz="2400" b="0">
-                <a:solidFill>
-                  <a:srgbClr val="202122"/>
-                </a:solidFill>
-                <a:latin typeface="Calibri"/>
-              </a:rPr>
-              <a:t>Audit processes and policies to check they are current, e.g. review the information security policy.</a:t>
-            </a:r>
-          </a:p>
-          <a:p>
-            <a:pPr marL="274320" indent="-274320">
-              <a:spcAft>
-                <a:spcPts val="1080"/>
-              </a:spcAft>
-              <a:buClr>
-                <a:srgbClr val="0645AD"/>
-              </a:buClr>
-              <a:buFont typeface="Arial"/>
-              <a:buChar char="•"/>
-            </a:pPr>
-            <a:r>
-              <a:rPr sz="2400" b="0">
-                <a:solidFill>
-                  <a:srgbClr val="202122"/>
-                </a:solidFill>
-                <a:latin typeface="Calibri"/>
-              </a:rPr>
-              <a:t>Improve them where needed.</a:t>
-            </a:r>
-          </a:p>
-          <a:p>
-            <a:pPr marL="274320" indent="-274320">
-              <a:spcAft>
-                <a:spcPts val="1080"/>
-              </a:spcAft>
-              <a:buClr>
-                <a:srgbClr val="0645AD"/>
-              </a:buClr>
-              <a:buFont typeface="Arial"/>
-              <a:buChar char="•"/>
-            </a:pPr>
-            <a:r>
-              <a:rPr sz="2400" b="0">
-                <a:solidFill>
-                  <a:srgbClr val="202122"/>
-                </a:solidFill>
-                <a:latin typeface="Calibri"/>
-              </a:rPr>
-              <a:t>Compare and check the accuracy of processes, logs and incident reports.</a:t>
-            </a:r>
-          </a:p>
-          <a:p>
-            <a:pPr marL="274320" indent="-274320">
-              <a:spcAft>
-                <a:spcPts val="1080"/>
-              </a:spcAft>
-              <a:buClr>
-                <a:srgbClr val="0645AD"/>
-              </a:buClr>
-              <a:buFont typeface="Arial"/>
-              <a:buChar char="•"/>
-            </a:pPr>
-            <a:r>
-              <a:rPr sz="2400" b="0">
-                <a:solidFill>
-                  <a:srgbClr val="202122"/>
-                </a:solidFill>
-                <a:latin typeface="Calibri"/>
-              </a:rPr>
-              <a:t>Comply with relevant ISO standards.</a:t>
-            </a:r>
-          </a:p>
-        </p:txBody>
-      </p:sp>
-      <p:sp>
-        <p:nvSpPr>
-          <p:cNvPr id="7" name="Rounded Rectangle 6"/>
-          <p:cNvSpPr/>
-          <p:nvPr/>
-        </p:nvSpPr>
-        <p:spPr>
-          <a:xfrm>
-            <a:off x="7772400" y="1600200"/>
-            <a:ext cx="3867912" cy="4434840"/>
-          </a:xfrm>
-          <a:prstGeom prst="roundRect">
-            <a:avLst>
-              <a:gd name="adj" fmla="val 8000"/>
-            </a:avLst>
-          </a:prstGeom>
-          <a:solidFill>
-            <a:srgbClr val="03306E"/>
-          </a:solidFill>
-          <a:ln>
-            <a:noFill/>
-          </a:ln>
-          <a:effectLst/>
-        </p:spPr>
-        <p:style>
-          <a:lnRef idx="1">
-            <a:schemeClr val="accent1"/>
-          </a:lnRef>
-          <a:fillRef idx="3">
-            <a:schemeClr val="accent1"/>
-          </a:fillRef>
-          <a:effectRef idx="2">
-            <a:schemeClr val="accent1"/>
-          </a:effectRef>
-          <a:fontRef idx="minor">
-            <a:schemeClr val="lt1"/>
-          </a:fontRef>
-        </p:style>
-        <p:txBody>
-          <a:bodyPr rtlCol="0" anchor="ctr"/>
-          <a:lstStyle/>
-          <a:p/>
-        </p:txBody>
-      </p:sp>
-      <p:sp>
-        <p:nvSpPr>
-          <p:cNvPr id="8" name="Oval 7"/>
-          <p:cNvSpPr/>
-          <p:nvPr/>
-        </p:nvSpPr>
-        <p:spPr>
-          <a:xfrm>
-            <a:off x="8046720" y="1874519"/>
-            <a:ext cx="548640" cy="548640"/>
-          </a:xfrm>
-          <a:prstGeom prst="ellipse">
-            <a:avLst/>
-          </a:prstGeom>
-          <a:solidFill>
-            <a:srgbClr val="E0463A"/>
-          </a:solidFill>
-          <a:ln>
-            <a:noFill/>
-          </a:ln>
-          <a:effectLst/>
-        </p:spPr>
-        <p:style>
-          <a:lnRef idx="1">
-            <a:schemeClr val="accent1"/>
-          </a:lnRef>
-          <a:fillRef idx="3">
-            <a:schemeClr val="accent1"/>
-          </a:fillRef>
-          <a:effectRef idx="2">
-            <a:schemeClr val="accent1"/>
-          </a:effectRef>
-          <a:fontRef idx="minor">
-            <a:schemeClr val="lt1"/>
-          </a:fontRef>
-        </p:style>
-        <p:txBody>
-          <a:bodyPr rtlCol="0" anchor="ctr" lIns="0" rIns="0" tIns="0" bIns="0"/>
-          <a:lstStyle/>
-          <a:p>
-            <a:pPr algn="ctr"/>
-            <a:r>
-              <a:rPr sz="2000" b="1">
-                <a:solidFill>
-                  <a:srgbClr val="FFFFFF"/>
-                </a:solidFill>
-                <a:latin typeface="Calibri"/>
-              </a:rPr>
-              <a:t>!</a:t>
-            </a:r>
-          </a:p>
-        </p:txBody>
-      </p:sp>
-      <p:sp>
-        <p:nvSpPr>
-          <p:cNvPr id="9" name="TextBox 8"/>
-          <p:cNvSpPr txBox="1"/>
-          <p:nvPr/>
-        </p:nvSpPr>
-        <p:spPr>
-          <a:xfrm>
-            <a:off x="8046720" y="2606040"/>
-            <a:ext cx="3291840" cy="365760"/>
-          </a:xfrm>
-          <a:prstGeom prst="rect">
-            <a:avLst/>
-          </a:prstGeom>
-          <a:noFill/>
-        </p:spPr>
-        <p:txBody>
-          <a:bodyPr wrap="square" anchor="t" lIns="0" rIns="0" tIns="0" bIns="0"/>
-          <a:lstStyle/>
-          <a:p>
-            <a:pPr algn="l"/>
-            <a:r>
-              <a:rPr sz="1300" b="1" i="0">
-                <a:solidFill>
-                  <a:srgbClr val="A9C8F0"/>
-                </a:solidFill>
-                <a:latin typeface="Calibri"/>
-              </a:rPr>
-              <a:t>KEY IDEA</a:t>
-            </a:r>
-          </a:p>
-        </p:txBody>
-      </p:sp>
-      <p:sp>
-        <p:nvSpPr>
-          <p:cNvPr id="10" name="TextBox 9"/>
-          <p:cNvSpPr txBox="1"/>
-          <p:nvPr/>
-        </p:nvSpPr>
-        <p:spPr>
-          <a:xfrm>
-            <a:off x="8046720" y="3017520"/>
-            <a:ext cx="3291840" cy="2926080"/>
-          </a:xfrm>
-          <a:prstGeom prst="rect">
-            <a:avLst/>
-          </a:prstGeom>
-          <a:noFill/>
-        </p:spPr>
-        <p:txBody>
-          <a:bodyPr wrap="square" anchor="t" lIns="0" rIns="0" tIns="0" bIns="0"/>
-          <a:lstStyle/>
-          <a:p>
-            <a:pPr algn="l"/>
-            <a:r>
-              <a:rPr sz="2200" b="0" i="0">
-                <a:solidFill>
-                  <a:srgbClr val="FFFFFF"/>
-                </a:solidFill>
-                <a:latin typeface="Cambria"/>
-              </a:rPr>
-              <a:t>A policy nobody checks is a wish, not a control.</a:t>
-            </a:r>
-          </a:p>
-        </p:txBody>
-      </p:sp>
-    </p:spTree>
-  </p:cSld>
-  <p:clrMapOvr>
-    <a:masterClrMapping/>
-  </p:clrMapOvr>
-</p:sld>
-</file>
-
-<file path=ppt/slides/slide8.xml><?xml version="1.0" encoding="utf-8"?>
-<p:sld xmlns:a="http://schemas.openxmlformats.org/drawingml/2006/main" xmlns:p="http://schemas.openxmlformats.org/presentationml/2006/main" xmlns:r="http://schemas.openxmlformats.org/officeDocument/2006/relationships">
-  <p:cSld>
-    <p:bg>
-      <p:bgPr>
-        <a:solidFill>
-          <a:srgbClr val="FFFFFF"/>
-        </a:solidFill>
-        <a:effectLst/>
-      </p:bgPr>
-    </p:bg>
-    <p:spTree>
-      <p:nvGrpSpPr>
-        <p:cNvPr id="1" name=""/>
-        <p:cNvGrpSpPr/>
-        <p:nvPr/>
-      </p:nvGrpSpPr>
-      <p:grpSpPr/>
-      <p:sp>
-        <p:nvSpPr>
-          <p:cNvPr id="2" name="TextBox 1"/>
-          <p:cNvSpPr txBox="1"/>
-          <p:nvPr/>
-        </p:nvSpPr>
-        <p:spPr>
-          <a:xfrm>
-            <a:off x="548640" y="320040"/>
-            <a:ext cx="11094415" cy="274320"/>
-          </a:xfrm>
-          <a:prstGeom prst="rect">
-            <a:avLst/>
-          </a:prstGeom>
-          <a:noFill/>
-        </p:spPr>
-        <p:txBody>
-          <a:bodyPr wrap="square" anchor="t" lIns="0" rIns="0" tIns="0" bIns="0"/>
-          <a:lstStyle/>
-          <a:p>
-            <a:pPr algn="l"/>
-            <a:r>
-              <a:rPr sz="1100" b="1" i="0">
-                <a:solidFill>
-                  <a:srgbClr val="54595D"/>
-                </a:solidFill>
-                <a:latin typeface="Calibri"/>
-              </a:rPr>
-              <a:t>CYBER SECURITY  ·  Cyber Security Content Area 2</a:t>
-            </a:r>
-          </a:p>
-        </p:txBody>
-      </p:sp>
-      <p:sp>
-        <p:nvSpPr>
-          <p:cNvPr id="3" name="TextBox 2"/>
-          <p:cNvSpPr txBox="1"/>
-          <p:nvPr/>
-        </p:nvSpPr>
-        <p:spPr>
-          <a:xfrm>
-            <a:off x="548640" y="566928"/>
-            <a:ext cx="11094415" cy="822960"/>
-          </a:xfrm>
-          <a:prstGeom prst="rect">
-            <a:avLst/>
-          </a:prstGeom>
-          <a:noFill/>
-        </p:spPr>
-        <p:txBody>
-          <a:bodyPr wrap="square" anchor="ctr" lIns="0" rIns="0" tIns="0" bIns="0"/>
-          <a:lstStyle/>
-          <a:p>
-            <a:pPr algn="l"/>
-            <a:r>
-              <a:rPr sz="3200" b="1" i="0">
-                <a:solidFill>
-                  <a:srgbClr val="03306E"/>
-                </a:solidFill>
-                <a:latin typeface="Cambria"/>
-              </a:rPr>
-              <a:t>Check your understanding</a:t>
-            </a:r>
-          </a:p>
-        </p:txBody>
-      </p:sp>
-      <p:sp>
-        <p:nvSpPr>
-          <p:cNvPr id="4" name="TextBox 3"/>
-          <p:cNvSpPr txBox="1"/>
-          <p:nvPr/>
-        </p:nvSpPr>
-        <p:spPr>
-          <a:xfrm>
-            <a:off x="548640" y="6446520"/>
-            <a:ext cx="8229600" cy="274320"/>
-          </a:xfrm>
-          <a:prstGeom prst="rect">
-            <a:avLst/>
-          </a:prstGeom>
-          <a:noFill/>
-        </p:spPr>
-        <p:txBody>
-          <a:bodyPr wrap="square" anchor="t" lIns="0" rIns="0" tIns="0" bIns="0"/>
-          <a:lstStyle/>
-          <a:p>
-            <a:pPr algn="l"/>
-            <a:r>
-              <a:rPr sz="1000" b="0" i="0">
-                <a:solidFill>
-                  <a:srgbClr val="54595D"/>
-                </a:solidFill>
-                <a:latin typeface="Calibri"/>
-              </a:rPr>
-              <a:t>Digital Support and Security T Level  ·  Mitigation, Backups, Policies and Compliance</a:t>
-            </a:r>
-          </a:p>
-        </p:txBody>
-      </p:sp>
-      <p:sp>
-        <p:nvSpPr>
-          <p:cNvPr id="5" name="TextBox 4"/>
-          <p:cNvSpPr txBox="1"/>
-          <p:nvPr/>
-        </p:nvSpPr>
-        <p:spPr>
-          <a:xfrm>
-            <a:off x="10728655" y="6446520"/>
-            <a:ext cx="914400" cy="274320"/>
-          </a:xfrm>
-          <a:prstGeom prst="rect">
-            <a:avLst/>
-          </a:prstGeom>
-          <a:noFill/>
-        </p:spPr>
-        <p:txBody>
-          <a:bodyPr wrap="square" anchor="t" lIns="0" rIns="0" tIns="0" bIns="0"/>
-          <a:lstStyle/>
-          <a:p>
-            <a:pPr algn="r"/>
-            <a:r>
-              <a:rPr sz="1000" b="0" i="0">
-                <a:solidFill>
-                  <a:srgbClr val="54595D"/>
-                </a:solidFill>
-                <a:latin typeface="Calibri"/>
-              </a:rPr>
-              <a:t>8</a:t>
-            </a:r>
-          </a:p>
-        </p:txBody>
-      </p:sp>
-      <p:sp>
-        <p:nvSpPr>
-          <p:cNvPr id="6" name="Oval 5"/>
-          <p:cNvSpPr/>
-          <p:nvPr/>
-        </p:nvSpPr>
-        <p:spPr>
-          <a:xfrm>
-            <a:off x="548640" y="1618488"/>
-            <a:ext cx="411480" cy="411480"/>
-          </a:xfrm>
-          <a:prstGeom prst="ellipse">
-            <a:avLst/>
-          </a:prstGeom>
-          <a:solidFill>
-            <a:srgbClr val="E0463A"/>
-          </a:solidFill>
-          <a:ln>
-            <a:noFill/>
-          </a:ln>
-          <a:effectLst/>
-        </p:spPr>
-        <p:style>
-          <a:lnRef idx="1">
-            <a:schemeClr val="accent1"/>
-          </a:lnRef>
-          <a:fillRef idx="3">
-            <a:schemeClr val="accent1"/>
-          </a:fillRef>
-          <a:effectRef idx="2">
-            <a:schemeClr val="accent1"/>
-          </a:effectRef>
-          <a:fontRef idx="minor">
-            <a:schemeClr val="lt1"/>
-          </a:fontRef>
-        </p:style>
-        <p:txBody>
-          <a:bodyPr rtlCol="0" anchor="ctr" lIns="0" rIns="0" tIns="0" bIns="0"/>
-          <a:lstStyle/>
-          <a:p>
-            <a:pPr algn="ctr"/>
-            <a:r>
-              <a:rPr sz="1400" b="1">
-                <a:solidFill>
-                  <a:srgbClr val="FFFFFF"/>
-                </a:solidFill>
-                <a:latin typeface="Calibri"/>
-              </a:rPr>
-              <a:t>1</a:t>
-            </a:r>
-          </a:p>
-        </p:txBody>
-      </p:sp>
-      <p:sp>
-        <p:nvSpPr>
-          <p:cNvPr id="7" name="TextBox 6"/>
-          <p:cNvSpPr txBox="1"/>
-          <p:nvPr/>
-        </p:nvSpPr>
-        <p:spPr>
-          <a:xfrm>
-            <a:off x="1234440" y="1600200"/>
-            <a:ext cx="10408615" cy="791870"/>
-          </a:xfrm>
-          <a:prstGeom prst="rect">
-            <a:avLst/>
-          </a:prstGeom>
-          <a:noFill/>
-        </p:spPr>
-        <p:txBody>
-          <a:bodyPr wrap="square" anchor="t" lIns="0" rIns="0" tIns="0" bIns="0"/>
-          <a:lstStyle/>
-          <a:p>
-            <a:pPr algn="l"/>
-            <a:r>
-              <a:rPr sz="2200" b="0" i="0">
-                <a:solidFill>
-                  <a:srgbClr val="202122"/>
-                </a:solidFill>
-                <a:latin typeface="Calibri"/>
-              </a:rPr>
-              <a:t>What makes a backup immutable?</a:t>
-            </a:r>
-          </a:p>
-        </p:txBody>
-      </p:sp>
-      <p:sp>
-        <p:nvSpPr>
-          <p:cNvPr id="8" name="Oval 7"/>
-          <p:cNvSpPr/>
-          <p:nvPr/>
-        </p:nvSpPr>
-        <p:spPr>
-          <a:xfrm>
-            <a:off x="548640" y="2574950"/>
-            <a:ext cx="411480" cy="411480"/>
-          </a:xfrm>
-          <a:prstGeom prst="ellipse">
-            <a:avLst/>
-          </a:prstGeom>
-          <a:solidFill>
-            <a:srgbClr val="E0463A"/>
-          </a:solidFill>
-          <a:ln>
-            <a:noFill/>
-          </a:ln>
-          <a:effectLst/>
-        </p:spPr>
-        <p:style>
-          <a:lnRef idx="1">
-            <a:schemeClr val="accent1"/>
-          </a:lnRef>
-          <a:fillRef idx="3">
-            <a:schemeClr val="accent1"/>
-          </a:fillRef>
-          <a:effectRef idx="2">
-            <a:schemeClr val="accent1"/>
-          </a:effectRef>
-          <a:fontRef idx="minor">
-            <a:schemeClr val="lt1"/>
-          </a:fontRef>
-        </p:style>
-        <p:txBody>
-          <a:bodyPr rtlCol="0" anchor="ctr" lIns="0" rIns="0" tIns="0" bIns="0"/>
-          <a:lstStyle/>
-          <a:p>
-            <a:pPr algn="ctr"/>
-            <a:r>
-              <a:rPr sz="1400" b="1">
-                <a:solidFill>
-                  <a:srgbClr val="FFFFFF"/>
-                </a:solidFill>
-                <a:latin typeface="Calibri"/>
-              </a:rPr>
-              <a:t>2</a:t>
-            </a:r>
-          </a:p>
-        </p:txBody>
-      </p:sp>
-      <p:sp>
-        <p:nvSpPr>
-          <p:cNvPr id="9" name="TextBox 8"/>
-          <p:cNvSpPr txBox="1"/>
-          <p:nvPr/>
-        </p:nvSpPr>
-        <p:spPr>
-          <a:xfrm>
-            <a:off x="1234440" y="2556662"/>
-            <a:ext cx="10408615" cy="791870"/>
-          </a:xfrm>
-          <a:prstGeom prst="rect">
-            <a:avLst/>
-          </a:prstGeom>
-          <a:noFill/>
-        </p:spPr>
-        <p:txBody>
-          <a:bodyPr wrap="square" anchor="t" lIns="0" rIns="0" tIns="0" bIns="0"/>
-          <a:lstStyle/>
-          <a:p>
-            <a:pPr algn="l"/>
-            <a:r>
-              <a:rPr sz="2200" b="0" i="0">
-                <a:solidFill>
-                  <a:srgbClr val="202122"/>
-                </a:solidFill>
-                <a:latin typeface="Calibri"/>
-              </a:rPr>
-              <a:t>What is PAM used for?</a:t>
-            </a:r>
-          </a:p>
-        </p:txBody>
-      </p:sp>
-      <p:sp>
-        <p:nvSpPr>
-          <p:cNvPr id="10" name="Oval 9"/>
-          <p:cNvSpPr/>
-          <p:nvPr/>
-        </p:nvSpPr>
-        <p:spPr>
-          <a:xfrm>
-            <a:off x="548640" y="3531412"/>
-            <a:ext cx="411480" cy="411480"/>
-          </a:xfrm>
-          <a:prstGeom prst="ellipse">
-            <a:avLst/>
-          </a:prstGeom>
-          <a:solidFill>
-            <a:srgbClr val="E0463A"/>
-          </a:solidFill>
-          <a:ln>
-            <a:noFill/>
-          </a:ln>
-          <a:effectLst/>
-        </p:spPr>
-        <p:style>
-          <a:lnRef idx="1">
-            <a:schemeClr val="accent1"/>
-          </a:lnRef>
-          <a:fillRef idx="3">
-            <a:schemeClr val="accent1"/>
-          </a:fillRef>
-          <a:effectRef idx="2">
-            <a:schemeClr val="accent1"/>
-          </a:effectRef>
-          <a:fontRef idx="minor">
-            <a:schemeClr val="lt1"/>
-          </a:fontRef>
-        </p:style>
-        <p:txBody>
-          <a:bodyPr rtlCol="0" anchor="ctr" lIns="0" rIns="0" tIns="0" bIns="0"/>
-          <a:lstStyle/>
-          <a:p>
-            <a:pPr algn="ctr"/>
-            <a:r>
-              <a:rPr sz="1400" b="1">
-                <a:solidFill>
-                  <a:srgbClr val="FFFFFF"/>
-                </a:solidFill>
-                <a:latin typeface="Calibri"/>
-              </a:rPr>
-              <a:t>3</a:t>
-            </a:r>
-          </a:p>
-        </p:txBody>
-      </p:sp>
-      <p:sp>
-        <p:nvSpPr>
-          <p:cNvPr id="11" name="TextBox 10"/>
-          <p:cNvSpPr txBox="1"/>
-          <p:nvPr/>
-        </p:nvSpPr>
-        <p:spPr>
-          <a:xfrm>
-            <a:off x="1234440" y="3513124"/>
-            <a:ext cx="10408615" cy="791870"/>
-          </a:xfrm>
-          <a:prstGeom prst="rect">
-            <a:avLst/>
-          </a:prstGeom>
-          <a:noFill/>
-        </p:spPr>
-        <p:txBody>
-          <a:bodyPr wrap="square" anchor="t" lIns="0" rIns="0" tIns="0" bIns="0"/>
-          <a:lstStyle/>
-          <a:p>
-            <a:pPr algn="l"/>
-            <a:r>
-              <a:rPr sz="2200" b="0" i="0">
-                <a:solidFill>
-                  <a:srgbClr val="202122"/>
-                </a:solidFill>
-                <a:latin typeface="Calibri"/>
-              </a:rPr>
-              <a:t>Give a mitigation for insider threats.</a:t>
-            </a:r>
-          </a:p>
-        </p:txBody>
-      </p:sp>
-      <p:sp>
-        <p:nvSpPr>
-          <p:cNvPr id="12" name="Oval 11"/>
-          <p:cNvSpPr/>
-          <p:nvPr/>
-        </p:nvSpPr>
-        <p:spPr>
-          <a:xfrm>
-            <a:off x="548640" y="4487875"/>
-            <a:ext cx="411480" cy="411480"/>
-          </a:xfrm>
-          <a:prstGeom prst="ellipse">
-            <a:avLst/>
-          </a:prstGeom>
-          <a:solidFill>
-            <a:srgbClr val="E0463A"/>
-          </a:solidFill>
-          <a:ln>
-            <a:noFill/>
-          </a:ln>
-          <a:effectLst/>
-        </p:spPr>
-        <p:style>
-          <a:lnRef idx="1">
-            <a:schemeClr val="accent1"/>
-          </a:lnRef>
-          <a:fillRef idx="3">
-            <a:schemeClr val="accent1"/>
-          </a:fillRef>
-          <a:effectRef idx="2">
-            <a:schemeClr val="accent1"/>
-          </a:effectRef>
-          <a:fontRef idx="minor">
-            <a:schemeClr val="lt1"/>
-          </a:fontRef>
-        </p:style>
-        <p:txBody>
-          <a:bodyPr rtlCol="0" anchor="ctr" lIns="0" rIns="0" tIns="0" bIns="0"/>
-          <a:lstStyle/>
-          <a:p>
-            <a:pPr algn="ctr"/>
-            <a:r>
-              <a:rPr sz="1400" b="1">
-                <a:solidFill>
-                  <a:srgbClr val="FFFFFF"/>
-                </a:solidFill>
-                <a:latin typeface="Calibri"/>
-              </a:rPr>
-              <a:t>4</a:t>
-            </a:r>
-          </a:p>
-        </p:txBody>
-      </p:sp>
-      <p:sp>
-        <p:nvSpPr>
-          <p:cNvPr id="13" name="TextBox 12"/>
-          <p:cNvSpPr txBox="1"/>
-          <p:nvPr/>
-        </p:nvSpPr>
-        <p:spPr>
-          <a:xfrm>
-            <a:off x="1234440" y="4469587"/>
-            <a:ext cx="10408615" cy="791870"/>
-          </a:xfrm>
-          <a:prstGeom prst="rect">
-            <a:avLst/>
-          </a:prstGeom>
-          <a:noFill/>
-        </p:spPr>
-        <p:txBody>
-          <a:bodyPr wrap="square" anchor="t" lIns="0" rIns="0" tIns="0" bIns="0"/>
-          <a:lstStyle/>
-          <a:p>
-            <a:pPr algn="l"/>
-            <a:r>
-              <a:rPr sz="2200" b="0" i="0">
-                <a:solidFill>
-                  <a:srgbClr val="202122"/>
-                </a:solidFill>
-                <a:latin typeface="Calibri"/>
-              </a:rPr>
-              <a:t>Name four organisational policies.</a:t>
-            </a:r>
-          </a:p>
-        </p:txBody>
-      </p:sp>
-      <p:sp>
-        <p:nvSpPr>
-          <p:cNvPr id="14" name="Oval 13"/>
-          <p:cNvSpPr/>
-          <p:nvPr/>
-        </p:nvSpPr>
-        <p:spPr>
-          <a:xfrm>
-            <a:off x="548640" y="5444337"/>
-            <a:ext cx="411480" cy="411480"/>
-          </a:xfrm>
-          <a:prstGeom prst="ellipse">
-            <a:avLst/>
-          </a:prstGeom>
-          <a:solidFill>
-            <a:srgbClr val="E0463A"/>
-          </a:solidFill>
-          <a:ln>
-            <a:noFill/>
-          </a:ln>
-          <a:effectLst/>
-        </p:spPr>
-        <p:style>
-          <a:lnRef idx="1">
-            <a:schemeClr val="accent1"/>
-          </a:lnRef>
-          <a:fillRef idx="3">
-            <a:schemeClr val="accent1"/>
-          </a:fillRef>
-          <a:effectRef idx="2">
-            <a:schemeClr val="accent1"/>
-          </a:effectRef>
-          <a:fontRef idx="minor">
-            <a:schemeClr val="lt1"/>
-          </a:fontRef>
-        </p:style>
-        <p:txBody>
-          <a:bodyPr rtlCol="0" anchor="ctr" lIns="0" rIns="0" tIns="0" bIns="0"/>
-          <a:lstStyle/>
-          <a:p>
-            <a:pPr algn="ctr"/>
-            <a:r>
-              <a:rPr sz="1400" b="1">
-                <a:solidFill>
-                  <a:srgbClr val="FFFFFF"/>
-                </a:solidFill>
-                <a:latin typeface="Calibri"/>
-              </a:rPr>
-              <a:t>5</a:t>
-            </a:r>
-          </a:p>
-        </p:txBody>
-      </p:sp>
-      <p:sp>
-        <p:nvSpPr>
-          <p:cNvPr id="15" name="TextBox 14"/>
-          <p:cNvSpPr txBox="1"/>
-          <p:nvPr/>
-        </p:nvSpPr>
-        <p:spPr>
-          <a:xfrm>
-            <a:off x="1234440" y="5426049"/>
-            <a:ext cx="10408615" cy="791870"/>
-          </a:xfrm>
-          <a:prstGeom prst="rect">
-            <a:avLst/>
-          </a:prstGeom>
-          <a:noFill/>
-        </p:spPr>
-        <p:txBody>
-          <a:bodyPr wrap="square" anchor="t" lIns="0" rIns="0" tIns="0" bIns="0"/>
-          <a:lstStyle/>
-          <a:p>
-            <a:pPr algn="l"/>
-            <a:r>
-              <a:rPr sz="2200" b="0" i="0">
-                <a:solidFill>
-                  <a:srgbClr val="202122"/>
-                </a:solidFill>
-                <a:latin typeface="Calibri"/>
-              </a:rPr>
-              <a:t>Why test restoring backups?</a:t>
-            </a:r>
-          </a:p>
-        </p:txBody>
-      </p:sp>
-    </p:spTree>
-  </p:cSld>
-  <p:clrMapOvr>
-    <a:masterClrMapping/>
-  </p:clrMapOvr>
-</p:sld>
-</file>
-
 <file path=ppt/slides/slide9.xml><?xml version="1.0" encoding="utf-8"?>
 <p:sld xmlns:a="http://schemas.openxmlformats.org/drawingml/2006/main" xmlns:p="http://schemas.openxmlformats.org/presentationml/2006/main" xmlns:r="http://schemas.openxmlformats.org/officeDocument/2006/relationships">
   <p:cSld>
@@ -9846,7 +12840,7 @@
                 </a:solidFill>
                 <a:latin typeface="Cambria"/>
               </a:rPr>
-              <a:t>Answers</a:t>
+              <a:t>Quick check: Backup types</a:t>
             </a:r>
           </a:p>
         </p:txBody>
@@ -9925,8 +12919,8 @@
         </p:nvSpPr>
         <p:spPr>
           <a:xfrm>
-            <a:off x="548640" y="1618488"/>
-            <a:ext cx="411480" cy="411480"/>
+            <a:off x="548640" y="1691640"/>
+            <a:ext cx="502920" cy="502920"/>
           </a:xfrm>
           <a:prstGeom prst="ellipse">
             <a:avLst/>
@@ -9959,7 +12953,7 @@
           <a:p>
             <a:pPr algn="ctr"/>
             <a:r>
-              <a:rPr sz="1400" b="1">
+              <a:rPr sz="1600" b="1">
                 <a:solidFill>
                   <a:srgbClr val="FFFFFF"/>
                 </a:solidFill>
@@ -9978,8 +12972,8 @@
         </p:nvSpPr>
         <p:spPr>
           <a:xfrm>
-            <a:off x="1234440" y="1600200"/>
-            <a:ext cx="10408615" cy="791870"/>
+            <a:off x="1371600" y="1645920"/>
+            <a:ext cx="10271455" cy="1188720"/>
           </a:xfrm>
           <a:prstGeom prst="rect">
             <a:avLst/>
@@ -9992,24 +12986,13 @@
           <a:p>
             <a:pPr algn="l"/>
             <a:r>
-              <a:rPr sz="1800" b="0" i="0">
-                <a:solidFill>
-                  <a:srgbClr val="54595D"/>
-                </a:solidFill>
-                <a:latin typeface="Calibri"/>
-              </a:rPr>
-              <a:t>What makes a backup immutable?</a:t>
-            </a:r>
-          </a:p>
-          <a:p>
-            <a:r>
-              <a:rPr sz="1800" b="1">
-                <a:solidFill>
-                  <a:srgbClr val="03306E"/>
-                </a:solidFill>
-                <a:latin typeface="Calibri"/>
-              </a:rPr>
-              <a:t>It cannot be changed, overwritten or deleted.</a:t>
+              <a:rPr sz="2400" b="0" i="0">
+                <a:solidFill>
+                  <a:srgbClr val="202122"/>
+                </a:solidFill>
+                <a:latin typeface="Calibri"/>
+              </a:rPr>
+              <a:t>What is an immutable backup?</a:t>
             </a:r>
           </a:p>
         </p:txBody>
@@ -10022,8 +13005,8 @@
         </p:nvSpPr>
         <p:spPr>
           <a:xfrm>
-            <a:off x="548640" y="2574950"/>
-            <a:ext cx="411480" cy="411480"/>
+            <a:off x="548640" y="3108960"/>
+            <a:ext cx="502920" cy="502920"/>
           </a:xfrm>
           <a:prstGeom prst="ellipse">
             <a:avLst/>
@@ -10056,7 +13039,7 @@
           <a:p>
             <a:pPr algn="ctr"/>
             <a:r>
-              <a:rPr sz="1400" b="1">
+              <a:rPr sz="1600" b="1">
                 <a:solidFill>
                   <a:srgbClr val="FFFFFF"/>
                 </a:solidFill>
@@ -10075,8 +13058,8 @@
         </p:nvSpPr>
         <p:spPr>
           <a:xfrm>
-            <a:off x="1234440" y="2556662"/>
-            <a:ext cx="10408615" cy="791870"/>
+            <a:off x="1371600" y="3063240"/>
+            <a:ext cx="10271455" cy="1188720"/>
           </a:xfrm>
           <a:prstGeom prst="rect">
             <a:avLst/>
@@ -10089,24 +13072,13 @@
           <a:p>
             <a:pPr algn="l"/>
             <a:r>
-              <a:rPr sz="1800" b="0" i="0">
-                <a:solidFill>
-                  <a:srgbClr val="54595D"/>
-                </a:solidFill>
-                <a:latin typeface="Calibri"/>
-              </a:rPr>
-              <a:t>What is PAM used for?</a:t>
-            </a:r>
-          </a:p>
-          <a:p>
-            <a:r>
-              <a:rPr sz="1800" b="1">
-                <a:solidFill>
-                  <a:srgbClr val="03306E"/>
-                </a:solidFill>
-                <a:latin typeface="Calibri"/>
-              </a:rPr>
-              <a:t>Managing privileged (elevated) access such as super-user accounts.</a:t>
+              <a:rPr sz="2400" b="0" i="0">
+                <a:solidFill>
+                  <a:srgbClr val="202122"/>
+                </a:solidFill>
+                <a:latin typeface="Calibri"/>
+              </a:rPr>
+              <a:t>Why does ransomware target backups?</a:t>
             </a:r>
           </a:p>
         </p:txBody>
@@ -10119,8 +13091,8 @@
         </p:nvSpPr>
         <p:spPr>
           <a:xfrm>
-            <a:off x="548640" y="3531412"/>
-            <a:ext cx="411480" cy="411480"/>
+            <a:off x="548640" y="4526280"/>
+            <a:ext cx="502920" cy="502920"/>
           </a:xfrm>
           <a:prstGeom prst="ellipse">
             <a:avLst/>
@@ -10153,7 +13125,7 @@
           <a:p>
             <a:pPr algn="ctr"/>
             <a:r>
-              <a:rPr sz="1400" b="1">
+              <a:rPr sz="1600" b="1">
                 <a:solidFill>
                   <a:srgbClr val="FFFFFF"/>
                 </a:solidFill>
@@ -10172,8 +13144,8 @@
         </p:nvSpPr>
         <p:spPr>
           <a:xfrm>
-            <a:off x="1234440" y="3513124"/>
-            <a:ext cx="10408615" cy="791870"/>
+            <a:off x="1371600" y="4480560"/>
+            <a:ext cx="10271455" cy="1188720"/>
           </a:xfrm>
           <a:prstGeom prst="rect">
             <a:avLst/>
@@ -10186,218 +13158,46 @@
           <a:p>
             <a:pPr algn="l"/>
             <a:r>
-              <a:rPr sz="1800" b="0" i="0">
+              <a:rPr sz="2400" b="0" i="0">
+                <a:solidFill>
+                  <a:srgbClr val="202122"/>
+                </a:solidFill>
+                <a:latin typeface="Calibri"/>
+              </a:rPr>
+              <a:t>Why test restores?</a:t>
+            </a:r>
+          </a:p>
+        </p:txBody>
+      </p:sp>
+      <p:sp>
+        <p:nvSpPr>
+          <p:cNvPr id="12" name="TextBox 11"/>
+          <p:cNvSpPr txBox="1"/>
+          <p:nvPr/>
+        </p:nvSpPr>
+        <p:spPr>
+          <a:xfrm>
+            <a:off x="548640" y="5852160"/>
+            <a:ext cx="11094415" cy="365760"/>
+          </a:xfrm>
+          <a:prstGeom prst="rect">
+            <a:avLst/>
+          </a:prstGeom>
+          <a:noFill/>
+        </p:spPr>
+        <p:txBody>
+          <a:bodyPr wrap="square" anchor="t" lIns="0" rIns="0" tIns="0" bIns="0"/>
+          <a:lstStyle/>
+          <a:p>
+            <a:pPr algn="l"/>
+            <a:r>
+              <a:rPr sz="1300" b="0" i="1">
                 <a:solidFill>
                   <a:srgbClr val="54595D"/>
                 </a:solidFill>
                 <a:latin typeface="Calibri"/>
               </a:rPr>
-              <a:t>Give a mitigation for insider threats.</a:t>
-            </a:r>
-          </a:p>
-          <a:p>
-            <a:r>
-              <a:rPr sz="1800" b="1">
-                <a:solidFill>
-                  <a:srgbClr val="03306E"/>
-                </a:solidFill>
-                <a:latin typeface="Calibri"/>
-              </a:rPr>
-              <a:t>Access controls, monitoring unusual activity or segregation of duties.</a:t>
-            </a:r>
-          </a:p>
-        </p:txBody>
-      </p:sp>
-      <p:sp>
-        <p:nvSpPr>
-          <p:cNvPr id="12" name="Oval 11"/>
-          <p:cNvSpPr/>
-          <p:nvPr/>
-        </p:nvSpPr>
-        <p:spPr>
-          <a:xfrm>
-            <a:off x="548640" y="4487875"/>
-            <a:ext cx="411480" cy="411480"/>
-          </a:xfrm>
-          <a:prstGeom prst="ellipse">
-            <a:avLst/>
-          </a:prstGeom>
-          <a:solidFill>
-            <a:srgbClr val="E0463A"/>
-          </a:solidFill>
-          <a:ln>
-            <a:noFill/>
-          </a:ln>
-          <a:effectLst/>
-        </p:spPr>
-        <p:style>
-          <a:lnRef idx="1">
-            <a:schemeClr val="accent1"/>
-          </a:lnRef>
-          <a:fillRef idx="3">
-            <a:schemeClr val="accent1"/>
-          </a:fillRef>
-          <a:effectRef idx="2">
-            <a:schemeClr val="accent1"/>
-          </a:effectRef>
-          <a:fontRef idx="minor">
-            <a:schemeClr val="lt1"/>
-          </a:fontRef>
-        </p:style>
-        <p:txBody>
-          <a:bodyPr rtlCol="0" anchor="ctr" lIns="0" rIns="0" tIns="0" bIns="0"/>
-          <a:lstStyle/>
-          <a:p>
-            <a:pPr algn="ctr"/>
-            <a:r>
-              <a:rPr sz="1400" b="1">
-                <a:solidFill>
-                  <a:srgbClr val="FFFFFF"/>
-                </a:solidFill>
-                <a:latin typeface="Calibri"/>
-              </a:rPr>
-              <a:t>4</a:t>
-            </a:r>
-          </a:p>
-        </p:txBody>
-      </p:sp>
-      <p:sp>
-        <p:nvSpPr>
-          <p:cNvPr id="13" name="TextBox 12"/>
-          <p:cNvSpPr txBox="1"/>
-          <p:nvPr/>
-        </p:nvSpPr>
-        <p:spPr>
-          <a:xfrm>
-            <a:off x="1234440" y="4469587"/>
-            <a:ext cx="10408615" cy="791870"/>
-          </a:xfrm>
-          <a:prstGeom prst="rect">
-            <a:avLst/>
-          </a:prstGeom>
-          <a:noFill/>
-        </p:spPr>
-        <p:txBody>
-          <a:bodyPr wrap="square" anchor="t" lIns="0" rIns="0" tIns="0" bIns="0"/>
-          <a:lstStyle/>
-          <a:p>
-            <a:pPr algn="l"/>
-            <a:r>
-              <a:rPr sz="1800" b="0" i="0">
-                <a:solidFill>
-                  <a:srgbClr val="54595D"/>
-                </a:solidFill>
-                <a:latin typeface="Calibri"/>
-              </a:rPr>
-              <a:t>Name four organisational policies.</a:t>
-            </a:r>
-          </a:p>
-          <a:p>
-            <a:r>
-              <a:rPr sz="1800" b="1">
-                <a:solidFill>
-                  <a:srgbClr val="03306E"/>
-                </a:solidFill>
-                <a:latin typeface="Calibri"/>
-              </a:rPr>
-              <a:t>Any four from the list, e.g. AUP, password, BYOD, backup.</a:t>
-            </a:r>
-          </a:p>
-        </p:txBody>
-      </p:sp>
-      <p:sp>
-        <p:nvSpPr>
-          <p:cNvPr id="14" name="Oval 13"/>
-          <p:cNvSpPr/>
-          <p:nvPr/>
-        </p:nvSpPr>
-        <p:spPr>
-          <a:xfrm>
-            <a:off x="548640" y="5444337"/>
-            <a:ext cx="411480" cy="411480"/>
-          </a:xfrm>
-          <a:prstGeom prst="ellipse">
-            <a:avLst/>
-          </a:prstGeom>
-          <a:solidFill>
-            <a:srgbClr val="E0463A"/>
-          </a:solidFill>
-          <a:ln>
-            <a:noFill/>
-          </a:ln>
-          <a:effectLst/>
-        </p:spPr>
-        <p:style>
-          <a:lnRef idx="1">
-            <a:schemeClr val="accent1"/>
-          </a:lnRef>
-          <a:fillRef idx="3">
-            <a:schemeClr val="accent1"/>
-          </a:fillRef>
-          <a:effectRef idx="2">
-            <a:schemeClr val="accent1"/>
-          </a:effectRef>
-          <a:fontRef idx="minor">
-            <a:schemeClr val="lt1"/>
-          </a:fontRef>
-        </p:style>
-        <p:txBody>
-          <a:bodyPr rtlCol="0" anchor="ctr" lIns="0" rIns="0" tIns="0" bIns="0"/>
-          <a:lstStyle/>
-          <a:p>
-            <a:pPr algn="ctr"/>
-            <a:r>
-              <a:rPr sz="1400" b="1">
-                <a:solidFill>
-                  <a:srgbClr val="FFFFFF"/>
-                </a:solidFill>
-                <a:latin typeface="Calibri"/>
-              </a:rPr>
-              <a:t>5</a:t>
-            </a:r>
-          </a:p>
-        </p:txBody>
-      </p:sp>
-      <p:sp>
-        <p:nvSpPr>
-          <p:cNvPr id="15" name="TextBox 14"/>
-          <p:cNvSpPr txBox="1"/>
-          <p:nvPr/>
-        </p:nvSpPr>
-        <p:spPr>
-          <a:xfrm>
-            <a:off x="1234440" y="5426049"/>
-            <a:ext cx="10408615" cy="791870"/>
-          </a:xfrm>
-          <a:prstGeom prst="rect">
-            <a:avLst/>
-          </a:prstGeom>
-          <a:noFill/>
-        </p:spPr>
-        <p:txBody>
-          <a:bodyPr wrap="square" anchor="t" lIns="0" rIns="0" tIns="0" bIns="0"/>
-          <a:lstStyle/>
-          <a:p>
-            <a:pPr algn="l"/>
-            <a:r>
-              <a:rPr sz="1800" b="0" i="0">
-                <a:solidFill>
-                  <a:srgbClr val="54595D"/>
-                </a:solidFill>
-                <a:latin typeface="Calibri"/>
-              </a:rPr>
-              <a:t>Why test restoring backups?</a:t>
-            </a:r>
-          </a:p>
-          <a:p>
-            <a:r>
-              <a:rPr sz="1800" b="1">
-                <a:solidFill>
-                  <a:srgbClr val="03306E"/>
-                </a:solidFill>
-                <a:latin typeface="Calibri"/>
-              </a:rPr>
-              <a:t>To prove the backups actually work.</a:t>
+              <a:t>Answer on mini whiteboards or in your book. Answers are in the speaker notes.</a:t>
             </a:r>
           </a:p>
         </p:txBody>
